--- a/docs/SCIE_JornadaSociedadesCOSCE_24-sept-2026_v05.pptx
+++ b/docs/SCIE_JornadaSociedadesCOSCE_24-sept-2026_v05.pptx
@@ -5,10 +5,10 @@
     <p:sldMasterId id="2147484127" r:id="rId1"/>
   </p:sldMasterIdLst>
   <p:notesMasterIdLst>
-    <p:notesMasterId r:id="rId27"/>
+    <p:notesMasterId r:id="rId30"/>
   </p:notesMasterIdLst>
   <p:handoutMasterIdLst>
-    <p:handoutMasterId r:id="rId28"/>
+    <p:handoutMasterId r:id="rId31"/>
   </p:handoutMasterIdLst>
   <p:sldIdLst>
     <p:sldId id="256" r:id="rId2"/>
@@ -16,28 +16,29 @@
     <p:sldId id="569" r:id="rId4"/>
     <p:sldId id="560" r:id="rId5"/>
     <p:sldId id="561" r:id="rId6"/>
-    <p:sldId id="558" r:id="rId7"/>
+    <p:sldId id="577" r:id="rId7"/>
     <p:sldId id="570" r:id="rId8"/>
     <p:sldId id="550" r:id="rId9"/>
     <p:sldId id="546" r:id="rId10"/>
     <p:sldId id="562" r:id="rId11"/>
     <p:sldId id="551" r:id="rId12"/>
     <p:sldId id="571" r:id="rId13"/>
-    <p:sldId id="554" r:id="rId14"/>
-    <p:sldId id="563" r:id="rId15"/>
+    <p:sldId id="578" r:id="rId14"/>
+    <p:sldId id="579" r:id="rId15"/>
     <p:sldId id="572" r:id="rId16"/>
     <p:sldId id="543" r:id="rId17"/>
     <p:sldId id="552" r:id="rId18"/>
-    <p:sldId id="564" r:id="rId19"/>
+    <p:sldId id="580" r:id="rId19"/>
     <p:sldId id="565" r:id="rId20"/>
     <p:sldId id="573" r:id="rId21"/>
     <p:sldId id="541" r:id="rId22"/>
     <p:sldId id="559" r:id="rId23"/>
-    <p:sldId id="540" r:id="rId24"/>
-    <p:sldId id="574" r:id="rId25"/>
-    <p:sldId id="575" r:id="rId34"/>
-    <p:sldId id="576" r:id="rId35"/>
-    <p:sldId id="566" r:id="rId26"/>
+    <p:sldId id="581" r:id="rId24"/>
+    <p:sldId id="540" r:id="rId25"/>
+    <p:sldId id="582" r:id="rId26"/>
+    <p:sldId id="575" r:id="rId27"/>
+    <p:sldId id="576" r:id="rId28"/>
+    <p:sldId id="566" r:id="rId29"/>
   </p:sldIdLst>
   <p:sldSz cx="12192000" cy="6858000"/>
   <p:notesSz cx="7099300" cy="10234613"/>
@@ -154,7 +155,7 @@
           <p14:sldIdLst>
             <p14:sldId id="560"/>
             <p14:sldId id="561"/>
-            <p14:sldId id="558"/>
+            <p14:sldId id="577"/>
             <p14:sldId id="570"/>
           </p14:sldIdLst>
         </p14:section>
@@ -169,8 +170,8 @@
         </p14:section>
         <p14:section name="El impacto de los buenos congresos" id="{71E17B30-E7F3-4B80-944F-7CC520310B43}">
           <p14:sldIdLst>
-            <p14:sldId id="554"/>
-            <p14:sldId id="563"/>
+            <p14:sldId id="578"/>
+            <p14:sldId id="579"/>
             <p14:sldId id="572"/>
           </p14:sldIdLst>
         </p14:section>
@@ -178,7 +179,7 @@
           <p14:sldIdLst>
             <p14:sldId id="543"/>
             <p14:sldId id="552"/>
-            <p14:sldId id="564"/>
+            <p14:sldId id="580"/>
             <p14:sldId id="565"/>
             <p14:sldId id="573"/>
           </p14:sldIdLst>
@@ -187,8 +188,11 @@
           <p14:sldIdLst>
             <p14:sldId id="541"/>
             <p14:sldId id="559"/>
+            <p14:sldId id="581"/>
             <p14:sldId id="540"/>
-            <p14:sldId id="574"/>
+            <p14:sldId id="582"/>
+            <p14:sldId id="575"/>
+            <p14:sldId id="576"/>
             <p14:sldId id="566"/>
           </p14:sldIdLst>
         </p14:section>
@@ -1790,6 +1794,146 @@
 </file>
 
 <file path=ppt/notesSlides/notesSlide5.xml><?xml version="1.0" encoding="utf-8"?>
+<p:notes xmlns:a="http://schemas.openxmlformats.org/drawingml/2006/main" xmlns:r="http://schemas.openxmlformats.org/officeDocument/2006/relationships" xmlns:p="http://schemas.openxmlformats.org/presentationml/2006/main">
+  <p:cSld>
+    <p:spTree>
+      <p:nvGrpSpPr>
+        <p:cNvPr id="1" name=""/>
+        <p:cNvGrpSpPr/>
+        <p:nvPr/>
+      </p:nvGrpSpPr>
+      <p:grpSpPr>
+        <a:xfrm>
+          <a:off x="0" y="0"/>
+          <a:ext cx="0" cy="0"/>
+          <a:chOff x="0" y="0"/>
+          <a:chExt cx="0" cy="0"/>
+        </a:xfrm>
+      </p:grpSpPr>
+      <p:sp>
+        <p:nvSpPr>
+          <p:cNvPr id="2" name="Slide Image Placeholder 1"/>
+          <p:cNvSpPr>
+            <a:spLocks noGrp="1" noRot="1" noChangeAspect="1"/>
+          </p:cNvSpPr>
+          <p:nvPr>
+            <p:ph type="sldImg" idx="2"/>
+          </p:nvPr>
+        </p:nvSpPr>
+        <p:spPr/>
+      </p:sp>
+      <p:sp>
+        <p:nvSpPr>
+          <p:cNvPr id="3" name="Notes Placeholder 2"/>
+          <p:cNvSpPr>
+            <a:spLocks noGrp="1"/>
+          </p:cNvSpPr>
+          <p:nvPr>
+            <p:ph type="body" sz="quarter" idx="3"/>
+          </p:nvPr>
+        </p:nvSpPr>
+        <p:spPr/>
+        <p:txBody>
+          <a:bodyPr/>
+          <a:lstStyle/>
+          <a:p>
+            <a:r>
+              <a:t>Mapa del paquete. Izquierda: los tres informes que establecen hechos (A1 disciplina, A2 bibliometría, A3 normativa). Centro: la propuesta, que se apoya en ellos. Derecha: tres cartas, una por destinatario, cada una con lo que ese órgano puede decidir. La COSCE avala el paquete.</a:t>
+            </a:r>
+          </a:p>
+        </p:txBody>
+      </p:sp>
+      <p:sp>
+        <p:nvSpPr>
+          <p:cNvPr id="4" name="Slide Number Placeholder 3"/>
+          <p:cNvSpPr>
+            <a:spLocks noGrp="1"/>
+          </p:cNvSpPr>
+          <p:nvPr>
+            <p:ph type="sldNum" sz="quarter" idx="5"/>
+          </p:nvPr>
+        </p:nvSpPr>
+        <p:spPr/>
+      </p:sp>
+    </p:spTree>
+  </p:cSld>
+  <p:clrMapOvr>
+    <a:masterClrMapping/>
+  </p:clrMapOvr>
+</p:notes>
+</file>
+
+<file path=ppt/notesSlides/notesSlide6.xml><?xml version="1.0" encoding="utf-8"?>
+<p:notes xmlns:a="http://schemas.openxmlformats.org/drawingml/2006/main" xmlns:r="http://schemas.openxmlformats.org/officeDocument/2006/relationships" xmlns:p="http://schemas.openxmlformats.org/presentationml/2006/main">
+  <p:cSld>
+    <p:spTree>
+      <p:nvGrpSpPr>
+        <p:cNvPr id="1" name=""/>
+        <p:cNvGrpSpPr/>
+        <p:nvPr/>
+      </p:nvGrpSpPr>
+      <p:grpSpPr>
+        <a:xfrm>
+          <a:off x="0" y="0"/>
+          <a:ext cx="0" cy="0"/>
+          <a:chOff x="0" y="0"/>
+          <a:chExt cx="0" cy="0"/>
+        </a:xfrm>
+      </p:grpSpPr>
+      <p:sp>
+        <p:nvSpPr>
+          <p:cNvPr id="2" name="Slide Image Placeholder 1"/>
+          <p:cNvSpPr>
+            <a:spLocks noGrp="1" noRot="1" noChangeAspect="1"/>
+          </p:cNvSpPr>
+          <p:nvPr>
+            <p:ph type="sldImg" idx="2"/>
+          </p:nvPr>
+        </p:nvSpPr>
+        <p:spPr/>
+      </p:sp>
+      <p:sp>
+        <p:nvSpPr>
+          <p:cNvPr id="3" name="Notes Placeholder 2"/>
+          <p:cNvSpPr>
+            <a:spLocks noGrp="1"/>
+          </p:cNvSpPr>
+          <p:nvPr>
+            <p:ph type="body" sz="quarter" idx="3"/>
+          </p:nvPr>
+        </p:nvSpPr>
+        <p:spPr/>
+        <p:txBody>
+          <a:bodyPr/>
+          <a:lstStyle/>
+          <a:p>
+            <a:r>
+              <a:t>La franja muestra la inestabilidad (verde: hasta 5 congresos; ámbar: 3; rojo: 2). Fuente: informe A3. Debajo, los tres niveles normativos: la orden fija la categoría y solo la cambia el Ministerio; los criterios fijan el peso y los aprueba la CNEAI; en acreditación el RD 678/2023 no distingue y basta una aclaración de ANECA.</a:t>
+            </a:r>
+          </a:p>
+        </p:txBody>
+      </p:sp>
+      <p:sp>
+        <p:nvSpPr>
+          <p:cNvPr id="4" name="Slide Number Placeholder 3"/>
+          <p:cNvSpPr>
+            <a:spLocks noGrp="1"/>
+          </p:cNvSpPr>
+          <p:nvPr>
+            <p:ph type="sldNum" sz="quarter" idx="5"/>
+          </p:nvPr>
+        </p:nvSpPr>
+        <p:spPr/>
+      </p:sp>
+    </p:spTree>
+  </p:cSld>
+  <p:clrMapOvr>
+    <a:masterClrMapping/>
+  </p:clrMapOvr>
+</p:notes>
+</file>
+
+<file path=ppt/notesSlides/notesSlide7.xml><?xml version="1.0" encoding="utf-8"?>
 <p:notes xmlns:a="http://schemas.openxmlformats.org/drawingml/2006/main" xmlns:p="http://schemas.openxmlformats.org/presentationml/2006/main" xmlns:r="http://schemas.openxmlformats.org/officeDocument/2006/relationships">
   <p:cSld>
     <p:spTree>
@@ -1834,77 +1978,7 @@
           <a:lstStyle/>
           <a:p>
             <a:r>
-              <a:t>Mapa del paquete. Izquierda: los tres informes que establecen hechos (A1 disciplina, A2 bibliometría, A3 normativa). Centro: la propuesta, que se apoya en ellos. Derecha: tres cartas, una por destinatario, cada una con lo que ese órgano puede decidir. La COSCE avala el paquete.</a:t>
-            </a:r>
-          </a:p>
-        </p:txBody>
-      </p:sp>
-      <p:sp>
-        <p:nvSpPr>
-          <p:cNvPr id="4" name="Slide Number Placeholder 3"/>
-          <p:cNvSpPr>
-            <a:spLocks noGrp="1"/>
-          </p:cNvSpPr>
-          <p:nvPr>
-            <p:ph type="sldNum" idx="5" sz="quarter"/>
-          </p:nvPr>
-        </p:nvSpPr>
-        <p:spPr/>
-      </p:sp>
-    </p:spTree>
-  </p:cSld>
-  <p:clrMapOvr>
-    <a:masterClrMapping/>
-  </p:clrMapOvr>
-</p:notes>
-</file>
-
-<file path=ppt/notesSlides/notesSlide6.xml><?xml version="1.0" encoding="utf-8"?>
-<p:notes xmlns:a="http://schemas.openxmlformats.org/drawingml/2006/main" xmlns:p="http://schemas.openxmlformats.org/presentationml/2006/main" xmlns:r="http://schemas.openxmlformats.org/officeDocument/2006/relationships">
-  <p:cSld>
-    <p:spTree>
-      <p:nvGrpSpPr>
-        <p:cNvPr id="1" name=""/>
-        <p:cNvGrpSpPr/>
-        <p:nvPr/>
-      </p:nvGrpSpPr>
-      <p:grpSpPr>
-        <a:xfrm>
-          <a:off x="0" y="0"/>
-          <a:ext cx="0" cy="0"/>
-          <a:chOff x="0" y="0"/>
-          <a:chExt cx="0" cy="0"/>
-        </a:xfrm>
-      </p:grpSpPr>
-      <p:sp>
-        <p:nvSpPr>
-          <p:cNvPr id="2" name="Slide Image Placeholder 1"/>
-          <p:cNvSpPr>
-            <a:spLocks noGrp="1"/>
-          </p:cNvSpPr>
-          <p:nvPr>
-            <p:ph type="sldImg" idx="2"/>
-          </p:nvPr>
-        </p:nvSpPr>
-        <p:spPr/>
-      </p:sp>
-      <p:sp>
-        <p:nvSpPr>
-          <p:cNvPr id="3" name="Notes Placeholder 2"/>
-          <p:cNvSpPr>
-            <a:spLocks noGrp="1"/>
-          </p:cNvSpPr>
-          <p:nvPr>
-            <p:ph type="body" idx="3" sz="quarter"/>
-          </p:nvPr>
-        </p:nvSpPr>
-        <p:spPr/>
-        <p:txBody>
-          <a:bodyPr/>
-          <a:lstStyle/>
-          <a:p>
-            <a:r>
-              <a:t>La franja muestra la inestabilidad (verde: hasta 5 congresos; ámbar: 3; rojo: 2). Fuente: informe A3. Debajo, los tres niveles normativos: la orden fija la categoría y solo la cambia el Ministerio; los criterios fijan el peso y los aprueba la CNEAI; en acreditación el RD 678/2023 no distingue y basta una aclaración de ANECA.</a:t>
+              <a:t>Matiz sobre «congresos excelentes» (línea del Ministerio): la redacción que proponemos para la Orden de 1994 habla de «artículos completos, revisados por pares, publicados en actas de congresos de reconocido prestigio en su ámbito». «Reconocido prestigio» es deliberado: es la misma condición que la orden ya exige a las revistas, y deja que los criterios de cada campo concreten qué congresos la cumplen (en informática, ICORE como indicio). Fuente: Propuesta SCIE, R3 y anexo; A3, §6.2.</a:t>
             </a:r>
           </a:p>
         </p:txBody>
@@ -2864,7 +2938,7 @@
         </p:blipFill>
         <p:spPr>
           <a:xfrm>
-            <a:off x="4084411" y="4581086"/>
+            <a:off x="408000" y="4653000"/>
             <a:ext cx="1939589" cy="749600"/>
           </a:xfrm>
           <a:prstGeom prst="rect">
@@ -2886,7 +2960,7 @@
         </p:nvSpPr>
         <p:spPr>
           <a:xfrm>
-            <a:off x="2747810" y="3329980"/>
+            <a:off x="264000" y="2205000"/>
             <a:ext cx="2202846" cy="907941"/>
           </a:xfrm>
           <a:prstGeom prst="rect">
@@ -3449,7 +3523,7 @@
         </p:blipFill>
         <p:spPr bwMode="auto">
           <a:xfrm>
-            <a:off x="1920000" y="4466772"/>
+            <a:off x="336000" y="3341792"/>
             <a:ext cx="1897990" cy="978228"/>
           </a:xfrm>
           <a:prstGeom prst="rect">
@@ -3549,6 +3623,178 @@
           </a:extLst>
         </p:spPr>
       </p:pic>
+      <p:sp>
+        <p:nvSpPr>
+          <p:cNvPr id="18" name="TextBox 17">
+            <a:extLst>
+              <a:ext uri="{FF2B5EF4-FFF2-40B4-BE49-F238E27FC236}">
+                <a16:creationId xmlns:a16="http://schemas.microsoft.com/office/drawing/2014/main" id="{8AEE882E-056A-4FD0-9534-7A9A1FB5843E}"/>
+              </a:ext>
+            </a:extLst>
+          </p:cNvPr>
+          <p:cNvSpPr txBox="1"/>
+          <p:nvPr userDrawn="1"/>
+        </p:nvSpPr>
+        <p:spPr>
+          <a:xfrm rot="20482584">
+            <a:off x="3257433" y="3301422"/>
+            <a:ext cx="4395754" cy="1431161"/>
+          </a:xfrm>
+          <a:prstGeom prst="rect">
+            <a:avLst/>
+          </a:prstGeom>
+          <a:solidFill>
+            <a:schemeClr val="bg1">
+              <a:lumMod val="95000"/>
+            </a:schemeClr>
+          </a:solidFill>
+        </p:spPr>
+        <p:txBody>
+          <a:bodyPr wrap="none" rtlCol="0" anchor="ctr" anchorCtr="0">
+            <a:spAutoFit/>
+          </a:bodyPr>
+          <a:lstStyle/>
+          <a:p>
+            <a:pPr marL="0" marR="0" lvl="0" indent="0" algn="ctr" defTabSz="914400" rtl="0" eaLnBrk="1" fontAlgn="auto" latinLnBrk="0" hangingPunct="1">
+              <a:lnSpc>
+                <a:spcPct val="100000"/>
+              </a:lnSpc>
+              <a:spcBef>
+                <a:spcPts val="600"/>
+              </a:spcBef>
+              <a:spcAft>
+                <a:spcPts val="0"/>
+              </a:spcAft>
+              <a:buClr>
+                <a:srgbClr val="629DD1"/>
+              </a:buClr>
+              <a:buSzPct val="76000"/>
+              <a:buFont typeface="Wingdings 3"/>
+              <a:buNone/>
+              <a:tabLst/>
+              <a:defRPr/>
+            </a:pPr>
+            <a:r>
+              <a:rPr kumimoji="0" lang="es-ES" sz="1800" b="0" i="0" u="none" strike="noStrike" kern="1200" cap="none" spc="0" normalizeH="0" baseline="0" noProof="0" dirty="0">
+                <a:ln>
+                  <a:noFill/>
+                </a:ln>
+                <a:solidFill>
+                  <a:prstClr val="black"/>
+                </a:solidFill>
+                <a:effectLst/>
+                <a:uLnTx/>
+                <a:uFillTx/>
+                <a:latin typeface="Bookman Old Style"/>
+                <a:ea typeface="+mn-ea"/>
+                <a:cs typeface="+mn-cs"/>
+              </a:rPr>
+              <a:t>Actualización</a:t>
+            </a:r>
+          </a:p>
+          <a:p>
+            <a:pPr marL="0" marR="0" lvl="0" indent="0" algn="ctr" defTabSz="914400" rtl="0" eaLnBrk="1" fontAlgn="auto" latinLnBrk="0" hangingPunct="1">
+              <a:lnSpc>
+                <a:spcPct val="100000"/>
+              </a:lnSpc>
+              <a:spcBef>
+                <a:spcPts val="600"/>
+              </a:spcBef>
+              <a:spcAft>
+                <a:spcPts val="0"/>
+              </a:spcAft>
+              <a:buClr>
+                <a:srgbClr val="629DD1"/>
+              </a:buClr>
+              <a:buSzPct val="76000"/>
+              <a:buFont typeface="Wingdings 3"/>
+              <a:buNone/>
+              <a:tabLst/>
+              <a:defRPr/>
+            </a:pPr>
+            <a:r>
+              <a:rPr kumimoji="0" lang="es-ES" sz="1800" b="1" i="0" u="none" strike="noStrike" kern="1200" cap="none" spc="0" normalizeH="0" baseline="0" noProof="0" dirty="0">
+                <a:ln>
+                  <a:noFill/>
+                </a:ln>
+                <a:solidFill>
+                  <a:prstClr val="black"/>
+                </a:solidFill>
+                <a:effectLst/>
+                <a:uLnTx/>
+                <a:uFillTx/>
+                <a:latin typeface="Bookman Old Style"/>
+                <a:ea typeface="+mn-ea"/>
+                <a:cs typeface="+mn-cs"/>
+              </a:rPr>
+              <a:t>Junta Directiva SCIE</a:t>
+            </a:r>
+          </a:p>
+          <a:p>
+            <a:pPr marL="0" marR="0" lvl="0" indent="0" algn="ctr" defTabSz="914400" rtl="0" eaLnBrk="1" fontAlgn="auto" latinLnBrk="0" hangingPunct="1">
+              <a:lnSpc>
+                <a:spcPct val="100000"/>
+              </a:lnSpc>
+              <a:spcBef>
+                <a:spcPts val="600"/>
+              </a:spcBef>
+              <a:spcAft>
+                <a:spcPts val="0"/>
+              </a:spcAft>
+              <a:buClr>
+                <a:srgbClr val="629DD1"/>
+              </a:buClr>
+              <a:buSzPct val="76000"/>
+              <a:buFont typeface="Wingdings 3"/>
+              <a:buNone/>
+              <a:tabLst/>
+              <a:defRPr/>
+            </a:pPr>
+            <a:r>
+              <a:rPr kumimoji="0" lang="es-ES" sz="1800" b="0" i="0" u="none" strike="noStrike" kern="1200" cap="none" spc="0" normalizeH="0" baseline="0" noProof="0" dirty="0">
+                <a:ln>
+                  <a:noFill/>
+                </a:ln>
+                <a:solidFill>
+                  <a:prstClr val="black"/>
+                </a:solidFill>
+                <a:effectLst/>
+                <a:uLnTx/>
+                <a:uFillTx/>
+                <a:latin typeface="Bookman Old Style"/>
+                <a:ea typeface="+mn-ea"/>
+                <a:cs typeface="+mn-cs"/>
+              </a:rPr>
+              <a:t>+ Antonio Vallecillo, Univ. de Málaga </a:t>
+            </a:r>
+          </a:p>
+          <a:p>
+            <a:pPr marL="0" marR="0" lvl="0" indent="0" algn="ctr" defTabSz="914400" rtl="0" eaLnBrk="1" fontAlgn="auto" latinLnBrk="0" hangingPunct="1">
+              <a:lnSpc>
+                <a:spcPct val="100000"/>
+              </a:lnSpc>
+              <a:spcBef>
+                <a:spcPts val="600"/>
+              </a:spcBef>
+              <a:spcAft>
+                <a:spcPts val="0"/>
+              </a:spcAft>
+              <a:buClr>
+                <a:srgbClr val="629DD1"/>
+              </a:buClr>
+              <a:buSzPct val="76000"/>
+              <a:buFont typeface="Wingdings 3"/>
+              <a:buNone/>
+              <a:tabLst/>
+              <a:defRPr/>
+            </a:pPr>
+            <a:r>
+              <a:rPr lang="es-ES" sz="1800" b="0" dirty="0"/>
+              <a:t>28 octubre 2026</a:t>
+            </a:r>
+          </a:p>
+        </p:txBody>
+      </p:sp>
     </p:spTree>
     <p:extLst>
       <p:ext uri="{BB962C8B-B14F-4D97-AF65-F5344CB8AC3E}">
@@ -4298,8 +4544,42 @@
           <a:lstStyle/>
           <a:p>
             <a:r>
-              <a:rPr lang="en-GB"/>
-              <a:t>Computing energy and power: efficiency and control</a:t>
+              <a:rPr lang="es-ES"/>
+              <a:t>Ecosistema Científico y Tecnológico Español</a:t>
+            </a:r>
+            <a:r>
+              <a:rPr lang="es-ES">
+                <a:latin typeface="Arial Black" panose="020B0A04020102020204" pitchFamily="34" charset="0"/>
+              </a:rPr>
+              <a:t> </a:t>
+            </a:r>
+            <a:r>
+              <a:rPr lang="es-ES">
+                <a:latin typeface="Arial Black" panose="020B0A04020102020204" pitchFamily="34" charset="0"/>
+                <a:sym typeface="Symbol" panose="05050102010706020507" pitchFamily="18" charset="2"/>
+              </a:rPr>
+              <a:t> </a:t>
+            </a:r>
+            <a:r>
+              <a:rPr lang="es-ES"/>
+              <a:t>COSCE 2026</a:t>
+            </a:r>
+            <a:r>
+              <a:rPr lang="es-ES">
+                <a:latin typeface="Arial Black" panose="020B0A04020102020204" pitchFamily="34" charset="0"/>
+              </a:rPr>
+              <a:t> </a:t>
+            </a:r>
+            <a:r>
+              <a:rPr lang="es-ES">
+                <a:latin typeface="Arial Black" panose="020B0A04020102020204" pitchFamily="34" charset="0"/>
+                <a:sym typeface="Symbol" panose="05050102010706020507" pitchFamily="18" charset="2"/>
+              </a:rPr>
+              <a:t> </a:t>
+            </a:r>
+            <a:r>
+              <a:rPr lang="es-ES"/>
+              <a:t>Transferencia y congresos en Informática</a:t>
             </a:r>
             <a:endParaRPr lang="es-ES" dirty="0"/>
           </a:p>
@@ -4520,7 +4800,7 @@
                       </a:pPr>
                       <a:r>
                         <a:rPr lang="en-US" dirty="0"/>
-                        <a:t> 	7.75</a:t>
+                        <a:t> 	7,75</a:t>
                       </a:r>
                       <a:endParaRPr lang="es-ES" dirty="0"/>
                     </a:p>
@@ -4609,7 +4889,7 @@
                       </a:pPr>
                       <a:r>
                         <a:rPr lang="en-US" dirty="0"/>
-                        <a:t>	13.50</a:t>
+                        <a:t>	13,50</a:t>
                       </a:r>
                       <a:endParaRPr lang="es-ES" dirty="0"/>
                     </a:p>
@@ -4690,7 +4970,7 @@
                       </a:pPr>
                       <a:r>
                         <a:rPr lang="en-US" dirty="0"/>
-                        <a:t>	31.13</a:t>
+                        <a:t>	31,13</a:t>
                       </a:r>
                       <a:endParaRPr lang="es-ES" dirty="0"/>
                     </a:p>
@@ -4791,7 +5071,7 @@
                       </a:pPr>
                       <a:r>
                         <a:rPr lang="en-US" dirty="0"/>
-                        <a:t>	47.62</a:t>
+                        <a:t>	47,62</a:t>
                       </a:r>
                       <a:endParaRPr lang="es-ES" dirty="0"/>
                     </a:p>
@@ -5554,7 +5834,7 @@
                   <a:schemeClr val="bg1"/>
                 </a:solidFill>
               </a:rPr>
-              <a:t>Revisión bianual de congresos, última en enero 2026</a:t>
+              <a:t>Revisión bienal de congresos, última en enero 2026</a:t>
             </a:r>
           </a:p>
           <a:p>
@@ -12806,7 +13086,7 @@
                   <a:srgbClr val="FF0000"/>
                 </a:solidFill>
               </a:rPr>
-              <a:t>[3]</a:t>
+              <a:t>[5]</a:t>
             </a:r>
             <a:r>
               <a:rPr lang="es-ES" sz="2000" dirty="0"/>
@@ -12919,6 +13199,7 @@
                 <a:effectLst/>
                 <a:latin typeface="Arial" panose="020B0604020202020204" pitchFamily="34" charset="0"/>
                 <a:ea typeface="Arial" panose="020B0604020202020204" pitchFamily="34" charset="0"/>
+                <a:hlinkClick r:id="rId2"/>
               </a:rPr>
               <a:t>Las publicaciones en congresos de informática: hacia una evaluación científica adecuada a la disciplina</a:t>
             </a:r>
@@ -12946,28 +13227,7 @@
                 <a:latin typeface="Arial" panose="020B0604020202020204" pitchFamily="34" charset="0"/>
                 <a:ea typeface="Arial" panose="020B0604020202020204" pitchFamily="34" charset="0"/>
               </a:rPr>
-              <a:t>Antonio Vallecillo y Víctor Viñals, SCIE, </a:t>
-            </a:r>
-            <a:r>
-              <a:rPr lang="es-ES" sz="1200" dirty="0">
-                <a:solidFill>
-                  <a:srgbClr val="444444"/>
-                </a:solidFill>
-                <a:latin typeface="Arial" panose="020B0604020202020204" pitchFamily="34" charset="0"/>
-                <a:ea typeface="Arial" panose="020B0604020202020204" pitchFamily="34" charset="0"/>
-              </a:rPr>
-              <a:t>septiembre</a:t>
-            </a:r>
-            <a:r>
-              <a:rPr lang="es-ES" sz="1200" dirty="0">
-                <a:solidFill>
-                  <a:srgbClr val="444444"/>
-                </a:solidFill>
-                <a:effectLst/>
-                <a:latin typeface="Arial" panose="020B0604020202020204" pitchFamily="34" charset="0"/>
-                <a:ea typeface="Arial" panose="020B0604020202020204" pitchFamily="34" charset="0"/>
-              </a:rPr>
-              <a:t> 2026</a:t>
+              <a:t>A. Vallecillo, F. Quiles y V. Viñals, SCIE, versión 1.0, octubre de 2026</a:t>
             </a:r>
             <a:endParaRPr lang="es-ES" sz="1200" dirty="0"/>
           </a:p>
@@ -13015,7 +13275,7 @@
                 <a:latin typeface="Arial" panose="020B0604020202020204" pitchFamily="34" charset="0"/>
                 <a:ea typeface="Arial" panose="020B0604020202020204" pitchFamily="34" charset="0"/>
               </a:rPr>
-              <a:t>[3]</a:t>
+              <a:t>[5]</a:t>
             </a:r>
             <a:r>
               <a:rPr lang="en-US" sz="1200" dirty="0">
@@ -14585,7 +14845,7 @@
                   <a:srgbClr val="FF0000"/>
                 </a:solidFill>
               </a:rPr>
-              <a:t>[29]</a:t>
+              <a:t>[2]</a:t>
             </a:r>
             <a:r>
               <a:rPr lang="es-ES" sz="1800" dirty="0"/>
@@ -16228,6 +16488,7 @@
                 <a:effectLst/>
                 <a:latin typeface="Arial" panose="020B0604020202020204" pitchFamily="34" charset="0"/>
                 <a:ea typeface="Arial" panose="020B0604020202020204" pitchFamily="34" charset="0"/>
+                <a:hlinkClick r:id="rId3"/>
               </a:rPr>
               <a:t>Las publicaciones en congresos de informática: hacia una evaluación científica adecuada a la disciplina</a:t>
             </a:r>
@@ -16255,28 +16516,7 @@
                 <a:latin typeface="Arial" panose="020B0604020202020204" pitchFamily="34" charset="0"/>
                 <a:ea typeface="Arial" panose="020B0604020202020204" pitchFamily="34" charset="0"/>
               </a:rPr>
-              <a:t>Antonio Vallecillo y Víctor Viñals, SCIE, </a:t>
-            </a:r>
-            <a:r>
-              <a:rPr lang="es-ES" sz="1200" dirty="0">
-                <a:solidFill>
-                  <a:srgbClr val="444444"/>
-                </a:solidFill>
-                <a:latin typeface="Arial" panose="020B0604020202020204" pitchFamily="34" charset="0"/>
-                <a:ea typeface="Arial" panose="020B0604020202020204" pitchFamily="34" charset="0"/>
-              </a:rPr>
-              <a:t>septiembre</a:t>
-            </a:r>
-            <a:r>
-              <a:rPr lang="es-ES" sz="1200" dirty="0">
-                <a:solidFill>
-                  <a:srgbClr val="444444"/>
-                </a:solidFill>
-                <a:effectLst/>
-                <a:latin typeface="Arial" panose="020B0604020202020204" pitchFamily="34" charset="0"/>
-                <a:ea typeface="Arial" panose="020B0604020202020204" pitchFamily="34" charset="0"/>
-              </a:rPr>
-              <a:t> 2026</a:t>
+              <a:t>A. Vallecillo, F. Quiles y V. Viñals, SCIE, versión 1.0, octubre de 2026</a:t>
             </a:r>
             <a:endParaRPr lang="es-ES" sz="1200" dirty="0"/>
           </a:p>
@@ -16324,7 +16564,7 @@
                 <a:latin typeface="Arial" panose="020B0604020202020204" pitchFamily="34" charset="0"/>
                 <a:ea typeface="Arial" panose="020B0604020202020204" pitchFamily="34" charset="0"/>
               </a:rPr>
-              <a:t>[29]</a:t>
+              <a:t>[2]</a:t>
             </a:r>
             <a:r>
               <a:rPr lang="en-US" sz="1200" dirty="0">
@@ -18900,7 +19140,7 @@
         </p:nvSpPr>
         <p:spPr>
           <a:xfrm>
-            <a:off x="609600" y="980646"/>
+            <a:off x="518157" y="839325"/>
             <a:ext cx="11246400" cy="576354"/>
           </a:xfrm>
         </p:spPr>
@@ -19215,6 +19455,7 @@
                 <a:effectLst/>
                 <a:latin typeface="Arial" panose="020B0604020202020204" pitchFamily="34" charset="0"/>
                 <a:ea typeface="Arial" panose="020B0604020202020204" pitchFamily="34" charset="0"/>
+                <a:hlinkClick r:id="rId3"/>
               </a:rPr>
               <a:t>Las publicaciones en congresos de informática: hacia una evaluación científica adecuada a la disciplina</a:t>
             </a:r>
@@ -19242,28 +19483,7 @@
                 <a:latin typeface="Arial" panose="020B0604020202020204" pitchFamily="34" charset="0"/>
                 <a:ea typeface="Arial" panose="020B0604020202020204" pitchFamily="34" charset="0"/>
               </a:rPr>
-              <a:t>Antonio Vallecillo y Víctor Viñals, SCIE, </a:t>
-            </a:r>
-            <a:r>
-              <a:rPr lang="es-ES" sz="1200" dirty="0">
-                <a:solidFill>
-                  <a:srgbClr val="444444"/>
-                </a:solidFill>
-                <a:latin typeface="Arial" panose="020B0604020202020204" pitchFamily="34" charset="0"/>
-                <a:ea typeface="Arial" panose="020B0604020202020204" pitchFamily="34" charset="0"/>
-              </a:rPr>
-              <a:t>septiembre</a:t>
-            </a:r>
-            <a:r>
-              <a:rPr lang="es-ES" sz="1200" dirty="0">
-                <a:solidFill>
-                  <a:srgbClr val="444444"/>
-                </a:solidFill>
-                <a:effectLst/>
-                <a:latin typeface="Arial" panose="020B0604020202020204" pitchFamily="34" charset="0"/>
-                <a:ea typeface="Arial" panose="020B0604020202020204" pitchFamily="34" charset="0"/>
-              </a:rPr>
-              <a:t> 2026</a:t>
+              <a:t>A. Vallecillo, F. Quiles y V. Viñals, SCIE, versión 1.0, octubre de 2026</a:t>
             </a:r>
             <a:endParaRPr lang="es-ES" sz="1200" dirty="0"/>
           </a:p>
@@ -19284,14 +19504,14 @@
           <p:nvPr>
             <p:extLst>
               <p:ext uri="{D42A27DB-BD31-4B8C-83A1-F6EECF244321}">
-                <p14:modId xmlns:p14="http://schemas.microsoft.com/office/powerpoint/2010/main" val="2718050680"/>
+                <p14:modId xmlns:p14="http://schemas.microsoft.com/office/powerpoint/2010/main" val="3011418033"/>
               </p:ext>
             </p:extLst>
           </p:nvPr>
         </p:nvGraphicFramePr>
         <p:xfrm>
-          <a:off x="100790" y="1491870"/>
-          <a:ext cx="9739210" cy="4720429"/>
+          <a:off x="100790" y="1350549"/>
+          <a:ext cx="9739210" cy="4933789"/>
         </p:xfrm>
         <a:graphic>
           <a:graphicData uri="http://schemas.openxmlformats.org/drawingml/2006/table">
@@ -20175,7 +20395,7 @@
                         <a:rPr lang="es-ES" sz="1400" dirty="0" err="1">
                           <a:effectLst/>
                         </a:rPr>
-                        <a:t>Llicencia</a:t>
+                        <a:t>Licencia</a:t>
                       </a:r>
                       <a:r>
                         <a:rPr lang="es-ES" sz="1400" dirty="0">
@@ -20907,7 +21127,7 @@
                           <a:ea typeface="+mn-ea"/>
                           <a:cs typeface="+mn-cs"/>
                         </a:rPr>
-                        <a:t>US 9.811.732 (</a:t>
+                        <a:t>US 9.836.641 (</a:t>
                       </a:r>
                       <a:r>
                         <a:rPr kumimoji="0" lang="es-ES" sz="1400" kern="1200" dirty="0" err="1">
@@ -20931,7 +21151,7 @@
                           <a:ea typeface="+mn-ea"/>
                           <a:cs typeface="+mn-cs"/>
                         </a:rPr>
-                        <a:t>. dic.2014, sol. dic. 2015, </a:t>
+                        <a:t>. dic. 2014, sol. dic. 2015, </a:t>
                       </a:r>
                       <a:r>
                         <a:rPr kumimoji="0" lang="es-ES" sz="1400" kern="1200" dirty="0" err="1">
@@ -20955,7 +21175,7 @@
                           <a:ea typeface="+mn-ea"/>
                           <a:cs typeface="+mn-cs"/>
                         </a:rPr>
-                        <a:t>. 2020). </a:t>
+                        <a:t>. dic. 2017). </a:t>
                       </a:r>
                       <a:r>
                         <a:rPr kumimoji="0" lang="es-ES" sz="1400" kern="1200">
@@ -21272,7 +21492,9 @@
           </a:xfrm>
         </p:spPr>
         <p:txBody>
-          <a:bodyPr/>
+          <a:bodyPr>
+            <a:normAutofit fontScale="92500"/>
+          </a:bodyPr>
           <a:lstStyle/>
           <a:p>
             <a:r>
@@ -21326,7 +21548,7 @@
             <a:pPr lvl="1"/>
             <a:r>
               <a:rPr lang="es-ES" dirty="0"/>
-              <a:t>20 patentes en informática mas citadas en 2020 x 10 áreas =</a:t>
+              <a:t>20 patentes en informática más citadas con prioridad en 2020 × 10 áreas =</a:t>
             </a:r>
             <a:br>
               <a:rPr lang="es-ES" dirty="0"/>
@@ -24800,8 +25022,42 @@
           <a:lstStyle/>
           <a:p>
             <a:r>
-              <a:rPr lang="en-GB" dirty="0"/>
-              <a:t>Computing energy and power: efficiency and control</a:t>
+              <a:rPr lang="es-ES"/>
+              <a:t>Ecosistema Científico y Tecnológico Español</a:t>
+            </a:r>
+            <a:r>
+              <a:rPr lang="es-ES">
+                <a:latin typeface="Arial Black" panose="020B0A04020102020204" pitchFamily="34" charset="0"/>
+              </a:rPr>
+              <a:t> </a:t>
+            </a:r>
+            <a:r>
+              <a:rPr lang="es-ES">
+                <a:latin typeface="Arial Black" panose="020B0A04020102020204" pitchFamily="34" charset="0"/>
+                <a:sym typeface="Symbol" panose="05050102010706020507" pitchFamily="18" charset="2"/>
+              </a:rPr>
+              <a:t> </a:t>
+            </a:r>
+            <a:r>
+              <a:rPr lang="es-ES"/>
+              <a:t>COSCE 2026</a:t>
+            </a:r>
+            <a:r>
+              <a:rPr lang="es-ES">
+                <a:latin typeface="Arial Black" panose="020B0A04020102020204" pitchFamily="34" charset="0"/>
+              </a:rPr>
+              <a:t> </a:t>
+            </a:r>
+            <a:r>
+              <a:rPr lang="es-ES">
+                <a:latin typeface="Arial Black" panose="020B0A04020102020204" pitchFamily="34" charset="0"/>
+                <a:sym typeface="Symbol" panose="05050102010706020507" pitchFamily="18" charset="2"/>
+              </a:rPr>
+              <a:t> </a:t>
+            </a:r>
+            <a:r>
+              <a:rPr lang="es-ES"/>
+              <a:t>Transferencia y congresos en Informática</a:t>
             </a:r>
             <a:endParaRPr lang="es-ES" dirty="0"/>
           </a:p>
@@ -25327,8 +25583,42 @@
           <a:lstStyle/>
           <a:p>
             <a:r>
-              <a:rPr lang="en-GB"/>
-              <a:t>Computing energy and power: efficiency and control</a:t>
+              <a:rPr lang="es-ES"/>
+              <a:t>Ecosistema Científico y Tecnológico Español</a:t>
+            </a:r>
+            <a:r>
+              <a:rPr lang="es-ES">
+                <a:latin typeface="Arial Black" panose="020B0A04020102020204" pitchFamily="34" charset="0"/>
+              </a:rPr>
+              <a:t> </a:t>
+            </a:r>
+            <a:r>
+              <a:rPr lang="es-ES">
+                <a:latin typeface="Arial Black" panose="020B0A04020102020204" pitchFamily="34" charset="0"/>
+                <a:sym typeface="Symbol" panose="05050102010706020507" pitchFamily="18" charset="2"/>
+              </a:rPr>
+              <a:t> </a:t>
+            </a:r>
+            <a:r>
+              <a:rPr lang="es-ES"/>
+              <a:t>COSCE 2026</a:t>
+            </a:r>
+            <a:r>
+              <a:rPr lang="es-ES">
+                <a:latin typeface="Arial Black" panose="020B0A04020102020204" pitchFamily="34" charset="0"/>
+              </a:rPr>
+              <a:t> </a:t>
+            </a:r>
+            <a:r>
+              <a:rPr lang="es-ES">
+                <a:latin typeface="Arial Black" panose="020B0A04020102020204" pitchFamily="34" charset="0"/>
+                <a:sym typeface="Symbol" panose="05050102010706020507" pitchFamily="18" charset="2"/>
+              </a:rPr>
+              <a:t> </a:t>
+            </a:r>
+            <a:r>
+              <a:rPr lang="es-ES"/>
+              <a:t>Transferencia y congresos en Informática</a:t>
             </a:r>
             <a:endParaRPr lang="es-ES" dirty="0"/>
           </a:p>
@@ -25532,7 +25822,7 @@
 </file>
 
 <file path=ppt/slides/slide22.xml><?xml version="1.0" encoding="utf-8"?>
-<p:sld xmlns:a="http://schemas.openxmlformats.org/drawingml/2006/main" xmlns:r="http://schemas.openxmlformats.org/officeDocument/2006/relationships" xmlns:p="http://schemas.openxmlformats.org/presentationml/2006/main">
+<p:sld xmlns:a="http://schemas.openxmlformats.org/drawingml/2006/main" xmlns:r="http://schemas.openxmlformats.org/officeDocument/2006/relationships" xmlns:p="http://schemas.openxmlformats.org/presentationml/2006/main" show="0">
   <p:cSld>
     <p:spTree>
       <p:nvGrpSpPr>
@@ -25607,7 +25897,11 @@
           <a:lstStyle/>
           <a:p>
             <a:r>
-              <a:rPr lang="es-ES" sz="2800" dirty="0"/>
+              <a:rPr lang="es-ES" sz="2800" dirty="0">
+                <a:highlight>
+                  <a:srgbClr val="FFFF00"/>
+                </a:highlight>
+              </a:rPr>
               <a:t>ANECA puede conseguirlo</a:t>
             </a:r>
           </a:p>
@@ -25644,7 +25938,11 @@
               <a:t>A*</a:t>
             </a:r>
             <a:r>
-              <a:rPr lang="es-ES" dirty="0"/>
+              <a:rPr lang="es-ES" dirty="0">
+                <a:highlight>
+                  <a:srgbClr val="FFFF00"/>
+                </a:highlight>
+              </a:rPr>
               <a:t> o </a:t>
             </a:r>
             <a:r>
@@ -25656,7 +25954,11 @@
               <a:t>A</a:t>
             </a:r>
             <a:r>
-              <a:rPr lang="es-ES" dirty="0"/>
+              <a:rPr lang="es-ES" dirty="0">
+                <a:highlight>
+                  <a:srgbClr val="FFFF00"/>
+                </a:highlight>
+              </a:rPr>
               <a:t> o </a:t>
             </a:r>
             <a:r>
@@ -25664,11 +25966,18 @@
                 <a:solidFill>
                   <a:srgbClr val="0000FF"/>
                 </a:solidFill>
+                <a:highlight>
+                  <a:srgbClr val="FFFF00"/>
+                </a:highlight>
               </a:rPr>
               <a:t>B</a:t>
             </a:r>
             <a:r>
-              <a:rPr lang="es-ES" dirty="0"/>
+              <a:rPr lang="es-ES" dirty="0">
+                <a:highlight>
+                  <a:srgbClr val="FFFF00"/>
+                </a:highlight>
+              </a:rPr>
               <a:t> en ICORE = aportaciones ordinarias</a:t>
             </a:r>
           </a:p>
@@ -25709,11 +26018,18 @@
                 <a:solidFill>
                   <a:srgbClr val="0000FF"/>
                 </a:solidFill>
+                <a:highlight>
+                  <a:srgbClr val="FFFF00"/>
+                </a:highlight>
               </a:rPr>
               <a:t>B</a:t>
             </a:r>
             <a:r>
-              <a:rPr lang="es-ES" dirty="0"/>
+              <a:rPr lang="es-ES" dirty="0">
+                <a:highlight>
+                  <a:srgbClr val="FFFF00"/>
+                </a:highlight>
+              </a:rPr>
               <a:t>  equiparable a revista Q2/Q3</a:t>
             </a:r>
           </a:p>
@@ -25732,14 +26048,22 @@
               <a:t>C</a:t>
             </a:r>
             <a:r>
-              <a:rPr lang="es-ES" dirty="0"/>
+              <a:rPr lang="es-ES" dirty="0">
+                <a:highlight>
+                  <a:srgbClr val="FFFF00"/>
+                </a:highlight>
+              </a:rPr>
               <a:t> = aportaciones extraordinarias,</a:t>
             </a:r>
             <a:br>
               <a:rPr lang="es-ES" dirty="0"/>
             </a:br>
             <a:r>
-              <a:rPr lang="es-ES" dirty="0"/>
+              <a:rPr lang="es-ES" dirty="0">
+                <a:highlight>
+                  <a:srgbClr val="FFFF00"/>
+                </a:highlight>
+              </a:rPr>
               <a:t>hasta un máximo de dos,</a:t>
             </a:r>
             <a:br>
@@ -25890,6 +26214,541 @@
         <p:spPr>
           <a:xfrm>
             <a:off x="2086542" y="281706"/>
+            <a:ext cx="8617458" cy="559930"/>
+          </a:xfrm>
+        </p:spPr>
+        <p:txBody>
+          <a:bodyPr/>
+          <a:lstStyle/>
+          <a:p>
+            <a:r>
+              <a:rPr lang="es-ES" dirty="0"/>
+              <a:t>Conclusiones II – </a:t>
+            </a:r>
+            <a:r>
+              <a:rPr lang="es-ES" sz="2400" i="1" dirty="0"/>
+              <a:t>Versión 24 </a:t>
+            </a:r>
+            <a:r>
+              <a:rPr lang="es-ES" sz="2400" i="1" dirty="0" err="1"/>
+              <a:t>sep</a:t>
+            </a:r>
+            <a:r>
+              <a:rPr lang="es-ES" sz="2400" i="1" dirty="0"/>
+              <a:t> 2026</a:t>
+            </a:r>
+            <a:endParaRPr lang="es-ES" i="1" dirty="0"/>
+          </a:p>
+        </p:txBody>
+      </p:sp>
+      <p:cxnSp>
+        <p:nvCxnSpPr>
+          <p:cNvPr id="12" name="Tachado (transparencia sustituida)"/>
+          <p:cNvCxnSpPr/>
+          <p:nvPr/>
+        </p:nvCxnSpPr>
+        <p:spPr>
+          <a:xfrm>
+            <a:off x="0" y="0"/>
+            <a:ext cx="12192000" cy="6858000"/>
+          </a:xfrm>
+          <a:prstGeom prst="line">
+            <a:avLst/>
+          </a:prstGeom>
+          <a:ln w="57150">
+            <a:solidFill>
+              <a:srgbClr val="FF0000"/>
+            </a:solidFill>
+          </a:ln>
+        </p:spPr>
+        <p:style>
+          <a:lnRef idx="2">
+            <a:schemeClr val="accent1"/>
+          </a:lnRef>
+          <a:fillRef idx="0">
+            <a:schemeClr val="accent1"/>
+          </a:fillRef>
+          <a:effectRef idx="1">
+            <a:schemeClr val="accent1"/>
+          </a:effectRef>
+          <a:fontRef idx="minor">
+            <a:schemeClr val="tx1"/>
+          </a:fontRef>
+        </p:style>
+      </p:cxnSp>
+    </p:spTree>
+    <p:extLst>
+      <p:ext uri="{BB962C8B-B14F-4D97-AF65-F5344CB8AC3E}">
+        <p14:creationId xmlns:p14="http://schemas.microsoft.com/office/powerpoint/2010/main" val="1854788262"/>
+      </p:ext>
+    </p:extLst>
+  </p:cSld>
+  <p:clrMapOvr>
+    <a:masterClrMapping/>
+  </p:clrMapOvr>
+  <mc:AlternateContent xmlns:mc="http://schemas.openxmlformats.org/markup-compatibility/2006">
+    <mc:Choice xmlns:p159="http://schemas.microsoft.com/office/powerpoint/2015/09/main" Requires="p159">
+      <p:transition xmlns:p14="http://schemas.microsoft.com/office/powerpoint/2010/main" spd="slow" p14:dur="2000">
+        <p159:morph option="byObject"/>
+      </p:transition>
+    </mc:Choice>
+    <mc:Fallback>
+      <p:transition spd="slow">
+        <p:fade/>
+      </p:transition>
+    </mc:Fallback>
+  </mc:AlternateContent>
+</p:sld>
+</file>
+
+<file path=ppt/slides/slide23.xml><?xml version="1.0" encoding="utf-8"?>
+<p:sld xmlns:a="http://schemas.openxmlformats.org/drawingml/2006/main" xmlns:r="http://schemas.openxmlformats.org/officeDocument/2006/relationships" xmlns:p="http://schemas.openxmlformats.org/presentationml/2006/main">
+  <p:cSld>
+    <p:spTree>
+      <p:nvGrpSpPr>
+        <p:cNvPr id="1" name=""/>
+        <p:cNvGrpSpPr/>
+        <p:nvPr/>
+      </p:nvGrpSpPr>
+      <p:grpSpPr>
+        <a:xfrm>
+          <a:off x="0" y="0"/>
+          <a:ext cx="0" cy="0"/>
+          <a:chOff x="0" y="0"/>
+          <a:chExt cx="0" cy="0"/>
+        </a:xfrm>
+      </p:grpSpPr>
+      <p:sp>
+        <p:nvSpPr>
+          <p:cNvPr id="4" name="Slide Number Placeholder 3">
+            <a:extLst>
+              <a:ext uri="{FF2B5EF4-FFF2-40B4-BE49-F238E27FC236}">
+                <a16:creationId xmlns:a16="http://schemas.microsoft.com/office/drawing/2014/main" id="{C1593594-8660-48A7-B865-0CE050ACE2B9}"/>
+              </a:ext>
+            </a:extLst>
+          </p:cNvPr>
+          <p:cNvSpPr>
+            <a:spLocks noGrp="1"/>
+          </p:cNvSpPr>
+          <p:nvPr>
+            <p:ph type="sldNum" sz="quarter" idx="12"/>
+          </p:nvPr>
+        </p:nvSpPr>
+        <p:spPr/>
+        <p:txBody>
+          <a:bodyPr/>
+          <a:lstStyle/>
+          <a:p>
+            <a:fld id="{4A490C5D-AEA8-4823-B9B3-806910A0ECF7}" type="slidenum">
+              <a:rPr lang="es-ES" smtClean="0"/>
+              <a:pPr/>
+              <a:t>23</a:t>
+            </a:fld>
+            <a:endParaRPr lang="es-ES" dirty="0"/>
+          </a:p>
+        </p:txBody>
+      </p:sp>
+      <p:sp>
+        <p:nvSpPr>
+          <p:cNvPr id="7" name="Content Placeholder 6">
+            <a:extLst>
+              <a:ext uri="{FF2B5EF4-FFF2-40B4-BE49-F238E27FC236}">
+                <a16:creationId xmlns:a16="http://schemas.microsoft.com/office/drawing/2014/main" id="{C51B06FD-9ECD-4845-8633-B40F21BDE144}"/>
+              </a:ext>
+            </a:extLst>
+          </p:cNvPr>
+          <p:cNvSpPr>
+            <a:spLocks noGrp="1"/>
+          </p:cNvSpPr>
+          <p:nvPr>
+            <p:ph sz="quarter" idx="1"/>
+          </p:nvPr>
+        </p:nvSpPr>
+        <p:spPr>
+          <a:xfrm>
+            <a:off x="609600" y="980646"/>
+            <a:ext cx="7430400" cy="5108776"/>
+          </a:xfrm>
+        </p:spPr>
+        <p:txBody>
+          <a:bodyPr>
+            <a:normAutofit fontScale="85000" lnSpcReduction="20000"/>
+          </a:bodyPr>
+          <a:lstStyle/>
+          <a:p>
+            <a:pPr>
+              <a:lnSpc>
+                <a:spcPct val="120000"/>
+              </a:lnSpc>
+            </a:pPr>
+            <a:r>
+              <a:rPr lang="es-ES" sz="2800" dirty="0"/>
+              <a:t>CNEAI y ANECA pueden empezar ya;</a:t>
+            </a:r>
+            <a:br>
+              <a:rPr lang="es-ES" sz="2800" dirty="0"/>
+            </a:br>
+            <a:r>
+              <a:rPr lang="es-ES" sz="2800" dirty="0"/>
+              <a:t>el Ministerio, consolidarlo</a:t>
+            </a:r>
+          </a:p>
+          <a:p>
+            <a:pPr>
+              <a:lnSpc>
+                <a:spcPct val="120000"/>
+              </a:lnSpc>
+              <a:spcBef>
+                <a:spcPts val="1200"/>
+              </a:spcBef>
+            </a:pPr>
+            <a:r>
+              <a:rPr lang="es-ES" sz="2800" dirty="0"/>
+              <a:t>Subcampo de Informática:</a:t>
+            </a:r>
+          </a:p>
+          <a:p>
+            <a:pPr lvl="1">
+              <a:lnSpc>
+                <a:spcPct val="120000"/>
+              </a:lnSpc>
+              <a:spcBef>
+                <a:spcPts val="600"/>
+              </a:spcBef>
+            </a:pPr>
+            <a:r>
+              <a:rPr lang="es-ES" dirty="0"/>
+              <a:t>Publicaciones en congresos </a:t>
+            </a:r>
+            <a:r>
+              <a:rPr lang="es-ES" b="1" dirty="0">
+                <a:solidFill>
+                  <a:srgbClr val="0000FF"/>
+                </a:solidFill>
+              </a:rPr>
+              <a:t>A*</a:t>
+            </a:r>
+            <a:r>
+              <a:rPr lang="es-ES" dirty="0"/>
+              <a:t> o </a:t>
+            </a:r>
+            <a:r>
+              <a:rPr lang="es-ES" b="1" dirty="0">
+                <a:solidFill>
+                  <a:srgbClr val="0000FF"/>
+                </a:solidFill>
+              </a:rPr>
+              <a:t>A</a:t>
+            </a:r>
+            <a:r>
+              <a:rPr lang="es-ES" dirty="0"/>
+              <a:t> en ICORE</a:t>
+            </a:r>
+            <a:br>
+              <a:rPr lang="es-ES" dirty="0"/>
+            </a:br>
+            <a:r>
+              <a:rPr lang="es-ES" dirty="0"/>
+              <a:t>= peso que las revistas de calidad contrastada</a:t>
+            </a:r>
+          </a:p>
+          <a:p>
+            <a:pPr lvl="2">
+              <a:lnSpc>
+                <a:spcPct val="120000"/>
+              </a:lnSpc>
+            </a:pPr>
+            <a:r>
+              <a:rPr lang="es-ES" b="1" dirty="0">
+                <a:solidFill>
+                  <a:srgbClr val="0000FF"/>
+                </a:solidFill>
+              </a:rPr>
+              <a:t>A*</a:t>
+            </a:r>
+            <a:r>
+              <a:rPr lang="es-ES" dirty="0"/>
+              <a:t> equiparable funcionalmente a revista Q1</a:t>
+            </a:r>
+          </a:p>
+          <a:p>
+            <a:pPr lvl="2">
+              <a:lnSpc>
+                <a:spcPct val="120000"/>
+              </a:lnSpc>
+            </a:pPr>
+            <a:r>
+              <a:rPr lang="es-ES" b="1" dirty="0">
+                <a:solidFill>
+                  <a:srgbClr val="0000FF"/>
+                </a:solidFill>
+              </a:rPr>
+              <a:t>A</a:t>
+            </a:r>
+            <a:r>
+              <a:rPr lang="es-ES" dirty="0"/>
+              <a:t> equiparable a revista Q1/Q2</a:t>
+            </a:r>
+          </a:p>
+          <a:p>
+            <a:pPr lvl="2">
+              <a:lnSpc>
+                <a:spcPct val="120000"/>
+              </a:lnSpc>
+            </a:pPr>
+            <a:r>
+              <a:rPr lang="es-ES" dirty="0"/>
+              <a:t>cupo de extraordinarias de 3 a 5; criterio bienal y transitorio</a:t>
+            </a:r>
+          </a:p>
+          <a:p>
+            <a:pPr lvl="1">
+              <a:lnSpc>
+                <a:spcPct val="120000"/>
+              </a:lnSpc>
+              <a:spcBef>
+                <a:spcPts val="600"/>
+              </a:spcBef>
+            </a:pPr>
+            <a:r>
+              <a:rPr lang="es-ES" b="1" dirty="0">
+                <a:solidFill>
+                  <a:srgbClr val="0000FF"/>
+                </a:solidFill>
+              </a:rPr>
+              <a:t>B</a:t>
+            </a:r>
+            <a:r>
+              <a:rPr lang="es-ES" dirty="0"/>
+              <a:t> valoración contextual (≈ Q2/Q3), dentro del cupo general</a:t>
+            </a:r>
+          </a:p>
+          <a:p>
+            <a:pPr lvl="1">
+              <a:lnSpc>
+                <a:spcPct val="120000"/>
+              </a:lnSpc>
+              <a:spcBef>
+                <a:spcPts val="600"/>
+              </a:spcBef>
+            </a:pPr>
+            <a:r>
+              <a:rPr lang="es-ES" b="1" dirty="0">
+                <a:solidFill>
+                  <a:srgbClr val="0000FF"/>
+                </a:solidFill>
+              </a:rPr>
+              <a:t>C</a:t>
+            </a:r>
+            <a:r>
+              <a:rPr lang="es-ES" dirty="0"/>
+              <a:t> y no clasificados: sin presunción, justificación específica</a:t>
+            </a:r>
+          </a:p>
+          <a:p>
+            <a:pPr>
+              <a:lnSpc>
+                <a:spcPct val="120000"/>
+              </a:lnSpc>
+              <a:spcBef>
+                <a:spcPts val="1200"/>
+              </a:spcBef>
+            </a:pPr>
+            <a:r>
+              <a:rPr lang="es-ES" sz="2800" dirty="0"/>
+              <a:t>Ministerio: modificar el art. 7.2 de la Orden de 1994</a:t>
+            </a:r>
+          </a:p>
+          <a:p>
+            <a:pPr lvl="1">
+              <a:lnSpc>
+                <a:spcPct val="120000"/>
+              </a:lnSpc>
+              <a:spcBef>
+                <a:spcPts val="600"/>
+              </a:spcBef>
+            </a:pPr>
+            <a:r>
+              <a:rPr lang="es-ES" dirty="0"/>
+              <a:t>artículos completos en congresos de prestigio</a:t>
+            </a:r>
+            <a:br>
+              <a:rPr lang="es-ES" dirty="0"/>
+            </a:br>
+            <a:r>
+              <a:rPr lang="es-ES" dirty="0"/>
+              <a:t>= ordinarios (</a:t>
+            </a:r>
+            <a:r>
+              <a:rPr lang="es-ES" b="1" dirty="0"/>
+              <a:t>todas</a:t>
+            </a:r>
+            <a:r>
+              <a:rPr lang="es-ES" dirty="0"/>
+              <a:t> las disciplinas)</a:t>
+            </a:r>
+          </a:p>
+        </p:txBody>
+      </p:sp>
+      <p:grpSp>
+        <p:nvGrpSpPr>
+          <p:cNvPr id="2" name="Group 1">
+            <a:extLst>
+              <a:ext uri="{FF2B5EF4-FFF2-40B4-BE49-F238E27FC236}">
+                <a16:creationId xmlns:a16="http://schemas.microsoft.com/office/drawing/2014/main" id="{ED1C0170-ACDD-482C-B759-55A080DA1A87}"/>
+              </a:ext>
+            </a:extLst>
+          </p:cNvPr>
+          <p:cNvGrpSpPr/>
+          <p:nvPr/>
+        </p:nvGrpSpPr>
+        <p:grpSpPr>
+          <a:xfrm>
+            <a:off x="7824000" y="909000"/>
+            <a:ext cx="4068011" cy="3144019"/>
+            <a:chOff x="8112000" y="788981"/>
+            <a:chExt cx="4068011" cy="3144019"/>
+          </a:xfrm>
+        </p:grpSpPr>
+        <p:pic>
+          <p:nvPicPr>
+            <p:cNvPr id="8" name="Picture 4" descr="out of the blue - rayo fotografías e imágenes de stock">
+              <a:extLst>
+                <a:ext uri="{FF2B5EF4-FFF2-40B4-BE49-F238E27FC236}">
+                  <a16:creationId xmlns:a16="http://schemas.microsoft.com/office/drawing/2014/main" id="{48FA7DD3-8C36-45D9-8560-2A838BF572F8}"/>
+                </a:ext>
+              </a:extLst>
+            </p:cNvPr>
+            <p:cNvPicPr>
+              <a:picLocks noChangeAspect="1" noChangeArrowheads="1"/>
+            </p:cNvPicPr>
+            <p:nvPr/>
+          </p:nvPicPr>
+          <p:blipFill rotWithShape="1">
+            <a:blip r:embed="rId2">
+              <a:extLst>
+                <a:ext uri="{28A0092B-C50C-407E-A947-70E740481C1C}">
+                  <a14:useLocalDpi xmlns:a14="http://schemas.microsoft.com/office/drawing/2010/main" val="0"/>
+                </a:ext>
+              </a:extLst>
+            </a:blip>
+            <a:srcRect l="24882" t="25477"/>
+            <a:stretch/>
+          </p:blipFill>
+          <p:spPr bwMode="auto">
+            <a:xfrm>
+              <a:off x="8112000" y="1242457"/>
+              <a:ext cx="4068011" cy="2690543"/>
+            </a:xfrm>
+            <a:prstGeom prst="rect">
+              <a:avLst/>
+            </a:prstGeom>
+            <a:ln>
+              <a:noFill/>
+            </a:ln>
+            <a:effectLst>
+              <a:softEdge rad="112500"/>
+            </a:effectLst>
+            <a:extLst>
+              <a:ext uri="{909E8E84-426E-40DD-AFC4-6F175D3DCCD1}">
+                <a14:hiddenFill xmlns:a14="http://schemas.microsoft.com/office/drawing/2010/main">
+                  <a:solidFill>
+                    <a:srgbClr val="FFFFFF"/>
+                  </a:solidFill>
+                </a14:hiddenFill>
+              </a:ext>
+            </a:extLst>
+          </p:spPr>
+        </p:pic>
+        <p:sp>
+          <p:nvSpPr>
+            <p:cNvPr id="9" name="Thought Bubble: Cloud 8">
+              <a:extLst>
+                <a:ext uri="{FF2B5EF4-FFF2-40B4-BE49-F238E27FC236}">
+                  <a16:creationId xmlns:a16="http://schemas.microsoft.com/office/drawing/2014/main" id="{5D52EDCC-AC99-4491-9E4D-367044E43521}"/>
+                </a:ext>
+              </a:extLst>
+            </p:cNvPr>
+            <p:cNvSpPr/>
+            <p:nvPr/>
+          </p:nvSpPr>
+          <p:spPr>
+            <a:xfrm>
+              <a:off x="8940011" y="788981"/>
+              <a:ext cx="1080000" cy="648000"/>
+            </a:xfrm>
+            <a:prstGeom prst="cloudCallout">
+              <a:avLst>
+                <a:gd name="adj1" fmla="val 10329"/>
+                <a:gd name="adj2" fmla="val 50986"/>
+              </a:avLst>
+            </a:prstGeom>
+            <a:solidFill>
+              <a:srgbClr val="E8F0F6"/>
+            </a:solidFill>
+            <a:ln w="12700">
+              <a:solidFill>
+                <a:srgbClr val="42527B"/>
+              </a:solidFill>
+            </a:ln>
+          </p:spPr>
+          <p:style>
+            <a:lnRef idx="2">
+              <a:schemeClr val="accent1">
+                <a:shade val="50000"/>
+              </a:schemeClr>
+            </a:lnRef>
+            <a:fillRef idx="1">
+              <a:schemeClr val="accent1"/>
+            </a:fillRef>
+            <a:effectRef idx="0">
+              <a:schemeClr val="accent1"/>
+            </a:effectRef>
+            <a:fontRef idx="minor">
+              <a:schemeClr val="lt1"/>
+            </a:fontRef>
+          </p:style>
+          <p:txBody>
+            <a:bodyPr rot="0" spcFirstLastPara="0" vertOverflow="overflow" horzOverflow="overflow" vert="horz" wrap="square" lIns="0" tIns="0" rIns="0" bIns="0" numCol="1" spcCol="0" rtlCol="0" fromWordArt="0" anchor="ctr" anchorCtr="0" forceAA="0" compatLnSpc="1">
+              <a:prstTxWarp prst="textNoShape">
+                <a:avLst/>
+              </a:prstTxWarp>
+              <a:noAutofit/>
+            </a:bodyPr>
+            <a:lstStyle/>
+            <a:p>
+              <a:pPr algn="ctr"/>
+              <a:r>
+                <a:rPr lang="es-ES" sz="2000" dirty="0">
+                  <a:solidFill>
+                    <a:schemeClr val="tx1"/>
+                  </a:solidFill>
+                </a:rPr>
+                <a:t>BOE</a:t>
+              </a:r>
+            </a:p>
+          </p:txBody>
+        </p:sp>
+      </p:grpSp>
+      <p:sp>
+        <p:nvSpPr>
+          <p:cNvPr id="11" name="Title 1">
+            <a:extLst>
+              <a:ext uri="{FF2B5EF4-FFF2-40B4-BE49-F238E27FC236}">
+                <a16:creationId xmlns:a16="http://schemas.microsoft.com/office/drawing/2014/main" id="{DF8E4C30-72BA-4FF2-9A5E-D8159236899B}"/>
+              </a:ext>
+            </a:extLst>
+          </p:cNvPr>
+          <p:cNvSpPr>
+            <a:spLocks noGrp="1"/>
+          </p:cNvSpPr>
+          <p:nvPr>
+            <p:ph type="title"/>
+          </p:nvPr>
+        </p:nvSpPr>
+        <p:spPr>
+          <a:xfrm>
+            <a:off x="2086542" y="281706"/>
             <a:ext cx="3937458" cy="559930"/>
           </a:xfrm>
         </p:spPr>
@@ -25929,7 +26788,7 @@
 </p:sld>
 </file>
 
-<file path=ppt/slides/slide23.xml><?xml version="1.0" encoding="utf-8"?>
+<file path=ppt/slides/slide24.xml><?xml version="1.0" encoding="utf-8"?>
 <p:sld xmlns:a="http://schemas.openxmlformats.org/drawingml/2006/main" xmlns:r="http://schemas.openxmlformats.org/officeDocument/2006/relationships" xmlns:p="http://schemas.openxmlformats.org/presentationml/2006/main">
   <p:cSld>
     <p:spTree>
@@ -25997,8 +26856,42 @@
           <a:lstStyle/>
           <a:p>
             <a:r>
-              <a:rPr lang="en-GB"/>
-              <a:t>Computing energy and power: efficiency and control</a:t>
+              <a:rPr lang="es-ES"/>
+              <a:t>Ecosistema Científico y Tecnológico Español</a:t>
+            </a:r>
+            <a:r>
+              <a:rPr lang="es-ES">
+                <a:latin typeface="Arial Black" panose="020B0A04020102020204" pitchFamily="34" charset="0"/>
+              </a:rPr>
+              <a:t> </a:t>
+            </a:r>
+            <a:r>
+              <a:rPr lang="es-ES">
+                <a:latin typeface="Arial Black" panose="020B0A04020102020204" pitchFamily="34" charset="0"/>
+                <a:sym typeface="Symbol" panose="05050102010706020507" pitchFamily="18" charset="2"/>
+              </a:rPr>
+              <a:t> </a:t>
+            </a:r>
+            <a:r>
+              <a:rPr lang="es-ES"/>
+              <a:t>COSCE 2026</a:t>
+            </a:r>
+            <a:r>
+              <a:rPr lang="es-ES">
+                <a:latin typeface="Arial Black" panose="020B0A04020102020204" pitchFamily="34" charset="0"/>
+              </a:rPr>
+              <a:t> </a:t>
+            </a:r>
+            <a:r>
+              <a:rPr lang="es-ES">
+                <a:latin typeface="Arial Black" panose="020B0A04020102020204" pitchFamily="34" charset="0"/>
+                <a:sym typeface="Symbol" panose="05050102010706020507" pitchFamily="18" charset="2"/>
+              </a:rPr>
+              <a:t> </a:t>
+            </a:r>
+            <a:r>
+              <a:rPr lang="es-ES"/>
+              <a:t>Transferencia y congresos en Informática</a:t>
             </a:r>
             <a:endParaRPr lang="es-ES" dirty="0"/>
           </a:p>
@@ -26028,7 +26921,7 @@
             <a:fld id="{4A490C5D-AEA8-4823-B9B3-806910A0ECF7}" type="slidenum">
               <a:rPr lang="es-ES" smtClean="0"/>
               <a:pPr/>
-              <a:t>23</a:t>
+              <a:t>24</a:t>
             </a:fld>
             <a:endParaRPr lang="es-ES" dirty="0"/>
           </a:p>
@@ -26276,7 +27169,7 @@
 </p:sld>
 </file>
 
-<file path=ppt/slides/slide24.xml><?xml version="1.0" encoding="utf-8"?>
+<file path=ppt/slides/slide25.xml><?xml version="1.0" encoding="utf-8"?>
 <p:sld xmlns:a="http://schemas.openxmlformats.org/drawingml/2006/main" xmlns:r="http://schemas.openxmlformats.org/officeDocument/2006/relationships" xmlns:p="http://schemas.openxmlformats.org/presentationml/2006/main">
   <p:cSld>
     <p:spTree>
@@ -26408,7 +27301,7 @@
             <a:fld id="{4A490C5D-AEA8-4823-B9B3-806910A0ECF7}" type="slidenum">
               <a:rPr lang="es-ES" smtClean="0"/>
               <a:pPr/>
-              <a:t>24</a:t>
+              <a:t>25</a:t>
             </a:fld>
             <a:endParaRPr lang="es-ES" dirty="0"/>
           </a:p>
@@ -26430,16 +27323,21 @@
             <p:ph sz="quarter" idx="1"/>
           </p:nvPr>
         </p:nvSpPr>
-        <p:spPr/>
+        <p:spPr>
+          <a:xfrm>
+            <a:off x="609600" y="980646"/>
+            <a:ext cx="10972800" cy="5256354"/>
+          </a:xfrm>
+        </p:spPr>
         <p:txBody>
           <a:bodyPr>
-            <a:normAutofit fontScale="92500" lnSpcReduction="10000"/>
+            <a:normAutofit fontScale="77500" lnSpcReduction="20000"/>
           </a:bodyPr>
           <a:lstStyle/>
           <a:p>
             <a:pPr>
               <a:lnSpc>
-                <a:spcPct val="110000"/>
+                <a:spcPct val="120000"/>
               </a:lnSpc>
             </a:pPr>
             <a:r>
@@ -26450,7 +27348,7 @@
           <a:p>
             <a:pPr lvl="1">
               <a:lnSpc>
-                <a:spcPct val="110000"/>
+                <a:spcPct val="120000"/>
               </a:lnSpc>
             </a:pPr>
             <a:r>
@@ -26461,84 +27359,126 @@
           <a:p>
             <a:pPr lvl="1">
               <a:lnSpc>
-                <a:spcPct val="110000"/>
+                <a:spcPct val="120000"/>
               </a:lnSpc>
             </a:pPr>
             <a:r>
               <a:rPr lang="es-ES" dirty="0"/>
-              <a:t>ANECA ya se ha comprometido a ello al adherirse a </a:t>
-            </a:r>
-            <a:r>
-              <a:rPr lang="es-ES" dirty="0" err="1"/>
-              <a:t>CoARA</a:t>
-            </a:r>
-            <a:r>
-              <a:rPr lang="es-ES" dirty="0"/>
-              <a:t> y DORA</a:t>
+              <a:t>ANECA ya se ha comprometido a ello al adherirse a CoARA y DORA</a:t>
             </a:r>
           </a:p>
           <a:p>
             <a:pPr>
               <a:lnSpc>
-                <a:spcPct val="110000"/>
+                <a:spcPct val="120000"/>
+              </a:lnSpc>
+              <a:spcBef>
+                <a:spcPts val="900"/>
+              </a:spcBef>
+            </a:pPr>
+            <a:r>
+              <a:rPr lang="es-ES" dirty="0"/>
+              <a:t>Una petición concreta</a:t>
+            </a:r>
+          </a:p>
+          <a:p>
+            <a:pPr lvl="1">
+              <a:lnSpc>
+                <a:spcPct val="120000"/>
               </a:lnSpc>
             </a:pPr>
             <a:r>
               <a:rPr lang="es-ES" dirty="0"/>
-              <a:t>Una petición concreta</a:t>
-            </a:r>
-          </a:p>
-          <a:p>
-            <a:pPr lvl="1">
+              <a:t>que la COSCE avale la propuesta y la traslade a sus tres destinatarios:</a:t>
+            </a:r>
+          </a:p>
+          <a:p>
+            <a:pPr lvl="2">
               <a:lnSpc>
-                <a:spcPct val="110000"/>
+                <a:spcPct val="120000"/>
               </a:lnSpc>
+              <a:spcBef>
+                <a:spcPts val="600"/>
+              </a:spcBef>
+              <a:tabLst>
+                <a:tab pos="1878013" algn="l"/>
+              </a:tabLst>
             </a:pPr>
             <a:r>
               <a:rPr lang="es-ES" dirty="0"/>
-              <a:t>que la COSCE haga suya la propuesta y la traslade a ANECA/CNEAI:</a:t>
+              <a:t>CNEAI: 	A* y A con peso de revista, cupo de 3 a 5, criterio estable</a:t>
+            </a:r>
+          </a:p>
+          <a:p>
+            <a:pPr lvl="2">
+              <a:lnSpc>
+                <a:spcPct val="120000"/>
+              </a:lnSpc>
+              <a:spcBef>
+                <a:spcPts val="600"/>
+              </a:spcBef>
+              <a:tabLst>
+                <a:tab pos="1878013" algn="l"/>
+              </a:tabLst>
+            </a:pPr>
+            <a:r>
+              <a:rPr lang="es-ES" dirty="0"/>
+              <a:t>ANECA:	aclaración general en acreditación</a:t>
+            </a:r>
+          </a:p>
+          <a:p>
+            <a:pPr lvl="2">
+              <a:lnSpc>
+                <a:spcPct val="120000"/>
+              </a:lnSpc>
+              <a:spcBef>
+                <a:spcPts val="600"/>
+              </a:spcBef>
+              <a:tabLst>
+                <a:tab pos="1878013" algn="l"/>
+              </a:tabLst>
+            </a:pPr>
+            <a:r>
+              <a:rPr lang="es-ES" dirty="0"/>
+              <a:t>Ministerio:	cambiar la Orden de 1994 para que los congresos excelentes</a:t>
             </a:r>
             <a:br>
               <a:rPr lang="es-ES" dirty="0"/>
             </a:br>
             <a:r>
-              <a:rPr lang="es-ES" i="1" dirty="0"/>
-              <a:t>en Informática, los congresos ICORE A* , A y B</a:t>
-            </a:r>
-            <a:br>
-              <a:rPr lang="es-ES" i="1" dirty="0"/>
-            </a:br>
-            <a:r>
-              <a:rPr lang="es-ES" i="1" dirty="0"/>
-              <a:t>son aportaciones ordinarias</a:t>
+              <a:rPr lang="es-ES" dirty="0"/>
+              <a:t>	sean aportaciones ordinarias, en todas las disciplinas</a:t>
             </a:r>
           </a:p>
           <a:p>
             <a:pPr>
               <a:lnSpc>
-                <a:spcPct val="110000"/>
+                <a:spcPct val="120000"/>
+              </a:lnSpc>
+              <a:spcBef>
+                <a:spcPts val="900"/>
+              </a:spcBef>
+            </a:pPr>
+            <a:r>
+              <a:rPr lang="es-ES" dirty="0"/>
+              <a:t>Por qué os afecta ?</a:t>
+            </a:r>
+          </a:p>
+          <a:p>
+            <a:pPr lvl="1">
+              <a:lnSpc>
+                <a:spcPct val="120000"/>
               </a:lnSpc>
             </a:pPr>
             <a:r>
               <a:rPr lang="es-ES" dirty="0"/>
-              <a:t>Por qué os afecta ?</a:t>
+              <a:t>no pedimos un privilegio para la Informática, sino aplicar un principio que protege a todas las disciplinas: monografías, conjuntos de datos, software, patentes…</a:t>
             </a:r>
           </a:p>
           <a:p>
             <a:pPr lvl="1">
               <a:lnSpc>
-                <a:spcPct val="110000"/>
-              </a:lnSpc>
-            </a:pPr>
-            <a:r>
-              <a:rPr lang="es-ES" dirty="0"/>
-              <a:t>no pedimos un privilegio para la Informática, sino aplicar un principio que protege a todas las disciplinas: monografías, conjuntos de datos, software, patentes…</a:t>
-            </a:r>
-          </a:p>
-          <a:p>
-            <a:pPr lvl="1">
-              <a:lnSpc>
-                <a:spcPct val="110000"/>
+                <a:spcPct val="120000"/>
               </a:lnSpc>
             </a:pPr>
             <a:r>
@@ -26556,8 +27496,11 @@
           <a:p>
             <a:pPr marL="0" indent="0" algn="ctr">
               <a:lnSpc>
-                <a:spcPct val="110000"/>
+                <a:spcPct val="120000"/>
               </a:lnSpc>
+              <a:spcBef>
+                <a:spcPts val="1200"/>
+              </a:spcBef>
               <a:buNone/>
             </a:pPr>
             <a:r>
@@ -26584,7 +27527,4190 @@
 </p:sld>
 </file>
 
-<file path=ppt/slides/slide25.xml><?xml version="1.0" encoding="utf-8"?>
+<file path=ppt/slides/slide26.xml><?xml version="1.0" encoding="utf-8"?>
+<p:sld xmlns:a="http://schemas.openxmlformats.org/drawingml/2006/main" xmlns:r="http://schemas.openxmlformats.org/officeDocument/2006/relationships" xmlns:p="http://schemas.openxmlformats.org/presentationml/2006/main">
+  <p:cSld>
+    <p:spTree>
+      <p:nvGrpSpPr>
+        <p:cNvPr id="1" name=""/>
+        <p:cNvGrpSpPr/>
+        <p:nvPr/>
+      </p:nvGrpSpPr>
+      <p:grpSpPr>
+        <a:xfrm>
+          <a:off x="0" y="0"/>
+          <a:ext cx="0" cy="0"/>
+          <a:chOff x="0" y="0"/>
+          <a:chExt cx="0" cy="0"/>
+        </a:xfrm>
+      </p:grpSpPr>
+      <p:sp>
+        <p:nvSpPr>
+          <p:cNvPr id="7" name="Title 6">
+            <a:extLst>
+              <a:ext uri="{FF2B5EF4-FFF2-40B4-BE49-F238E27FC236}">
+                <a16:creationId xmlns:a16="http://schemas.microsoft.com/office/drawing/2014/main" id="{3EAA235A-E47A-4963-B160-062E476FC7B7}"/>
+              </a:ext>
+            </a:extLst>
+          </p:cNvPr>
+          <p:cNvSpPr>
+            <a:spLocks noGrp="1"/>
+          </p:cNvSpPr>
+          <p:nvPr>
+            <p:ph type="title"/>
+          </p:nvPr>
+        </p:nvSpPr>
+        <p:spPr/>
+        <p:txBody>
+          <a:bodyPr/>
+          <a:lstStyle/>
+          <a:p>
+            <a:r>
+              <a:rPr lang="es-ES" dirty="0"/>
+              <a:t>La reivindicación en 7 documentos</a:t>
+            </a:r>
+          </a:p>
+        </p:txBody>
+      </p:sp>
+      <p:sp>
+        <p:nvSpPr>
+          <p:cNvPr id="3" name="Footer Placeholder 2">
+            <a:extLst>
+              <a:ext uri="{FF2B5EF4-FFF2-40B4-BE49-F238E27FC236}">
+                <a16:creationId xmlns:a16="http://schemas.microsoft.com/office/drawing/2014/main" id="{E770E632-9998-40C0-81B7-B6103B8DD5CD}"/>
+              </a:ext>
+            </a:extLst>
+          </p:cNvPr>
+          <p:cNvSpPr>
+            <a:spLocks noGrp="1"/>
+          </p:cNvSpPr>
+          <p:nvPr>
+            <p:ph type="ftr" sz="quarter" idx="11"/>
+          </p:nvPr>
+        </p:nvSpPr>
+        <p:spPr/>
+        <p:txBody>
+          <a:bodyPr/>
+          <a:lstStyle/>
+          <a:p>
+            <a:r>
+              <a:rPr lang="es-ES"/>
+              <a:t>Ecosistema Científico y Tecnológico Español</a:t>
+            </a:r>
+            <a:r>
+              <a:rPr lang="es-ES">
+                <a:latin typeface="Arial Black" panose="020B0A04020102020204" pitchFamily="34" charset="0"/>
+              </a:rPr>
+              <a:t> </a:t>
+            </a:r>
+            <a:r>
+              <a:rPr lang="es-ES">
+                <a:latin typeface="Arial Black" panose="020B0A04020102020204" pitchFamily="34" charset="0"/>
+                <a:sym typeface="Symbol" panose="05050102010706020507" pitchFamily="18" charset="2"/>
+              </a:rPr>
+              <a:t> </a:t>
+            </a:r>
+            <a:r>
+              <a:rPr lang="es-ES"/>
+              <a:t>COSCE 2026</a:t>
+            </a:r>
+            <a:r>
+              <a:rPr lang="es-ES">
+                <a:latin typeface="Arial Black" panose="020B0A04020102020204" pitchFamily="34" charset="0"/>
+              </a:rPr>
+              <a:t> </a:t>
+            </a:r>
+            <a:r>
+              <a:rPr lang="es-ES">
+                <a:latin typeface="Arial Black" panose="020B0A04020102020204" pitchFamily="34" charset="0"/>
+                <a:sym typeface="Symbol" panose="05050102010706020507" pitchFamily="18" charset="2"/>
+              </a:rPr>
+              <a:t> </a:t>
+            </a:r>
+            <a:r>
+              <a:rPr lang="es-ES"/>
+              <a:t>Transferencia y congresos en Informática</a:t>
+            </a:r>
+          </a:p>
+        </p:txBody>
+      </p:sp>
+      <p:sp>
+        <p:nvSpPr>
+          <p:cNvPr id="4" name="Slide Number Placeholder 3">
+            <a:extLst>
+              <a:ext uri="{FF2B5EF4-FFF2-40B4-BE49-F238E27FC236}">
+                <a16:creationId xmlns:a16="http://schemas.microsoft.com/office/drawing/2014/main" id="{ACAE09C3-23FA-4EAF-AC5A-5E9DEEEAC337}"/>
+              </a:ext>
+            </a:extLst>
+          </p:cNvPr>
+          <p:cNvSpPr>
+            <a:spLocks noGrp="1"/>
+          </p:cNvSpPr>
+          <p:nvPr>
+            <p:ph type="sldNum" sz="quarter" idx="12"/>
+          </p:nvPr>
+        </p:nvSpPr>
+        <p:spPr/>
+        <p:txBody>
+          <a:bodyPr/>
+          <a:lstStyle/>
+          <a:p>
+            <a:fld id="{4A490C5D-AEA8-4823-B9B3-806910A0ECF7}" type="slidenum">
+              <a:rPr lang="es-ES" smtClean="0"/>
+              <a:pPr/>
+              <a:t>26</a:t>
+            </a:fld>
+            <a:endParaRPr lang="es-ES"/>
+          </a:p>
+        </p:txBody>
+      </p:sp>
+      <p:sp>
+        <p:nvSpPr>
+          <p:cNvPr id="8" name="TextBox 7"/>
+          <p:cNvSpPr txBox="1"/>
+          <p:nvPr/>
+        </p:nvSpPr>
+        <p:spPr>
+          <a:xfrm>
+            <a:off x="408000" y="914400"/>
+            <a:ext cx="3474720" cy="292388"/>
+          </a:xfrm>
+          <a:prstGeom prst="rect">
+            <a:avLst/>
+          </a:prstGeom>
+          <a:noFill/>
+        </p:spPr>
+        <p:txBody>
+          <a:bodyPr wrap="square" lIns="0" rIns="0" anchor="t">
+            <a:spAutoFit/>
+          </a:bodyPr>
+          <a:lstStyle/>
+          <a:p>
+            <a:pPr algn="l">
+              <a:spcAft>
+                <a:spcPts val="200"/>
+              </a:spcAft>
+            </a:pPr>
+            <a:r>
+              <a:rPr lang="es-ES" sz="1300" b="1" i="1">
+                <a:solidFill>
+                  <a:srgbClr val="595959"/>
+                </a:solidFill>
+              </a:rPr>
+              <a:t>Los hechos</a:t>
+            </a:r>
+          </a:p>
+        </p:txBody>
+      </p:sp>
+      <p:sp>
+        <p:nvSpPr>
+          <p:cNvPr id="9" name="TextBox 8"/>
+          <p:cNvSpPr txBox="1"/>
+          <p:nvPr/>
+        </p:nvSpPr>
+        <p:spPr>
+          <a:xfrm>
+            <a:off x="4385640" y="914400"/>
+            <a:ext cx="3474720" cy="292388"/>
+          </a:xfrm>
+          <a:prstGeom prst="rect">
+            <a:avLst/>
+          </a:prstGeom>
+          <a:noFill/>
+        </p:spPr>
+        <p:txBody>
+          <a:bodyPr wrap="square" lIns="0" rIns="0" anchor="t">
+            <a:spAutoFit/>
+          </a:bodyPr>
+          <a:lstStyle/>
+          <a:p>
+            <a:pPr algn="l">
+              <a:spcAft>
+                <a:spcPts val="200"/>
+              </a:spcAft>
+            </a:pPr>
+            <a:r>
+              <a:rPr lang="es-ES" sz="1300" b="1" i="1">
+                <a:solidFill>
+                  <a:srgbClr val="595959"/>
+                </a:solidFill>
+              </a:rPr>
+              <a:t>La propuesta</a:t>
+            </a:r>
+          </a:p>
+        </p:txBody>
+      </p:sp>
+      <p:sp>
+        <p:nvSpPr>
+          <p:cNvPr id="10" name="TextBox 9"/>
+          <p:cNvSpPr txBox="1"/>
+          <p:nvPr/>
+        </p:nvSpPr>
+        <p:spPr>
+          <a:xfrm>
+            <a:off x="8088960" y="914400"/>
+            <a:ext cx="3474720" cy="292388"/>
+          </a:xfrm>
+          <a:prstGeom prst="rect">
+            <a:avLst/>
+          </a:prstGeom>
+          <a:noFill/>
+        </p:spPr>
+        <p:txBody>
+          <a:bodyPr wrap="square" lIns="0" rIns="0" anchor="t">
+            <a:spAutoFit/>
+          </a:bodyPr>
+          <a:lstStyle/>
+          <a:p>
+            <a:pPr algn="l">
+              <a:spcAft>
+                <a:spcPts val="200"/>
+              </a:spcAft>
+            </a:pPr>
+            <a:r>
+              <a:rPr lang="es-ES" sz="1300" b="1" i="1">
+                <a:solidFill>
+                  <a:srgbClr val="595959"/>
+                </a:solidFill>
+              </a:rPr>
+              <a:t>Qué pedimos y a quién</a:t>
+            </a:r>
+          </a:p>
+        </p:txBody>
+      </p:sp>
+      <p:sp>
+        <p:nvSpPr>
+          <p:cNvPr id="11" name="Informe A1"/>
+          <p:cNvSpPr/>
+          <p:nvPr/>
+        </p:nvSpPr>
+        <p:spPr>
+          <a:xfrm>
+            <a:off x="408000" y="1234440"/>
+            <a:ext cx="3420000" cy="1463040"/>
+          </a:xfrm>
+          <a:prstGeom prst="roundRect">
+            <a:avLst>
+              <a:gd name="adj" fmla="val 8000"/>
+            </a:avLst>
+          </a:prstGeom>
+          <a:solidFill>
+            <a:srgbClr val="E3EEFA"/>
+          </a:solidFill>
+          <a:ln w="15875">
+            <a:solidFill>
+              <a:srgbClr val="297FD5"/>
+            </a:solidFill>
+          </a:ln>
+          <a:effectLst/>
+        </p:spPr>
+        <p:style>
+          <a:lnRef idx="1">
+            <a:schemeClr val="accent1"/>
+          </a:lnRef>
+          <a:fillRef idx="3">
+            <a:schemeClr val="accent1"/>
+          </a:fillRef>
+          <a:effectRef idx="2">
+            <a:schemeClr val="accent1"/>
+          </a:effectRef>
+          <a:fontRef idx="minor">
+            <a:schemeClr val="lt1"/>
+          </a:fontRef>
+        </p:style>
+        <p:txBody>
+          <a:bodyPr wrap="square" lIns="109728" tIns="54864" rIns="109728" bIns="54864" rtlCol="0" anchor="t"/>
+          <a:lstStyle/>
+          <a:p>
+            <a:pPr algn="l">
+              <a:spcAft>
+                <a:spcPts val="200"/>
+              </a:spcAft>
+            </a:pPr>
+            <a:r>
+              <a:rPr lang="es-ES" sz="1400" b="1" i="0">
+                <a:solidFill>
+                  <a:srgbClr val="297FD5"/>
+                </a:solidFill>
+              </a:rPr>
+              <a:t>A1  </a:t>
+            </a:r>
+            <a:r>
+              <a:rPr lang="es-ES" sz="1300" b="1" i="0">
+                <a:solidFill>
+                  <a:srgbClr val="242852"/>
+                </a:solidFill>
+              </a:rPr>
+              <a:t>Informe de fundamentación</a:t>
+            </a:r>
+          </a:p>
+          <a:p>
+            <a:pPr algn="l">
+              <a:spcAft>
+                <a:spcPts val="200"/>
+              </a:spcAft>
+            </a:pPr>
+            <a:r>
+              <a:rPr lang="es-ES" sz="1200" b="0" i="1">
+                <a:solidFill>
+                  <a:srgbClr val="1F4E79"/>
+                </a:solidFill>
+              </a:rPr>
+              <a:t>Por qué: la práctica de la disciplina</a:t>
+            </a:r>
+          </a:p>
+          <a:p>
+            <a:pPr algn="l">
+              <a:spcAft>
+                <a:spcPts val="200"/>
+              </a:spcAft>
+            </a:pPr>
+            <a:r>
+              <a:rPr lang="es-ES" sz="1200" b="0" i="0">
+                <a:solidFill>
+                  <a:srgbClr val="262626"/>
+                </a:solidFill>
+              </a:rPr>
+              <a:t>El congreso selectivo es el canal terminal:</a:t>
+            </a:r>
+            <a:endParaRPr lang="es-ES" sz="1200">
+              <a:solidFill>
+                <a:srgbClr val="262626"/>
+              </a:solidFill>
+            </a:endParaRPr>
+          </a:p>
+          <a:p>
+            <a:pPr marL="171450" indent="-171450" algn="l">
+              <a:spcAft>
+                <a:spcPts val="200"/>
+              </a:spcAft>
+              <a:buFont typeface="Arial" panose="020B0604020202020204" pitchFamily="34" charset="0"/>
+              <a:buChar char="•"/>
+            </a:pPr>
+            <a:r>
+              <a:rPr lang="es-ES" sz="1200" b="0" i="0">
+                <a:solidFill>
+                  <a:srgbClr val="262626"/>
+                </a:solidFill>
+              </a:rPr>
+              <a:t>3 de los 10 artículos más citados del s. XXI</a:t>
+            </a:r>
+            <a:endParaRPr lang="es-ES" sz="1200">
+              <a:solidFill>
+                <a:srgbClr val="262626"/>
+              </a:solidFill>
+            </a:endParaRPr>
+          </a:p>
+          <a:p>
+            <a:pPr marL="171450" indent="-171450" algn="l">
+              <a:spcAft>
+                <a:spcPts val="200"/>
+              </a:spcAft>
+              <a:buFont typeface="Arial" panose="020B0604020202020204" pitchFamily="34" charset="0"/>
+              <a:buChar char="•"/>
+            </a:pPr>
+            <a:r>
+              <a:rPr lang="es-ES" sz="1200" b="0" i="0">
+                <a:solidFill>
+                  <a:srgbClr val="262626"/>
+                </a:solidFill>
+              </a:rPr>
+              <a:t>63,5 % de las citas científicas en patentes</a:t>
+            </a:r>
+          </a:p>
+        </p:txBody>
+      </p:sp>
+      <p:sp>
+        <p:nvSpPr>
+          <p:cNvPr id="12" name="Informe A2"/>
+          <p:cNvSpPr/>
+          <p:nvPr/>
+        </p:nvSpPr>
+        <p:spPr>
+          <a:xfrm>
+            <a:off x="408000" y="2852928"/>
+            <a:ext cx="3420000" cy="1463040"/>
+          </a:xfrm>
+          <a:prstGeom prst="roundRect">
+            <a:avLst>
+              <a:gd name="adj" fmla="val 8000"/>
+            </a:avLst>
+          </a:prstGeom>
+          <a:solidFill>
+            <a:srgbClr val="E3EEFA"/>
+          </a:solidFill>
+          <a:ln w="15875">
+            <a:solidFill>
+              <a:srgbClr val="297FD5"/>
+            </a:solidFill>
+          </a:ln>
+          <a:effectLst/>
+        </p:spPr>
+        <p:style>
+          <a:lnRef idx="1">
+            <a:schemeClr val="accent1"/>
+          </a:lnRef>
+          <a:fillRef idx="3">
+            <a:schemeClr val="accent1"/>
+          </a:fillRef>
+          <a:effectRef idx="2">
+            <a:schemeClr val="accent1"/>
+          </a:effectRef>
+          <a:fontRef idx="minor">
+            <a:schemeClr val="lt1"/>
+          </a:fontRef>
+        </p:style>
+        <p:txBody>
+          <a:bodyPr wrap="square" lIns="109728" tIns="54864" rIns="109728" bIns="54864" rtlCol="0" anchor="t"/>
+          <a:lstStyle/>
+          <a:p>
+            <a:pPr algn="l">
+              <a:spcAft>
+                <a:spcPts val="200"/>
+              </a:spcAft>
+            </a:pPr>
+            <a:r>
+              <a:rPr lang="es-ES" sz="1400" b="1" i="0" dirty="0">
+                <a:solidFill>
+                  <a:srgbClr val="297FD5"/>
+                </a:solidFill>
+              </a:rPr>
+              <a:t>A2  </a:t>
+            </a:r>
+            <a:r>
+              <a:rPr lang="es-ES" sz="1300" b="1" i="0" dirty="0">
+                <a:solidFill>
+                  <a:srgbClr val="242852"/>
+                </a:solidFill>
+              </a:rPr>
+              <a:t>Informe de presencia española</a:t>
+            </a:r>
+          </a:p>
+          <a:p>
+            <a:pPr algn="l">
+              <a:spcAft>
+                <a:spcPts val="200"/>
+              </a:spcAft>
+            </a:pPr>
+            <a:r>
+              <a:rPr lang="es-ES" sz="1200" b="0" i="1" dirty="0">
+                <a:solidFill>
+                  <a:srgbClr val="1F4E79"/>
+                </a:solidFill>
+              </a:rPr>
+              <a:t>Qué está pasando</a:t>
+            </a:r>
+          </a:p>
+          <a:p>
+            <a:pPr algn="l">
+              <a:spcAft>
+                <a:spcPts val="200"/>
+              </a:spcAft>
+            </a:pPr>
+            <a:r>
+              <a:rPr lang="es-ES" sz="1200" b="0" i="0" dirty="0">
+                <a:solidFill>
+                  <a:srgbClr val="262626"/>
+                </a:solidFill>
+              </a:rPr>
+              <a:t>España crece en artículos pero pierde peso: </a:t>
+            </a:r>
+          </a:p>
+          <a:p>
+            <a:pPr marL="171450" indent="-171450" algn="l">
+              <a:spcAft>
+                <a:spcPts val="200"/>
+              </a:spcAft>
+              <a:buFont typeface="Arial" panose="020B0604020202020204" pitchFamily="34" charset="0"/>
+              <a:buChar char="•"/>
+            </a:pPr>
+            <a:r>
+              <a:rPr lang="es-ES" sz="1200" b="0" i="0" dirty="0">
+                <a:solidFill>
+                  <a:srgbClr val="262626"/>
+                </a:solidFill>
+              </a:rPr>
+              <a:t>7,62 % → 4,23 % de UE27+RU;</a:t>
+            </a:r>
+          </a:p>
+          <a:p>
+            <a:pPr marL="171450" indent="-171450" algn="l">
+              <a:spcAft>
+                <a:spcPts val="200"/>
+              </a:spcAft>
+              <a:buFont typeface="Arial" panose="020B0604020202020204" pitchFamily="34" charset="0"/>
+              <a:buChar char="•"/>
+            </a:pPr>
+            <a:r>
+              <a:rPr lang="es-ES" sz="1200" b="0" i="0" dirty="0">
+                <a:solidFill>
+                  <a:srgbClr val="262626"/>
+                </a:solidFill>
+              </a:rPr>
+              <a:t>puesto 5.º → 8.º (en A*   5.º → 9.º)</a:t>
+            </a:r>
+          </a:p>
+        </p:txBody>
+      </p:sp>
+      <p:sp>
+        <p:nvSpPr>
+          <p:cNvPr id="13" name="Informe A3"/>
+          <p:cNvSpPr/>
+          <p:nvPr/>
+        </p:nvSpPr>
+        <p:spPr>
+          <a:xfrm>
+            <a:off x="408000" y="4471416"/>
+            <a:ext cx="3420000" cy="1463040"/>
+          </a:xfrm>
+          <a:prstGeom prst="roundRect">
+            <a:avLst>
+              <a:gd name="adj" fmla="val 8000"/>
+            </a:avLst>
+          </a:prstGeom>
+          <a:solidFill>
+            <a:srgbClr val="E3EEFA"/>
+          </a:solidFill>
+          <a:ln w="15875">
+            <a:solidFill>
+              <a:srgbClr val="297FD5"/>
+            </a:solidFill>
+          </a:ln>
+          <a:effectLst/>
+        </p:spPr>
+        <p:style>
+          <a:lnRef idx="1">
+            <a:schemeClr val="accent1"/>
+          </a:lnRef>
+          <a:fillRef idx="3">
+            <a:schemeClr val="accent1"/>
+          </a:fillRef>
+          <a:effectRef idx="2">
+            <a:schemeClr val="accent1"/>
+          </a:effectRef>
+          <a:fontRef idx="minor">
+            <a:schemeClr val="lt1"/>
+          </a:fontRef>
+        </p:style>
+        <p:txBody>
+          <a:bodyPr wrap="square" lIns="109728" tIns="54864" rIns="109728" bIns="54864" rtlCol="0" anchor="t"/>
+          <a:lstStyle/>
+          <a:p>
+            <a:pPr algn="l">
+              <a:spcAft>
+                <a:spcPts val="200"/>
+              </a:spcAft>
+            </a:pPr>
+            <a:r>
+              <a:rPr lang="es-ES" sz="1400" b="1" i="0" dirty="0">
+                <a:solidFill>
+                  <a:srgbClr val="297FD5"/>
+                </a:solidFill>
+              </a:rPr>
+              <a:t>A3  </a:t>
+            </a:r>
+            <a:r>
+              <a:rPr lang="es-ES" sz="1300" b="1" i="0" dirty="0">
+                <a:solidFill>
+                  <a:srgbClr val="242852"/>
+                </a:solidFill>
+              </a:rPr>
+              <a:t>Informe sobre los criterios de sexenios</a:t>
+            </a:r>
+          </a:p>
+          <a:p>
+            <a:pPr algn="l">
+              <a:spcAft>
+                <a:spcPts val="200"/>
+              </a:spcAft>
+            </a:pPr>
+            <a:r>
+              <a:rPr lang="es-ES" sz="1200" b="0" i="1" dirty="0">
+                <a:solidFill>
+                  <a:srgbClr val="1F4E79"/>
+                </a:solidFill>
+              </a:rPr>
+              <a:t>Por qué el reconocimiento no se consolida</a:t>
+            </a:r>
+          </a:p>
+          <a:p>
+            <a:pPr algn="l">
+              <a:spcAft>
+                <a:spcPts val="200"/>
+              </a:spcAft>
+            </a:pPr>
+            <a:r>
+              <a:rPr lang="es-ES" sz="1200" b="0" i="0" dirty="0">
+                <a:solidFill>
+                  <a:srgbClr val="262626"/>
+                </a:solidFill>
+              </a:rPr>
+              <a:t>25 convocatorias,</a:t>
+            </a:r>
+          </a:p>
+          <a:p>
+            <a:pPr algn="l">
+              <a:spcAft>
+                <a:spcPts val="200"/>
+              </a:spcAft>
+            </a:pPr>
+            <a:r>
+              <a:rPr lang="es-ES" sz="1200" b="0" i="0" dirty="0">
+                <a:solidFill>
+                  <a:srgbClr val="262626"/>
+                </a:solidFill>
+              </a:rPr>
+              <a:t>7 cambios de régimen sin transitorio.</a:t>
+            </a:r>
+          </a:p>
+          <a:p>
+            <a:pPr algn="l">
+              <a:spcAft>
+                <a:spcPts val="200"/>
+              </a:spcAft>
+            </a:pPr>
+            <a:r>
+              <a:rPr lang="es-ES" sz="1200" b="0" i="0" dirty="0">
+                <a:solidFill>
+                  <a:srgbClr val="262626"/>
+                </a:solidFill>
+              </a:rPr>
+              <a:t>Causa: el art. 7 de la Orden de 1994</a:t>
+            </a:r>
+          </a:p>
+        </p:txBody>
+      </p:sp>
+      <p:sp>
+        <p:nvSpPr>
+          <p:cNvPr id="14" name="Propuesta"/>
+          <p:cNvSpPr/>
+          <p:nvPr/>
+        </p:nvSpPr>
+        <p:spPr>
+          <a:xfrm>
+            <a:off x="4357065" y="1691640"/>
+            <a:ext cx="3291840" cy="3749039"/>
+          </a:xfrm>
+          <a:prstGeom prst="roundRect">
+            <a:avLst>
+              <a:gd name="adj" fmla="val 8000"/>
+            </a:avLst>
+          </a:prstGeom>
+          <a:solidFill>
+            <a:srgbClr val="242852"/>
+          </a:solidFill>
+          <a:ln>
+            <a:noFill/>
+          </a:ln>
+          <a:effectLst/>
+        </p:spPr>
+        <p:style>
+          <a:lnRef idx="1">
+            <a:schemeClr val="accent1"/>
+          </a:lnRef>
+          <a:fillRef idx="3">
+            <a:schemeClr val="accent1"/>
+          </a:fillRef>
+          <a:effectRef idx="2">
+            <a:schemeClr val="accent1"/>
+          </a:effectRef>
+          <a:fontRef idx="minor">
+            <a:schemeClr val="lt1"/>
+          </a:fontRef>
+        </p:style>
+        <p:txBody>
+          <a:bodyPr wrap="square" lIns="182880" tIns="54864" rIns="182880" bIns="54864" rtlCol="0" anchor="ctr"/>
+          <a:lstStyle/>
+          <a:p>
+            <a:pPr algn="ctr">
+              <a:spcAft>
+                <a:spcPts val="800"/>
+              </a:spcAft>
+            </a:pPr>
+            <a:r>
+              <a:rPr lang="es-ES" sz="1700" b="1" i="0" dirty="0">
+                <a:solidFill>
+                  <a:srgbClr val="FFFFFF"/>
+                </a:solidFill>
+              </a:rPr>
+              <a:t>00  Propuesta SCIE</a:t>
+            </a:r>
+          </a:p>
+          <a:p>
+            <a:pPr algn="l">
+              <a:spcAft>
+                <a:spcPts val="800"/>
+              </a:spcAft>
+            </a:pPr>
+            <a:r>
+              <a:rPr lang="es-ES" sz="1300" b="1" i="0" dirty="0">
+                <a:solidFill>
+                  <a:srgbClr val="ACCBF9"/>
+                </a:solidFill>
+              </a:rPr>
+              <a:t>Tesis: </a:t>
+            </a:r>
+            <a:r>
+              <a:rPr lang="es-ES" sz="1300" b="0" i="0" dirty="0">
+                <a:solidFill>
+                  <a:srgbClr val="FFFFFF"/>
+                </a:solidFill>
+              </a:rPr>
+              <a:t>congresos ICORE A* y A valorados como revistas de calidad contrastada, con un criterio estable</a:t>
+            </a:r>
+          </a:p>
+          <a:p>
+            <a:pPr algn="l">
+              <a:spcAft>
+                <a:spcPts val="300"/>
+              </a:spcAft>
+            </a:pPr>
+            <a:r>
+              <a:rPr lang="es-ES" sz="1300" b="0" i="0" dirty="0">
+                <a:solidFill>
+                  <a:srgbClr val="FFFFFF"/>
+                </a:solidFill>
+              </a:rPr>
+              <a:t>▸ Diagnóstico</a:t>
+            </a:r>
+          </a:p>
+          <a:p>
+            <a:pPr algn="l">
+              <a:spcAft>
+                <a:spcPts val="300"/>
+              </a:spcAft>
+            </a:pPr>
+            <a:r>
+              <a:rPr lang="es-ES" sz="1300" b="0" i="0" dirty="0">
+                <a:solidFill>
+                  <a:srgbClr val="FFFFFF"/>
+                </a:solidFill>
+              </a:rPr>
+              <a:t>▸ Principios P1–P5</a:t>
+            </a:r>
+          </a:p>
+          <a:p>
+            <a:pPr algn="l">
+              <a:spcAft>
+                <a:spcPts val="300"/>
+              </a:spcAft>
+            </a:pPr>
+            <a:r>
+              <a:rPr lang="es-ES" sz="1300" b="0" i="0" dirty="0">
+                <a:solidFill>
+                  <a:srgbClr val="FFFFFF"/>
+                </a:solidFill>
+              </a:rPr>
+              <a:t>▸ Recomendaciones </a:t>
+            </a:r>
+            <a:r>
+              <a:rPr lang="es-ES" sz="1300" b="0" i="0" dirty="0">
+                <a:solidFill>
+                  <a:srgbClr val="FF0000"/>
+                </a:solidFill>
+              </a:rPr>
+              <a:t>R1–R7</a:t>
+            </a:r>
+          </a:p>
+          <a:p>
+            <a:pPr algn="l">
+              <a:spcAft>
+                <a:spcPts val="300"/>
+              </a:spcAft>
+            </a:pPr>
+            <a:r>
+              <a:rPr lang="es-ES" sz="1300" b="0" i="0" dirty="0">
+                <a:solidFill>
+                  <a:srgbClr val="FFFFFF"/>
+                </a:solidFill>
+              </a:rPr>
+              <a:t>▸ Plan en 3 fases</a:t>
+            </a:r>
+          </a:p>
+        </p:txBody>
+      </p:sp>
+      <p:sp>
+        <p:nvSpPr>
+          <p:cNvPr id="15" name="Aval COSCE"/>
+          <p:cNvSpPr/>
+          <p:nvPr/>
+        </p:nvSpPr>
+        <p:spPr>
+          <a:xfrm>
+            <a:off x="4751400" y="1207008"/>
+            <a:ext cx="2560320" cy="365760"/>
+          </a:xfrm>
+          <a:prstGeom prst="roundRect">
+            <a:avLst>
+              <a:gd name="adj" fmla="val 50000"/>
+            </a:avLst>
+          </a:prstGeom>
+          <a:solidFill>
+            <a:srgbClr val="F2F2F2"/>
+          </a:solidFill>
+          <a:ln w="15875">
+            <a:solidFill>
+              <a:srgbClr val="242852"/>
+            </a:solidFill>
+          </a:ln>
+          <a:effectLst/>
+        </p:spPr>
+        <p:style>
+          <a:lnRef idx="1">
+            <a:schemeClr val="accent1"/>
+          </a:lnRef>
+          <a:fillRef idx="3">
+            <a:schemeClr val="accent1"/>
+          </a:fillRef>
+          <a:effectRef idx="2">
+            <a:schemeClr val="accent1"/>
+          </a:effectRef>
+          <a:fontRef idx="minor">
+            <a:schemeClr val="lt1"/>
+          </a:fontRef>
+        </p:style>
+        <p:txBody>
+          <a:bodyPr wrap="square" lIns="109728" tIns="54864" rIns="109728" bIns="54864" rtlCol="0" anchor="ctr"/>
+          <a:lstStyle/>
+          <a:p>
+            <a:pPr algn="ctr">
+              <a:spcAft>
+                <a:spcPts val="0"/>
+              </a:spcAft>
+            </a:pPr>
+            <a:r>
+              <a:rPr lang="es-ES" sz="1200" b="1" i="0" dirty="0">
+                <a:solidFill>
+                  <a:srgbClr val="242852"/>
+                </a:solidFill>
+              </a:rPr>
+              <a:t>SCIE propone ·  COSCE avala</a:t>
+            </a:r>
+          </a:p>
+        </p:txBody>
+      </p:sp>
+      <p:sp>
+        <p:nvSpPr>
+          <p:cNvPr id="16" name="Carta C1"/>
+          <p:cNvSpPr/>
+          <p:nvPr/>
+        </p:nvSpPr>
+        <p:spPr>
+          <a:xfrm>
+            <a:off x="8115360" y="1234440"/>
+            <a:ext cx="3564000" cy="1463040"/>
+          </a:xfrm>
+          <a:prstGeom prst="roundRect">
+            <a:avLst>
+              <a:gd name="adj" fmla="val 8000"/>
+            </a:avLst>
+          </a:prstGeom>
+          <a:solidFill>
+            <a:srgbClr val="E6F2DF"/>
+          </a:solidFill>
+          <a:ln w="15875">
+            <a:solidFill>
+              <a:srgbClr val="3B7D3A"/>
+            </a:solidFill>
+          </a:ln>
+          <a:effectLst/>
+        </p:spPr>
+        <p:style>
+          <a:lnRef idx="1">
+            <a:schemeClr val="accent1"/>
+          </a:lnRef>
+          <a:fillRef idx="3">
+            <a:schemeClr val="accent1"/>
+          </a:fillRef>
+          <a:effectRef idx="2">
+            <a:schemeClr val="accent1"/>
+          </a:effectRef>
+          <a:fontRef idx="minor">
+            <a:schemeClr val="lt1"/>
+          </a:fontRef>
+        </p:style>
+        <p:txBody>
+          <a:bodyPr wrap="square" lIns="109728" tIns="54864" rIns="109728" bIns="54864" rtlCol="0" anchor="t"/>
+          <a:lstStyle/>
+          <a:p>
+            <a:pPr algn="l">
+              <a:spcAft>
+                <a:spcPts val="200"/>
+              </a:spcAft>
+            </a:pPr>
+            <a:r>
+              <a:rPr lang="es-ES" sz="1400" b="1" i="0" dirty="0">
+                <a:solidFill>
+                  <a:srgbClr val="3B7D3A"/>
+                </a:solidFill>
+              </a:rPr>
+              <a:t>C1  </a:t>
+            </a:r>
+            <a:r>
+              <a:rPr lang="es-ES" sz="1300" b="1" i="0" dirty="0">
+                <a:solidFill>
+                  <a:srgbClr val="242852"/>
+                </a:solidFill>
+              </a:rPr>
+              <a:t>Ministerio ·  Secretaría General de Universidades</a:t>
+            </a:r>
+          </a:p>
+          <a:p>
+            <a:pPr algn="l">
+              <a:spcAft>
+                <a:spcPts val="200"/>
+              </a:spcAft>
+            </a:pPr>
+            <a:r>
+              <a:rPr lang="es-ES" sz="1200" b="0" i="0" dirty="0">
+                <a:solidFill>
+                  <a:srgbClr val="FF0000"/>
+                </a:solidFill>
+              </a:rPr>
+              <a:t>R3</a:t>
+            </a:r>
+            <a:r>
+              <a:rPr lang="es-ES" sz="1200" b="0" i="0" dirty="0">
+                <a:solidFill>
+                  <a:srgbClr val="262626"/>
+                </a:solidFill>
+              </a:rPr>
+              <a:t> · Modificar el art. 7.2 de la Orden de 1994 (y la CNU/1181/2019): artículo completo en congreso de prestigio = aportación ordinaria,</a:t>
+            </a:r>
+            <a:br>
+              <a:rPr lang="es-ES" sz="1200" b="0" i="0" dirty="0">
+                <a:solidFill>
+                  <a:srgbClr val="262626"/>
+                </a:solidFill>
+              </a:rPr>
+            </a:br>
+            <a:r>
+              <a:rPr lang="es-ES" sz="1200" b="0" i="0" dirty="0">
+                <a:solidFill>
+                  <a:srgbClr val="262626"/>
+                </a:solidFill>
+              </a:rPr>
+              <a:t>para todas las disciplinas</a:t>
+            </a:r>
+          </a:p>
+        </p:txBody>
+      </p:sp>
+      <p:sp>
+        <p:nvSpPr>
+          <p:cNvPr id="17" name="Carta C2"/>
+          <p:cNvSpPr/>
+          <p:nvPr/>
+        </p:nvSpPr>
+        <p:spPr>
+          <a:xfrm>
+            <a:off x="8115360" y="2852928"/>
+            <a:ext cx="3564000" cy="1463040"/>
+          </a:xfrm>
+          <a:prstGeom prst="roundRect">
+            <a:avLst>
+              <a:gd name="adj" fmla="val 8000"/>
+            </a:avLst>
+          </a:prstGeom>
+          <a:solidFill>
+            <a:srgbClr val="E6F2DF"/>
+          </a:solidFill>
+          <a:ln w="15875">
+            <a:solidFill>
+              <a:srgbClr val="3B7D3A"/>
+            </a:solidFill>
+          </a:ln>
+          <a:effectLst/>
+        </p:spPr>
+        <p:style>
+          <a:lnRef idx="1">
+            <a:schemeClr val="accent1"/>
+          </a:lnRef>
+          <a:fillRef idx="3">
+            <a:schemeClr val="accent1"/>
+          </a:fillRef>
+          <a:effectRef idx="2">
+            <a:schemeClr val="accent1"/>
+          </a:effectRef>
+          <a:fontRef idx="minor">
+            <a:schemeClr val="lt1"/>
+          </a:fontRef>
+        </p:style>
+        <p:txBody>
+          <a:bodyPr wrap="square" lIns="109728" tIns="54864" rIns="109728" bIns="54864" rtlCol="0" anchor="t"/>
+          <a:lstStyle/>
+          <a:p>
+            <a:pPr algn="l">
+              <a:spcAft>
+                <a:spcPts val="200"/>
+              </a:spcAft>
+            </a:pPr>
+            <a:r>
+              <a:rPr lang="es-ES" sz="1400" b="1" i="0" dirty="0">
+                <a:solidFill>
+                  <a:srgbClr val="3B7D3A"/>
+                </a:solidFill>
+              </a:rPr>
+              <a:t>C2  </a:t>
+            </a:r>
+            <a:r>
+              <a:rPr lang="es-ES" sz="1300" b="1" i="0" dirty="0">
+                <a:solidFill>
+                  <a:srgbClr val="242852"/>
+                </a:solidFill>
+              </a:rPr>
+              <a:t>CNEAI ·  criterios de sexenios 6.2</a:t>
+            </a:r>
+          </a:p>
+          <a:p>
+            <a:pPr algn="l">
+              <a:spcAft>
+                <a:spcPts val="200"/>
+              </a:spcAft>
+            </a:pPr>
+            <a:r>
+              <a:rPr lang="es-ES" sz="1200" b="0" i="0" dirty="0">
+                <a:solidFill>
+                  <a:srgbClr val="FF0000"/>
+                </a:solidFill>
+              </a:rPr>
+              <a:t>R1 + R2</a:t>
+            </a:r>
+            <a:endParaRPr lang="es-ES" sz="1200" dirty="0">
+              <a:solidFill>
+                <a:srgbClr val="262626"/>
+              </a:solidFill>
+            </a:endParaRPr>
+          </a:p>
+          <a:p>
+            <a:pPr marL="171450" indent="-171450" algn="l">
+              <a:spcAft>
+                <a:spcPts val="200"/>
+              </a:spcAft>
+              <a:buFont typeface="Arial" panose="020B0604020202020204" pitchFamily="34" charset="0"/>
+              <a:buChar char="•"/>
+            </a:pPr>
+            <a:r>
+              <a:rPr lang="es-ES" sz="1200" b="0" i="0" dirty="0">
+                <a:solidFill>
+                  <a:srgbClr val="262626"/>
+                </a:solidFill>
+              </a:rPr>
+              <a:t>Cupo de extraordinarias de 3 a 5 en ICORE A*/A; </a:t>
+            </a:r>
+          </a:p>
+          <a:p>
+            <a:pPr marL="171450" indent="-171450" algn="l">
+              <a:spcAft>
+                <a:spcPts val="200"/>
+              </a:spcAft>
+              <a:buFont typeface="Arial" panose="020B0604020202020204" pitchFamily="34" charset="0"/>
+              <a:buChar char="•"/>
+            </a:pPr>
+            <a:r>
+              <a:rPr lang="es-ES" sz="1200" b="0" i="0" dirty="0">
+                <a:solidFill>
+                  <a:srgbClr val="262626"/>
+                </a:solidFill>
+              </a:rPr>
+              <a:t>A* ≈ Q1,  A ≈ Q1/Q2;</a:t>
+            </a:r>
+          </a:p>
+          <a:p>
+            <a:pPr marL="171450" indent="-171450">
+              <a:spcAft>
+                <a:spcPts val="200"/>
+              </a:spcAft>
+              <a:buFont typeface="Arial" panose="020B0604020202020204" pitchFamily="34" charset="0"/>
+              <a:buChar char="•"/>
+            </a:pPr>
+            <a:r>
+              <a:rPr lang="es-ES" sz="1200" dirty="0">
+                <a:solidFill>
+                  <a:srgbClr val="262626"/>
+                </a:solidFill>
+              </a:rPr>
+              <a:t>B </a:t>
+            </a:r>
+            <a:r>
+              <a:rPr lang="es-ES" sz="1200" dirty="0" err="1">
+                <a:solidFill>
+                  <a:srgbClr val="262626"/>
+                </a:solidFill>
+              </a:rPr>
+              <a:t>≈ Q2/Q3, en el cupo general de 3;</a:t>
+            </a:r>
+          </a:p>
+          <a:p>
+            <a:pPr marL="171450" indent="-171450" algn="l">
+              <a:spcAft>
+                <a:spcPts val="200"/>
+              </a:spcAft>
+              <a:buFont typeface="Arial" panose="020B0604020202020204" pitchFamily="34" charset="0"/>
+              <a:buChar char="•"/>
+            </a:pPr>
+            <a:r>
+              <a:rPr lang="es-ES" sz="1200" b="0" i="0" dirty="0">
+                <a:solidFill>
+                  <a:srgbClr val="262626"/>
+                </a:solidFill>
+              </a:rPr>
+              <a:t>criterio bienal y régimen transitorio</a:t>
+            </a:r>
+          </a:p>
+        </p:txBody>
+      </p:sp>
+      <p:sp>
+        <p:nvSpPr>
+          <p:cNvPr id="18" name="Carta C3"/>
+          <p:cNvSpPr/>
+          <p:nvPr/>
+        </p:nvSpPr>
+        <p:spPr>
+          <a:xfrm>
+            <a:off x="8088960" y="4471416"/>
+            <a:ext cx="3564000" cy="1463040"/>
+          </a:xfrm>
+          <a:prstGeom prst="roundRect">
+            <a:avLst>
+              <a:gd name="adj" fmla="val 8000"/>
+            </a:avLst>
+          </a:prstGeom>
+          <a:solidFill>
+            <a:srgbClr val="E6F2DF"/>
+          </a:solidFill>
+          <a:ln w="15875">
+            <a:solidFill>
+              <a:srgbClr val="3B7D3A"/>
+            </a:solidFill>
+          </a:ln>
+          <a:effectLst/>
+        </p:spPr>
+        <p:style>
+          <a:lnRef idx="1">
+            <a:schemeClr val="accent1"/>
+          </a:lnRef>
+          <a:fillRef idx="3">
+            <a:schemeClr val="accent1"/>
+          </a:fillRef>
+          <a:effectRef idx="2">
+            <a:schemeClr val="accent1"/>
+          </a:effectRef>
+          <a:fontRef idx="minor">
+            <a:schemeClr val="lt1"/>
+          </a:fontRef>
+        </p:style>
+        <p:txBody>
+          <a:bodyPr wrap="square" lIns="109728" tIns="54864" rIns="109728" bIns="54864" rtlCol="0" anchor="t"/>
+          <a:lstStyle/>
+          <a:p>
+            <a:pPr algn="l">
+              <a:spcAft>
+                <a:spcPts val="200"/>
+              </a:spcAft>
+            </a:pPr>
+            <a:r>
+              <a:rPr lang="es-ES" sz="1400" b="1" i="0" dirty="0">
+                <a:solidFill>
+                  <a:srgbClr val="3B7D3A"/>
+                </a:solidFill>
+              </a:rPr>
+              <a:t>C3  </a:t>
+            </a:r>
+            <a:r>
+              <a:rPr lang="es-ES" sz="1300" b="1" i="0" dirty="0">
+                <a:solidFill>
+                  <a:srgbClr val="242852"/>
+                </a:solidFill>
+              </a:rPr>
+              <a:t>ANECA ·  acreditación</a:t>
+            </a:r>
+          </a:p>
+          <a:p>
+            <a:pPr algn="l">
+              <a:spcAft>
+                <a:spcPts val="200"/>
+              </a:spcAft>
+            </a:pPr>
+            <a:r>
+              <a:rPr lang="es-ES" sz="1200" b="0" i="0" dirty="0">
+                <a:solidFill>
+                  <a:srgbClr val="FF0000"/>
+                </a:solidFill>
+              </a:rPr>
+              <a:t>R4 + R6</a:t>
+            </a:r>
+            <a:endParaRPr lang="es-ES" sz="1200" dirty="0">
+              <a:solidFill>
+                <a:srgbClr val="262626"/>
+              </a:solidFill>
+            </a:endParaRPr>
+          </a:p>
+          <a:p>
+            <a:pPr marL="171450" indent="-171450" algn="l">
+              <a:spcAft>
+                <a:spcPts val="200"/>
+              </a:spcAft>
+              <a:buFont typeface="Arial" panose="020B0604020202020204" pitchFamily="34" charset="0"/>
+              <a:buChar char="•"/>
+            </a:pPr>
+            <a:r>
+              <a:rPr lang="es-ES" sz="1200" b="0" i="0" dirty="0">
+                <a:solidFill>
+                  <a:srgbClr val="262626"/>
+                </a:solidFill>
+              </a:rPr>
+              <a:t>Aclaración general a las comisiones</a:t>
+            </a:r>
+            <a:endParaRPr lang="es-ES" sz="1200" dirty="0">
+              <a:solidFill>
+                <a:srgbClr val="262626"/>
+              </a:solidFill>
+            </a:endParaRPr>
+          </a:p>
+          <a:p>
+            <a:pPr marL="171450" indent="-171450" algn="l">
+              <a:spcAft>
+                <a:spcPts val="200"/>
+              </a:spcAft>
+              <a:buFont typeface="Arial" panose="020B0604020202020204" pitchFamily="34" charset="0"/>
+              <a:buChar char="•"/>
+            </a:pPr>
+            <a:r>
+              <a:rPr lang="es-ES" sz="1200" b="0" i="0" dirty="0">
+                <a:solidFill>
+                  <a:srgbClr val="262626"/>
+                </a:solidFill>
+              </a:rPr>
+              <a:t>comités de programa como mérito</a:t>
+            </a:r>
+            <a:endParaRPr lang="es-ES" sz="1200" dirty="0">
+              <a:solidFill>
+                <a:srgbClr val="262626"/>
+              </a:solidFill>
+            </a:endParaRPr>
+          </a:p>
+          <a:p>
+            <a:pPr marL="171450" indent="-171450" algn="l">
+              <a:spcAft>
+                <a:spcPts val="200"/>
+              </a:spcAft>
+              <a:buFont typeface="Arial" panose="020B0604020202020204" pitchFamily="34" charset="0"/>
+              <a:buChar char="•"/>
+            </a:pPr>
+            <a:r>
+              <a:rPr lang="es-ES" sz="1200" b="0" i="0" dirty="0">
+                <a:solidFill>
+                  <a:srgbClr val="262626"/>
+                </a:solidFill>
+              </a:rPr>
+              <a:t>coherencia con sexenios</a:t>
+            </a:r>
+          </a:p>
+        </p:txBody>
+      </p:sp>
+      <p:cxnSp>
+        <p:nvCxnSpPr>
+          <p:cNvPr id="19" name="Connector 18"/>
+          <p:cNvCxnSpPr>
+            <a:cxnSpLocks/>
+            <a:stCxn id="11" idx="3"/>
+          </p:cNvCxnSpPr>
+          <p:nvPr/>
+        </p:nvCxnSpPr>
+        <p:spPr>
+          <a:xfrm>
+            <a:off x="3828000" y="1965960"/>
+            <a:ext cx="557640" cy="91440"/>
+          </a:xfrm>
+          <a:prstGeom prst="line">
+            <a:avLst/>
+          </a:prstGeom>
+          <a:ln w="22225">
+            <a:solidFill>
+              <a:srgbClr val="595959"/>
+            </a:solidFill>
+            <a:tailEnd type="triangle" w="med" len="med"/>
+          </a:ln>
+        </p:spPr>
+        <p:style>
+          <a:lnRef idx="2">
+            <a:schemeClr val="accent1"/>
+          </a:lnRef>
+          <a:fillRef idx="0">
+            <a:schemeClr val="accent1"/>
+          </a:fillRef>
+          <a:effectRef idx="1">
+            <a:schemeClr val="accent1"/>
+          </a:effectRef>
+          <a:fontRef idx="minor">
+            <a:schemeClr val="tx1"/>
+          </a:fontRef>
+        </p:style>
+      </p:cxnSp>
+      <p:cxnSp>
+        <p:nvCxnSpPr>
+          <p:cNvPr id="20" name="Connector 19"/>
+          <p:cNvCxnSpPr>
+            <a:cxnSpLocks/>
+            <a:endCxn id="16" idx="1"/>
+          </p:cNvCxnSpPr>
+          <p:nvPr/>
+        </p:nvCxnSpPr>
+        <p:spPr>
+          <a:xfrm flipV="1">
+            <a:off x="7608000" y="1965960"/>
+            <a:ext cx="507360" cy="95040"/>
+          </a:xfrm>
+          <a:prstGeom prst="line">
+            <a:avLst/>
+          </a:prstGeom>
+          <a:ln w="22225">
+            <a:solidFill>
+              <a:srgbClr val="595959"/>
+            </a:solidFill>
+            <a:tailEnd type="triangle" w="med" len="med"/>
+          </a:ln>
+        </p:spPr>
+        <p:style>
+          <a:lnRef idx="2">
+            <a:schemeClr val="accent1"/>
+          </a:lnRef>
+          <a:fillRef idx="0">
+            <a:schemeClr val="accent1"/>
+          </a:fillRef>
+          <a:effectRef idx="1">
+            <a:schemeClr val="accent1"/>
+          </a:effectRef>
+          <a:fontRef idx="minor">
+            <a:schemeClr val="tx1"/>
+          </a:fontRef>
+        </p:style>
+      </p:cxnSp>
+      <p:cxnSp>
+        <p:nvCxnSpPr>
+          <p:cNvPr id="21" name="Connector 20"/>
+          <p:cNvCxnSpPr>
+            <a:cxnSpLocks/>
+            <a:stCxn id="12" idx="3"/>
+          </p:cNvCxnSpPr>
+          <p:nvPr/>
+        </p:nvCxnSpPr>
+        <p:spPr>
+          <a:xfrm>
+            <a:off x="3828000" y="3584448"/>
+            <a:ext cx="557640" cy="0"/>
+          </a:xfrm>
+          <a:prstGeom prst="line">
+            <a:avLst/>
+          </a:prstGeom>
+          <a:ln w="22225">
+            <a:solidFill>
+              <a:srgbClr val="595959"/>
+            </a:solidFill>
+            <a:tailEnd type="triangle" w="med" len="med"/>
+          </a:ln>
+        </p:spPr>
+        <p:style>
+          <a:lnRef idx="2">
+            <a:schemeClr val="accent1"/>
+          </a:lnRef>
+          <a:fillRef idx="0">
+            <a:schemeClr val="accent1"/>
+          </a:fillRef>
+          <a:effectRef idx="1">
+            <a:schemeClr val="accent1"/>
+          </a:effectRef>
+          <a:fontRef idx="minor">
+            <a:schemeClr val="tx1"/>
+          </a:fontRef>
+        </p:style>
+      </p:cxnSp>
+      <p:cxnSp>
+        <p:nvCxnSpPr>
+          <p:cNvPr id="22" name="Connector 21"/>
+          <p:cNvCxnSpPr>
+            <a:cxnSpLocks/>
+            <a:stCxn id="14" idx="3"/>
+            <a:endCxn id="17" idx="1"/>
+          </p:cNvCxnSpPr>
+          <p:nvPr/>
+        </p:nvCxnSpPr>
+        <p:spPr>
+          <a:xfrm>
+            <a:off x="7648905" y="3566160"/>
+            <a:ext cx="466455" cy="18288"/>
+          </a:xfrm>
+          <a:prstGeom prst="line">
+            <a:avLst/>
+          </a:prstGeom>
+          <a:ln w="22225">
+            <a:solidFill>
+              <a:srgbClr val="595959"/>
+            </a:solidFill>
+            <a:tailEnd type="triangle" w="med" len="med"/>
+          </a:ln>
+        </p:spPr>
+        <p:style>
+          <a:lnRef idx="2">
+            <a:schemeClr val="accent1"/>
+          </a:lnRef>
+          <a:fillRef idx="0">
+            <a:schemeClr val="accent1"/>
+          </a:fillRef>
+          <a:effectRef idx="1">
+            <a:schemeClr val="accent1"/>
+          </a:effectRef>
+          <a:fontRef idx="minor">
+            <a:schemeClr val="tx1"/>
+          </a:fontRef>
+        </p:style>
+      </p:cxnSp>
+      <p:cxnSp>
+        <p:nvCxnSpPr>
+          <p:cNvPr id="23" name="Connector 22"/>
+          <p:cNvCxnSpPr>
+            <a:cxnSpLocks/>
+            <a:stCxn id="13" idx="3"/>
+          </p:cNvCxnSpPr>
+          <p:nvPr/>
+        </p:nvCxnSpPr>
+        <p:spPr>
+          <a:xfrm flipV="1">
+            <a:off x="3828000" y="5074920"/>
+            <a:ext cx="557640" cy="128016"/>
+          </a:xfrm>
+          <a:prstGeom prst="line">
+            <a:avLst/>
+          </a:prstGeom>
+          <a:ln w="22225">
+            <a:solidFill>
+              <a:srgbClr val="595959"/>
+            </a:solidFill>
+            <a:tailEnd type="triangle" w="med" len="med"/>
+          </a:ln>
+        </p:spPr>
+        <p:style>
+          <a:lnRef idx="2">
+            <a:schemeClr val="accent1"/>
+          </a:lnRef>
+          <a:fillRef idx="0">
+            <a:schemeClr val="accent1"/>
+          </a:fillRef>
+          <a:effectRef idx="1">
+            <a:schemeClr val="accent1"/>
+          </a:effectRef>
+          <a:fontRef idx="minor">
+            <a:schemeClr val="tx1"/>
+          </a:fontRef>
+        </p:style>
+      </p:cxnSp>
+      <p:cxnSp>
+        <p:nvCxnSpPr>
+          <p:cNvPr id="24" name="Connector 23"/>
+          <p:cNvCxnSpPr>
+            <a:cxnSpLocks/>
+            <a:endCxn id="18" idx="1"/>
+          </p:cNvCxnSpPr>
+          <p:nvPr/>
+        </p:nvCxnSpPr>
+        <p:spPr>
+          <a:xfrm>
+            <a:off x="7608000" y="5013000"/>
+            <a:ext cx="480960" cy="189936"/>
+          </a:xfrm>
+          <a:prstGeom prst="line">
+            <a:avLst/>
+          </a:prstGeom>
+          <a:ln w="22225">
+            <a:solidFill>
+              <a:srgbClr val="595959"/>
+            </a:solidFill>
+            <a:tailEnd type="triangle" w="med" len="med"/>
+          </a:ln>
+        </p:spPr>
+        <p:style>
+          <a:lnRef idx="2">
+            <a:schemeClr val="accent1"/>
+          </a:lnRef>
+          <a:fillRef idx="0">
+            <a:schemeClr val="accent1"/>
+          </a:fillRef>
+          <a:effectRef idx="1">
+            <a:schemeClr val="accent1"/>
+          </a:effectRef>
+          <a:fontRef idx="minor">
+            <a:schemeClr val="tx1"/>
+          </a:fontRef>
+        </p:style>
+      </p:cxnSp>
+      <p:sp>
+        <p:nvSpPr>
+          <p:cNvPr id="25" name="TextBox 24"/>
+          <p:cNvSpPr txBox="1"/>
+          <p:nvPr/>
+        </p:nvSpPr>
+        <p:spPr>
+          <a:xfrm>
+            <a:off x="548640" y="6016752"/>
+            <a:ext cx="11109960" cy="261610"/>
+          </a:xfrm>
+          <a:prstGeom prst="rect">
+            <a:avLst/>
+          </a:prstGeom>
+          <a:noFill/>
+        </p:spPr>
+        <p:txBody>
+          <a:bodyPr wrap="square" lIns="0" rIns="0" anchor="t">
+            <a:spAutoFit/>
+          </a:bodyPr>
+          <a:lstStyle/>
+          <a:p>
+            <a:pPr algn="ctr">
+              <a:spcAft>
+                <a:spcPts val="200"/>
+              </a:spcAft>
+            </a:pPr>
+            <a:r>
+              <a:rPr lang="es-ES" sz="1100" b="0" i="1">
+                <a:solidFill>
+                  <a:srgbClr val="595959"/>
+                </a:solidFill>
+              </a:rPr>
+              <a:t>Cada carta pide a su destinatario solo lo que este puede conceder; los tres informes y la propuesta van adjuntos a las tres cartas.</a:t>
+            </a:r>
+          </a:p>
+        </p:txBody>
+      </p:sp>
+    </p:spTree>
+    <p:extLst>
+      <p:ext uri="{BB962C8B-B14F-4D97-AF65-F5344CB8AC3E}">
+        <p14:creationId xmlns:p14="http://schemas.microsoft.com/office/powerpoint/2010/main" val="423446900"/>
+      </p:ext>
+    </p:extLst>
+  </p:cSld>
+  <p:clrMapOvr>
+    <a:masterClrMapping/>
+  </p:clrMapOvr>
+</p:sld>
+</file>
+
+<file path=ppt/slides/slide27.xml><?xml version="1.0" encoding="utf-8"?>
+<p:sld xmlns:a="http://schemas.openxmlformats.org/drawingml/2006/main" xmlns:r="http://schemas.openxmlformats.org/officeDocument/2006/relationships" xmlns:p="http://schemas.openxmlformats.org/presentationml/2006/main">
+  <p:cSld>
+    <p:spTree>
+      <p:nvGrpSpPr>
+        <p:cNvPr id="1" name=""/>
+        <p:cNvGrpSpPr/>
+        <p:nvPr/>
+      </p:nvGrpSpPr>
+      <p:grpSpPr>
+        <a:xfrm>
+          <a:off x="0" y="0"/>
+          <a:ext cx="0" cy="0"/>
+          <a:chOff x="0" y="0"/>
+          <a:chExt cx="0" cy="0"/>
+        </a:xfrm>
+      </p:grpSpPr>
+      <p:sp>
+        <p:nvSpPr>
+          <p:cNvPr id="7" name="Title 6">
+            <a:extLst>
+              <a:ext uri="{FF2B5EF4-FFF2-40B4-BE49-F238E27FC236}">
+                <a16:creationId xmlns:a16="http://schemas.microsoft.com/office/drawing/2014/main" id="{3EAA235A-E47A-4963-B160-062E476FC7B7}"/>
+              </a:ext>
+            </a:extLst>
+          </p:cNvPr>
+          <p:cNvSpPr>
+            <a:spLocks noGrp="1"/>
+          </p:cNvSpPr>
+          <p:nvPr>
+            <p:ph type="title"/>
+          </p:nvPr>
+        </p:nvSpPr>
+        <p:spPr/>
+        <p:txBody>
+          <a:bodyPr/>
+          <a:lstStyle/>
+          <a:p>
+            <a:r>
+              <a:t>Quién decide qué, y cuándo</a:t>
+            </a:r>
+          </a:p>
+        </p:txBody>
+      </p:sp>
+      <p:sp>
+        <p:nvSpPr>
+          <p:cNvPr id="3" name="Footer Placeholder 2">
+            <a:extLst>
+              <a:ext uri="{FF2B5EF4-FFF2-40B4-BE49-F238E27FC236}">
+                <a16:creationId xmlns:a16="http://schemas.microsoft.com/office/drawing/2014/main" id="{E770E632-9998-40C0-81B7-B6103B8DD5CD}"/>
+              </a:ext>
+            </a:extLst>
+          </p:cNvPr>
+          <p:cNvSpPr>
+            <a:spLocks noGrp="1"/>
+          </p:cNvSpPr>
+          <p:nvPr>
+            <p:ph type="ftr" sz="quarter" idx="11"/>
+          </p:nvPr>
+        </p:nvSpPr>
+        <p:spPr/>
+        <p:txBody>
+          <a:bodyPr/>
+          <a:lstStyle/>
+          <a:p>
+            <a:r>
+              <a:rPr lang="es-ES"/>
+              <a:t>Ecosistema Científico y Tecnológico Español</a:t>
+            </a:r>
+            <a:r>
+              <a:rPr lang="es-ES">
+                <a:latin typeface="Arial Black" panose="020B0A04020102020204" pitchFamily="34" charset="0"/>
+              </a:rPr>
+              <a:t> </a:t>
+            </a:r>
+            <a:r>
+              <a:rPr lang="es-ES">
+                <a:latin typeface="Arial Black" panose="020B0A04020102020204" pitchFamily="34" charset="0"/>
+                <a:sym typeface="Symbol" panose="05050102010706020507" pitchFamily="18" charset="2"/>
+              </a:rPr>
+              <a:t> </a:t>
+            </a:r>
+            <a:r>
+              <a:rPr lang="es-ES"/>
+              <a:t>COSCE 2026</a:t>
+            </a:r>
+            <a:r>
+              <a:rPr lang="es-ES">
+                <a:latin typeface="Arial Black" panose="020B0A04020102020204" pitchFamily="34" charset="0"/>
+              </a:rPr>
+              <a:t> </a:t>
+            </a:r>
+            <a:r>
+              <a:rPr lang="es-ES">
+                <a:latin typeface="Arial Black" panose="020B0A04020102020204" pitchFamily="34" charset="0"/>
+                <a:sym typeface="Symbol" panose="05050102010706020507" pitchFamily="18" charset="2"/>
+              </a:rPr>
+              <a:t> </a:t>
+            </a:r>
+            <a:r>
+              <a:rPr lang="es-ES"/>
+              <a:t>Transferencia y congresos en Informática</a:t>
+            </a:r>
+            <a:endParaRPr lang="es-ES" dirty="0"/>
+          </a:p>
+        </p:txBody>
+      </p:sp>
+      <p:sp>
+        <p:nvSpPr>
+          <p:cNvPr id="4" name="Slide Number Placeholder 3">
+            <a:extLst>
+              <a:ext uri="{FF2B5EF4-FFF2-40B4-BE49-F238E27FC236}">
+                <a16:creationId xmlns:a16="http://schemas.microsoft.com/office/drawing/2014/main" id="{ACAE09C3-23FA-4EAF-AC5A-5E9DEEEAC337}"/>
+              </a:ext>
+            </a:extLst>
+          </p:cNvPr>
+          <p:cNvSpPr>
+            <a:spLocks noGrp="1"/>
+          </p:cNvSpPr>
+          <p:nvPr>
+            <p:ph type="sldNum" sz="quarter" idx="12"/>
+          </p:nvPr>
+        </p:nvSpPr>
+        <p:spPr/>
+        <p:txBody>
+          <a:bodyPr/>
+          <a:lstStyle/>
+          <a:p>
+            <a:fld id="{4A490C5D-AEA8-4823-B9B3-806910A0ECF7}" type="slidenum">
+              <a:rPr lang="es-ES" smtClean="0"/>
+              <a:pPr/>
+              <a:t>27</a:t>
+            </a:fld>
+            <a:endParaRPr lang="es-ES" dirty="0"/>
+          </a:p>
+        </p:txBody>
+      </p:sp>
+      <p:sp>
+        <p:nvSpPr>
+          <p:cNvPr id="8" name="TextBox 7"/>
+          <p:cNvSpPr txBox="1"/>
+          <p:nvPr/>
+        </p:nvSpPr>
+        <p:spPr>
+          <a:xfrm>
+            <a:off x="548640" y="914400"/>
+            <a:ext cx="11109960" cy="274320"/>
+          </a:xfrm>
+          <a:prstGeom prst="rect">
+            <a:avLst/>
+          </a:prstGeom>
+          <a:noFill/>
+        </p:spPr>
+        <p:txBody>
+          <a:bodyPr wrap="square" lIns="0" rIns="0" anchor="t">
+            <a:spAutoFit/>
+          </a:bodyPr>
+          <a:lstStyle/>
+          <a:p>
+            <a:pPr algn="l">
+              <a:spcAft>
+                <a:spcPts val="200"/>
+              </a:spcAft>
+            </a:pPr>
+            <a:r>
+              <a:rPr sz="1200" b="0" i="1">
+                <a:solidFill>
+                  <a:srgbClr val="595959"/>
+                </a:solidFill>
+              </a:rPr>
+              <a:t>Máximo de congresos entre las 5 aportaciones de un sexenio de informática, 2001–2025 (las revistas: siempre 5)</a:t>
+            </a:r>
+          </a:p>
+        </p:txBody>
+      </p:sp>
+      <p:sp>
+        <p:nvSpPr>
+          <p:cNvPr id="9" name="Régimen 2001–04"/>
+          <p:cNvSpPr/>
+          <p:nvPr/>
+        </p:nvSpPr>
+        <p:spPr>
+          <a:xfrm>
+            <a:off x="548640" y="1207008"/>
+            <a:ext cx="1750161" cy="457200"/>
+          </a:xfrm>
+          <a:prstGeom prst="rect">
+            <a:avLst/>
+          </a:prstGeom>
+          <a:solidFill>
+            <a:srgbClr val="3B7D3A"/>
+          </a:solidFill>
+          <a:ln>
+            <a:noFill/>
+          </a:ln>
+          <a:effectLst/>
+        </p:spPr>
+        <p:style>
+          <a:lnRef idx="1">
+            <a:schemeClr val="accent1"/>
+          </a:lnRef>
+          <a:fillRef idx="3">
+            <a:schemeClr val="accent1"/>
+          </a:fillRef>
+          <a:effectRef idx="2">
+            <a:schemeClr val="accent1"/>
+          </a:effectRef>
+          <a:fontRef idx="minor">
+            <a:schemeClr val="lt1"/>
+          </a:fontRef>
+        </p:style>
+        <p:txBody>
+          <a:bodyPr wrap="square" lIns="18288" tIns="54864" rIns="18288" bIns="54864" rtlCol="0" anchor="ctr"/>
+          <a:lstStyle/>
+          <a:p>
+            <a:pPr algn="ctr">
+              <a:spcAft>
+                <a:spcPts val="0"/>
+              </a:spcAft>
+            </a:pPr>
+            <a:r>
+              <a:rPr sz="1500" b="1" i="0">
+                <a:solidFill>
+                  <a:srgbClr val="FFFFFF"/>
+                </a:solidFill>
+              </a:rPr>
+              <a:t>5</a:t>
+            </a:r>
+          </a:p>
+        </p:txBody>
+      </p:sp>
+      <p:sp>
+        <p:nvSpPr>
+          <p:cNvPr id="10" name="TextBox 9"/>
+          <p:cNvSpPr txBox="1"/>
+          <p:nvPr/>
+        </p:nvSpPr>
+        <p:spPr>
+          <a:xfrm>
+            <a:off x="548640" y="1682496"/>
+            <a:ext cx="1750161" cy="228600"/>
+          </a:xfrm>
+          <a:prstGeom prst="rect">
+            <a:avLst/>
+          </a:prstGeom>
+          <a:noFill/>
+        </p:spPr>
+        <p:txBody>
+          <a:bodyPr wrap="square" lIns="0" rIns="0" anchor="t">
+            <a:spAutoFit/>
+          </a:bodyPr>
+          <a:lstStyle/>
+          <a:p>
+            <a:pPr algn="ctr">
+              <a:spcAft>
+                <a:spcPts val="200"/>
+              </a:spcAft>
+            </a:pPr>
+            <a:r>
+              <a:rPr sz="1000" b="0" i="0">
+                <a:solidFill>
+                  <a:srgbClr val="595959"/>
+                </a:solidFill>
+              </a:rPr>
+              <a:t>2001–04</a:t>
+            </a:r>
+          </a:p>
+        </p:txBody>
+      </p:sp>
+      <p:sp>
+        <p:nvSpPr>
+          <p:cNvPr id="11" name="Régimen 05–06"/>
+          <p:cNvSpPr/>
+          <p:nvPr/>
+        </p:nvSpPr>
+        <p:spPr>
+          <a:xfrm>
+            <a:off x="2326233" y="1207008"/>
+            <a:ext cx="861364" cy="457200"/>
+          </a:xfrm>
+          <a:prstGeom prst="rect">
+            <a:avLst/>
+          </a:prstGeom>
+          <a:solidFill>
+            <a:srgbClr val="E09B2D"/>
+          </a:solidFill>
+          <a:ln>
+            <a:noFill/>
+          </a:ln>
+          <a:effectLst/>
+        </p:spPr>
+        <p:style>
+          <a:lnRef idx="1">
+            <a:schemeClr val="accent1"/>
+          </a:lnRef>
+          <a:fillRef idx="3">
+            <a:schemeClr val="accent1"/>
+          </a:fillRef>
+          <a:effectRef idx="2">
+            <a:schemeClr val="accent1"/>
+          </a:effectRef>
+          <a:fontRef idx="minor">
+            <a:schemeClr val="lt1"/>
+          </a:fontRef>
+        </p:style>
+        <p:txBody>
+          <a:bodyPr wrap="square" lIns="18288" tIns="54864" rIns="18288" bIns="54864" rtlCol="0" anchor="ctr"/>
+          <a:lstStyle/>
+          <a:p>
+            <a:pPr algn="ctr">
+              <a:spcAft>
+                <a:spcPts val="0"/>
+              </a:spcAft>
+            </a:pPr>
+            <a:r>
+              <a:rPr sz="1500" b="1" i="0">
+                <a:solidFill>
+                  <a:srgbClr val="FFFFFF"/>
+                </a:solidFill>
+              </a:rPr>
+              <a:t>3</a:t>
+            </a:r>
+          </a:p>
+        </p:txBody>
+      </p:sp>
+      <p:sp>
+        <p:nvSpPr>
+          <p:cNvPr id="12" name="TextBox 11"/>
+          <p:cNvSpPr txBox="1"/>
+          <p:nvPr/>
+        </p:nvSpPr>
+        <p:spPr>
+          <a:xfrm>
+            <a:off x="2326233" y="1682496"/>
+            <a:ext cx="861364" cy="228600"/>
+          </a:xfrm>
+          <a:prstGeom prst="rect">
+            <a:avLst/>
+          </a:prstGeom>
+          <a:noFill/>
+        </p:spPr>
+        <p:txBody>
+          <a:bodyPr wrap="square" lIns="0" rIns="0" anchor="t">
+            <a:spAutoFit/>
+          </a:bodyPr>
+          <a:lstStyle/>
+          <a:p>
+            <a:pPr algn="ctr">
+              <a:spcAft>
+                <a:spcPts val="200"/>
+              </a:spcAft>
+            </a:pPr>
+            <a:r>
+              <a:rPr sz="1000" b="0" i="0">
+                <a:solidFill>
+                  <a:srgbClr val="595959"/>
+                </a:solidFill>
+              </a:rPr>
+              <a:t>05–06</a:t>
+            </a:r>
+          </a:p>
+        </p:txBody>
+      </p:sp>
+      <p:sp>
+        <p:nvSpPr>
+          <p:cNvPr id="13" name="Régimen 2007–2013"/>
+          <p:cNvSpPr/>
+          <p:nvPr/>
+        </p:nvSpPr>
+        <p:spPr>
+          <a:xfrm>
+            <a:off x="3215030" y="1207008"/>
+            <a:ext cx="3083356" cy="457200"/>
+          </a:xfrm>
+          <a:prstGeom prst="rect">
+            <a:avLst/>
+          </a:prstGeom>
+          <a:solidFill>
+            <a:srgbClr val="3B7D3A"/>
+          </a:solidFill>
+          <a:ln>
+            <a:noFill/>
+          </a:ln>
+          <a:effectLst/>
+        </p:spPr>
+        <p:style>
+          <a:lnRef idx="1">
+            <a:schemeClr val="accent1"/>
+          </a:lnRef>
+          <a:fillRef idx="3">
+            <a:schemeClr val="accent1"/>
+          </a:fillRef>
+          <a:effectRef idx="2">
+            <a:schemeClr val="accent1"/>
+          </a:effectRef>
+          <a:fontRef idx="minor">
+            <a:schemeClr val="lt1"/>
+          </a:fontRef>
+        </p:style>
+        <p:txBody>
+          <a:bodyPr wrap="square" lIns="18288" tIns="54864" rIns="18288" bIns="54864" rtlCol="0" anchor="ctr"/>
+          <a:lstStyle/>
+          <a:p>
+            <a:pPr algn="ctr">
+              <a:spcAft>
+                <a:spcPts val="0"/>
+              </a:spcAft>
+            </a:pPr>
+            <a:r>
+              <a:rPr sz="1500" b="1" i="0">
+                <a:solidFill>
+                  <a:srgbClr val="FFFFFF"/>
+                </a:solidFill>
+              </a:rPr>
+              <a:t>5</a:t>
+            </a:r>
+          </a:p>
+        </p:txBody>
+      </p:sp>
+      <p:sp>
+        <p:nvSpPr>
+          <p:cNvPr id="14" name="TextBox 13"/>
+          <p:cNvSpPr txBox="1"/>
+          <p:nvPr/>
+        </p:nvSpPr>
+        <p:spPr>
+          <a:xfrm>
+            <a:off x="3215030" y="1682496"/>
+            <a:ext cx="3083356" cy="228600"/>
+          </a:xfrm>
+          <a:prstGeom prst="rect">
+            <a:avLst/>
+          </a:prstGeom>
+          <a:noFill/>
+        </p:spPr>
+        <p:txBody>
+          <a:bodyPr wrap="square" lIns="0" rIns="0" anchor="t">
+            <a:spAutoFit/>
+          </a:bodyPr>
+          <a:lstStyle/>
+          <a:p>
+            <a:pPr algn="ctr">
+              <a:spcAft>
+                <a:spcPts val="200"/>
+              </a:spcAft>
+            </a:pPr>
+            <a:r>
+              <a:rPr sz="1000" b="0" i="0">
+                <a:solidFill>
+                  <a:srgbClr val="595959"/>
+                </a:solidFill>
+              </a:rPr>
+              <a:t>2007–2013</a:t>
+            </a:r>
+          </a:p>
+        </p:txBody>
+      </p:sp>
+      <p:sp>
+        <p:nvSpPr>
+          <p:cNvPr id="15" name="Régimen 14"/>
+          <p:cNvSpPr/>
+          <p:nvPr/>
+        </p:nvSpPr>
+        <p:spPr>
+          <a:xfrm>
+            <a:off x="6325819" y="1207008"/>
+            <a:ext cx="416966" cy="457200"/>
+          </a:xfrm>
+          <a:prstGeom prst="rect">
+            <a:avLst/>
+          </a:prstGeom>
+          <a:solidFill>
+            <a:srgbClr val="E09B2D"/>
+          </a:solidFill>
+          <a:ln>
+            <a:noFill/>
+          </a:ln>
+          <a:effectLst/>
+        </p:spPr>
+        <p:style>
+          <a:lnRef idx="1">
+            <a:schemeClr val="accent1"/>
+          </a:lnRef>
+          <a:fillRef idx="3">
+            <a:schemeClr val="accent1"/>
+          </a:fillRef>
+          <a:effectRef idx="2">
+            <a:schemeClr val="accent1"/>
+          </a:effectRef>
+          <a:fontRef idx="minor">
+            <a:schemeClr val="lt1"/>
+          </a:fontRef>
+        </p:style>
+        <p:txBody>
+          <a:bodyPr wrap="square" lIns="18288" tIns="54864" rIns="18288" bIns="54864" rtlCol="0" anchor="ctr"/>
+          <a:lstStyle/>
+          <a:p>
+            <a:pPr algn="ctr">
+              <a:spcAft>
+                <a:spcPts val="0"/>
+              </a:spcAft>
+            </a:pPr>
+            <a:r>
+              <a:rPr sz="1500" b="1" i="0">
+                <a:solidFill>
+                  <a:srgbClr val="FFFFFF"/>
+                </a:solidFill>
+              </a:rPr>
+              <a:t>3</a:t>
+            </a:r>
+          </a:p>
+        </p:txBody>
+      </p:sp>
+      <p:sp>
+        <p:nvSpPr>
+          <p:cNvPr id="16" name="TextBox 15"/>
+          <p:cNvSpPr txBox="1"/>
+          <p:nvPr/>
+        </p:nvSpPr>
+        <p:spPr>
+          <a:xfrm>
+            <a:off x="6325819" y="1682496"/>
+            <a:ext cx="416966" cy="228600"/>
+          </a:xfrm>
+          <a:prstGeom prst="rect">
+            <a:avLst/>
+          </a:prstGeom>
+          <a:noFill/>
+        </p:spPr>
+        <p:txBody>
+          <a:bodyPr wrap="square" lIns="0" rIns="0" anchor="t">
+            <a:spAutoFit/>
+          </a:bodyPr>
+          <a:lstStyle/>
+          <a:p>
+            <a:pPr algn="ctr">
+              <a:spcAft>
+                <a:spcPts val="200"/>
+              </a:spcAft>
+            </a:pPr>
+            <a:r>
+              <a:rPr sz="1000" b="0" i="0">
+                <a:solidFill>
+                  <a:srgbClr val="595959"/>
+                </a:solidFill>
+              </a:rPr>
+              <a:t>14</a:t>
+            </a:r>
+          </a:p>
+        </p:txBody>
+      </p:sp>
+      <p:sp>
+        <p:nvSpPr>
+          <p:cNvPr id="17" name="Régimen 2015–2020"/>
+          <p:cNvSpPr/>
+          <p:nvPr/>
+        </p:nvSpPr>
+        <p:spPr>
+          <a:xfrm>
+            <a:off x="6770217" y="1207008"/>
+            <a:ext cx="2638958" cy="457200"/>
+          </a:xfrm>
+          <a:prstGeom prst="rect">
+            <a:avLst/>
+          </a:prstGeom>
+          <a:solidFill>
+            <a:srgbClr val="C0392B"/>
+          </a:solidFill>
+          <a:ln>
+            <a:noFill/>
+          </a:ln>
+          <a:effectLst/>
+        </p:spPr>
+        <p:style>
+          <a:lnRef idx="1">
+            <a:schemeClr val="accent1"/>
+          </a:lnRef>
+          <a:fillRef idx="3">
+            <a:schemeClr val="accent1"/>
+          </a:fillRef>
+          <a:effectRef idx="2">
+            <a:schemeClr val="accent1"/>
+          </a:effectRef>
+          <a:fontRef idx="minor">
+            <a:schemeClr val="lt1"/>
+          </a:fontRef>
+        </p:style>
+        <p:txBody>
+          <a:bodyPr wrap="square" lIns="18288" tIns="54864" rIns="18288" bIns="54864" rtlCol="0" anchor="ctr"/>
+          <a:lstStyle/>
+          <a:p>
+            <a:pPr algn="ctr">
+              <a:spcAft>
+                <a:spcPts val="0"/>
+              </a:spcAft>
+            </a:pPr>
+            <a:r>
+              <a:rPr sz="1500" b="1" i="0">
+                <a:solidFill>
+                  <a:srgbClr val="FFFFFF"/>
+                </a:solidFill>
+              </a:rPr>
+              <a:t>2</a:t>
+            </a:r>
+          </a:p>
+        </p:txBody>
+      </p:sp>
+      <p:sp>
+        <p:nvSpPr>
+          <p:cNvPr id="18" name="TextBox 17"/>
+          <p:cNvSpPr txBox="1"/>
+          <p:nvPr/>
+        </p:nvSpPr>
+        <p:spPr>
+          <a:xfrm>
+            <a:off x="6770217" y="1682496"/>
+            <a:ext cx="2638958" cy="228600"/>
+          </a:xfrm>
+          <a:prstGeom prst="rect">
+            <a:avLst/>
+          </a:prstGeom>
+          <a:noFill/>
+        </p:spPr>
+        <p:txBody>
+          <a:bodyPr wrap="square" lIns="0" rIns="0" anchor="t">
+            <a:spAutoFit/>
+          </a:bodyPr>
+          <a:lstStyle/>
+          <a:p>
+            <a:pPr algn="ctr">
+              <a:spcAft>
+                <a:spcPts val="200"/>
+              </a:spcAft>
+            </a:pPr>
+            <a:r>
+              <a:rPr sz="1000" b="0" i="0">
+                <a:solidFill>
+                  <a:srgbClr val="595959"/>
+                </a:solidFill>
+              </a:rPr>
+              <a:t>2015–2020</a:t>
+            </a:r>
+          </a:p>
+        </p:txBody>
+      </p:sp>
+      <p:sp>
+        <p:nvSpPr>
+          <p:cNvPr id="19" name="Régimen 21–22"/>
+          <p:cNvSpPr/>
+          <p:nvPr/>
+        </p:nvSpPr>
+        <p:spPr>
+          <a:xfrm>
+            <a:off x="9436608" y="1207008"/>
+            <a:ext cx="861364" cy="457200"/>
+          </a:xfrm>
+          <a:prstGeom prst="rect">
+            <a:avLst/>
+          </a:prstGeom>
+          <a:solidFill>
+            <a:srgbClr val="3B7D3A"/>
+          </a:solidFill>
+          <a:ln>
+            <a:noFill/>
+          </a:ln>
+          <a:effectLst/>
+        </p:spPr>
+        <p:style>
+          <a:lnRef idx="1">
+            <a:schemeClr val="accent1"/>
+          </a:lnRef>
+          <a:fillRef idx="3">
+            <a:schemeClr val="accent1"/>
+          </a:fillRef>
+          <a:effectRef idx="2">
+            <a:schemeClr val="accent1"/>
+          </a:effectRef>
+          <a:fontRef idx="minor">
+            <a:schemeClr val="lt1"/>
+          </a:fontRef>
+        </p:style>
+        <p:txBody>
+          <a:bodyPr wrap="square" lIns="18288" tIns="54864" rIns="18288" bIns="54864" rtlCol="0" anchor="ctr"/>
+          <a:lstStyle/>
+          <a:p>
+            <a:pPr algn="ctr">
+              <a:spcAft>
+                <a:spcPts val="0"/>
+              </a:spcAft>
+            </a:pPr>
+            <a:r>
+              <a:rPr sz="1500" b="1" i="0">
+                <a:solidFill>
+                  <a:srgbClr val="FFFFFF"/>
+                </a:solidFill>
+              </a:rPr>
+              <a:t>5</a:t>
+            </a:r>
+          </a:p>
+        </p:txBody>
+      </p:sp>
+      <p:sp>
+        <p:nvSpPr>
+          <p:cNvPr id="20" name="TextBox 19"/>
+          <p:cNvSpPr txBox="1"/>
+          <p:nvPr/>
+        </p:nvSpPr>
+        <p:spPr>
+          <a:xfrm>
+            <a:off x="9436608" y="1682496"/>
+            <a:ext cx="861364" cy="228600"/>
+          </a:xfrm>
+          <a:prstGeom prst="rect">
+            <a:avLst/>
+          </a:prstGeom>
+          <a:noFill/>
+        </p:spPr>
+        <p:txBody>
+          <a:bodyPr wrap="square" lIns="0" rIns="0" anchor="t">
+            <a:spAutoFit/>
+          </a:bodyPr>
+          <a:lstStyle/>
+          <a:p>
+            <a:pPr algn="ctr">
+              <a:spcAft>
+                <a:spcPts val="200"/>
+              </a:spcAft>
+            </a:pPr>
+            <a:r>
+              <a:rPr sz="1000" b="0" i="0">
+                <a:solidFill>
+                  <a:srgbClr val="595959"/>
+                </a:solidFill>
+              </a:rPr>
+              <a:t>21–22</a:t>
+            </a:r>
+          </a:p>
+        </p:txBody>
+      </p:sp>
+      <p:sp>
+        <p:nvSpPr>
+          <p:cNvPr id="21" name="Régimen 23"/>
+          <p:cNvSpPr/>
+          <p:nvPr/>
+        </p:nvSpPr>
+        <p:spPr>
+          <a:xfrm>
+            <a:off x="10325404" y="1207008"/>
+            <a:ext cx="416966" cy="457200"/>
+          </a:xfrm>
+          <a:prstGeom prst="rect">
+            <a:avLst/>
+          </a:prstGeom>
+          <a:solidFill>
+            <a:srgbClr val="C0392B"/>
+          </a:solidFill>
+          <a:ln>
+            <a:noFill/>
+          </a:ln>
+          <a:effectLst/>
+        </p:spPr>
+        <p:style>
+          <a:lnRef idx="1">
+            <a:schemeClr val="accent1"/>
+          </a:lnRef>
+          <a:fillRef idx="3">
+            <a:schemeClr val="accent1"/>
+          </a:fillRef>
+          <a:effectRef idx="2">
+            <a:schemeClr val="accent1"/>
+          </a:effectRef>
+          <a:fontRef idx="minor">
+            <a:schemeClr val="lt1"/>
+          </a:fontRef>
+        </p:style>
+        <p:txBody>
+          <a:bodyPr wrap="square" lIns="18288" tIns="54864" rIns="18288" bIns="54864" rtlCol="0" anchor="ctr"/>
+          <a:lstStyle/>
+          <a:p>
+            <a:pPr algn="ctr">
+              <a:spcAft>
+                <a:spcPts val="0"/>
+              </a:spcAft>
+            </a:pPr>
+            <a:r>
+              <a:rPr sz="1500" b="1" i="0">
+                <a:solidFill>
+                  <a:srgbClr val="FFFFFF"/>
+                </a:solidFill>
+              </a:rPr>
+              <a:t>2</a:t>
+            </a:r>
+          </a:p>
+        </p:txBody>
+      </p:sp>
+      <p:sp>
+        <p:nvSpPr>
+          <p:cNvPr id="22" name="TextBox 21"/>
+          <p:cNvSpPr txBox="1"/>
+          <p:nvPr/>
+        </p:nvSpPr>
+        <p:spPr>
+          <a:xfrm>
+            <a:off x="10325404" y="1682496"/>
+            <a:ext cx="416966" cy="228600"/>
+          </a:xfrm>
+          <a:prstGeom prst="rect">
+            <a:avLst/>
+          </a:prstGeom>
+          <a:noFill/>
+        </p:spPr>
+        <p:txBody>
+          <a:bodyPr wrap="square" lIns="0" rIns="0" anchor="t">
+            <a:spAutoFit/>
+          </a:bodyPr>
+          <a:lstStyle/>
+          <a:p>
+            <a:pPr algn="ctr">
+              <a:spcAft>
+                <a:spcPts val="200"/>
+              </a:spcAft>
+            </a:pPr>
+            <a:r>
+              <a:rPr sz="1000" b="0" i="0">
+                <a:solidFill>
+                  <a:srgbClr val="595959"/>
+                </a:solidFill>
+              </a:rPr>
+              <a:t>23</a:t>
+            </a:r>
+          </a:p>
+        </p:txBody>
+      </p:sp>
+      <p:sp>
+        <p:nvSpPr>
+          <p:cNvPr id="23" name="Régimen 24–25"/>
+          <p:cNvSpPr/>
+          <p:nvPr/>
+        </p:nvSpPr>
+        <p:spPr>
+          <a:xfrm>
+            <a:off x="10769803" y="1207008"/>
+            <a:ext cx="861364" cy="457200"/>
+          </a:xfrm>
+          <a:prstGeom prst="rect">
+            <a:avLst/>
+          </a:prstGeom>
+          <a:solidFill>
+            <a:srgbClr val="E09B2D"/>
+          </a:solidFill>
+          <a:ln>
+            <a:noFill/>
+          </a:ln>
+          <a:effectLst/>
+        </p:spPr>
+        <p:style>
+          <a:lnRef idx="1">
+            <a:schemeClr val="accent1"/>
+          </a:lnRef>
+          <a:fillRef idx="3">
+            <a:schemeClr val="accent1"/>
+          </a:fillRef>
+          <a:effectRef idx="2">
+            <a:schemeClr val="accent1"/>
+          </a:effectRef>
+          <a:fontRef idx="minor">
+            <a:schemeClr val="lt1"/>
+          </a:fontRef>
+        </p:style>
+        <p:txBody>
+          <a:bodyPr wrap="square" lIns="18288" tIns="54864" rIns="18288" bIns="54864" rtlCol="0" anchor="ctr"/>
+          <a:lstStyle/>
+          <a:p>
+            <a:pPr algn="ctr">
+              <a:spcAft>
+                <a:spcPts val="0"/>
+              </a:spcAft>
+            </a:pPr>
+            <a:r>
+              <a:rPr sz="1500" b="1" i="0">
+                <a:solidFill>
+                  <a:srgbClr val="FFFFFF"/>
+                </a:solidFill>
+              </a:rPr>
+              <a:t>3</a:t>
+            </a:r>
+          </a:p>
+        </p:txBody>
+      </p:sp>
+      <p:sp>
+        <p:nvSpPr>
+          <p:cNvPr id="24" name="TextBox 23"/>
+          <p:cNvSpPr txBox="1"/>
+          <p:nvPr/>
+        </p:nvSpPr>
+        <p:spPr>
+          <a:xfrm>
+            <a:off x="10769803" y="1682496"/>
+            <a:ext cx="861364" cy="228600"/>
+          </a:xfrm>
+          <a:prstGeom prst="rect">
+            <a:avLst/>
+          </a:prstGeom>
+          <a:noFill/>
+        </p:spPr>
+        <p:txBody>
+          <a:bodyPr wrap="square" lIns="0" rIns="0" anchor="t">
+            <a:spAutoFit/>
+          </a:bodyPr>
+          <a:lstStyle/>
+          <a:p>
+            <a:pPr algn="ctr">
+              <a:spcAft>
+                <a:spcPts val="200"/>
+              </a:spcAft>
+            </a:pPr>
+            <a:r>
+              <a:rPr sz="1000" b="0" i="0">
+                <a:solidFill>
+                  <a:srgbClr val="595959"/>
+                </a:solidFill>
+              </a:rPr>
+              <a:t>24–25</a:t>
+            </a:r>
+          </a:p>
+        </p:txBody>
+      </p:sp>
+      <p:sp>
+        <p:nvSpPr>
+          <p:cNvPr id="25" name="TextBox 24"/>
+          <p:cNvSpPr txBox="1"/>
+          <p:nvPr/>
+        </p:nvSpPr>
+        <p:spPr>
+          <a:xfrm>
+            <a:off x="548640" y="1938528"/>
+            <a:ext cx="11109960" cy="274320"/>
+          </a:xfrm>
+          <a:prstGeom prst="rect">
+            <a:avLst/>
+          </a:prstGeom>
+          <a:noFill/>
+        </p:spPr>
+        <p:txBody>
+          <a:bodyPr wrap="square" lIns="0" rIns="0" anchor="t">
+            <a:spAutoFit/>
+          </a:bodyPr>
+          <a:lstStyle/>
+          <a:p>
+            <a:pPr algn="ctr">
+              <a:spcAft>
+                <a:spcPts val="200"/>
+              </a:spcAft>
+            </a:pPr>
+            <a:r>
+              <a:rPr sz="1200" b="1" i="0">
+                <a:solidFill>
+                  <a:srgbClr val="242852"/>
+                </a:solidFill>
+              </a:rPr>
+              <a:t>7 cambios en 25 convocatorias, todos en la resolución anual y aplicados a trabajos ya publicados</a:t>
+            </a:r>
+          </a:p>
+        </p:txBody>
+      </p:sp>
+      <p:sp>
+        <p:nvSpPr>
+          <p:cNvPr id="26" name="TextBox 25"/>
+          <p:cNvSpPr txBox="1"/>
+          <p:nvPr/>
+        </p:nvSpPr>
+        <p:spPr>
+          <a:xfrm>
+            <a:off x="548640" y="2377440"/>
+            <a:ext cx="3246120" cy="274320"/>
+          </a:xfrm>
+          <a:prstGeom prst="rect">
+            <a:avLst/>
+          </a:prstGeom>
+          <a:noFill/>
+        </p:spPr>
+        <p:txBody>
+          <a:bodyPr wrap="square" lIns="0" rIns="0" anchor="t">
+            <a:spAutoFit/>
+          </a:bodyPr>
+          <a:lstStyle/>
+          <a:p>
+            <a:pPr algn="l">
+              <a:spcAft>
+                <a:spcPts val="200"/>
+              </a:spcAft>
+            </a:pPr>
+            <a:r>
+              <a:rPr sz="1200" b="1" i="1">
+                <a:solidFill>
+                  <a:srgbClr val="595959"/>
+                </a:solidFill>
+              </a:rPr>
+              <a:t>Qué regula</a:t>
+            </a:r>
+          </a:p>
+        </p:txBody>
+      </p:sp>
+      <p:sp>
+        <p:nvSpPr>
+          <p:cNvPr id="27" name="TextBox 26"/>
+          <p:cNvSpPr txBox="1"/>
+          <p:nvPr/>
+        </p:nvSpPr>
+        <p:spPr>
+          <a:xfrm>
+            <a:off x="3977639" y="2377440"/>
+            <a:ext cx="1737360" cy="274320"/>
+          </a:xfrm>
+          <a:prstGeom prst="rect">
+            <a:avLst/>
+          </a:prstGeom>
+          <a:noFill/>
+        </p:spPr>
+        <p:txBody>
+          <a:bodyPr wrap="square" lIns="0" rIns="0" anchor="t">
+            <a:spAutoFit/>
+          </a:bodyPr>
+          <a:lstStyle/>
+          <a:p>
+            <a:pPr algn="l">
+              <a:spcAft>
+                <a:spcPts val="200"/>
+              </a:spcAft>
+            </a:pPr>
+            <a:r>
+              <a:rPr sz="1200" b="1" i="1">
+                <a:solidFill>
+                  <a:srgbClr val="595959"/>
+                </a:solidFill>
+              </a:rPr>
+              <a:t>Quién decide</a:t>
+            </a:r>
+          </a:p>
+        </p:txBody>
+      </p:sp>
+      <p:sp>
+        <p:nvSpPr>
+          <p:cNvPr id="28" name="TextBox 27"/>
+          <p:cNvSpPr txBox="1"/>
+          <p:nvPr/>
+        </p:nvSpPr>
+        <p:spPr>
+          <a:xfrm>
+            <a:off x="5897880" y="2377440"/>
+            <a:ext cx="3977639" cy="274320"/>
+          </a:xfrm>
+          <a:prstGeom prst="rect">
+            <a:avLst/>
+          </a:prstGeom>
+          <a:noFill/>
+        </p:spPr>
+        <p:txBody>
+          <a:bodyPr wrap="square" lIns="0" rIns="0" anchor="t">
+            <a:spAutoFit/>
+          </a:bodyPr>
+          <a:lstStyle/>
+          <a:p>
+            <a:pPr algn="l">
+              <a:spcAft>
+                <a:spcPts val="200"/>
+              </a:spcAft>
+            </a:pPr>
+            <a:r>
+              <a:rPr sz="1200" b="1" i="1">
+                <a:solidFill>
+                  <a:srgbClr val="595959"/>
+                </a:solidFill>
+              </a:rPr>
+              <a:t>Qué pedimos</a:t>
+            </a:r>
+          </a:p>
+        </p:txBody>
+      </p:sp>
+      <p:sp>
+        <p:nvSpPr>
+          <p:cNvPr id="29" name="TextBox 28"/>
+          <p:cNvSpPr txBox="1"/>
+          <p:nvPr/>
+        </p:nvSpPr>
+        <p:spPr>
+          <a:xfrm>
+            <a:off x="10058400" y="2377440"/>
+            <a:ext cx="1600200" cy="274320"/>
+          </a:xfrm>
+          <a:prstGeom prst="rect">
+            <a:avLst/>
+          </a:prstGeom>
+          <a:noFill/>
+        </p:spPr>
+        <p:txBody>
+          <a:bodyPr wrap="square" lIns="0" rIns="0" anchor="t">
+            <a:spAutoFit/>
+          </a:bodyPr>
+          <a:lstStyle/>
+          <a:p>
+            <a:pPr algn="l">
+              <a:spcAft>
+                <a:spcPts val="200"/>
+              </a:spcAft>
+            </a:pPr>
+            <a:r>
+              <a:rPr sz="1200" b="1" i="1">
+                <a:solidFill>
+                  <a:srgbClr val="595959"/>
+                </a:solidFill>
+              </a:rPr>
+              <a:t>Cuándo</a:t>
+            </a:r>
+          </a:p>
+        </p:txBody>
+      </p:sp>
+      <p:sp>
+        <p:nvSpPr>
+          <p:cNvPr id="30" name="Norma Orden de 1994, art. 7"/>
+          <p:cNvSpPr/>
+          <p:nvPr/>
+        </p:nvSpPr>
+        <p:spPr>
+          <a:xfrm>
+            <a:off x="548640" y="2743200"/>
+            <a:ext cx="3246120" cy="960120"/>
+          </a:xfrm>
+          <a:prstGeom prst="roundRect">
+            <a:avLst>
+              <a:gd name="adj" fmla="val 8000"/>
+            </a:avLst>
+          </a:prstGeom>
+          <a:solidFill>
+            <a:srgbClr val="E3EEFA"/>
+          </a:solidFill>
+          <a:ln w="15875">
+            <a:solidFill>
+              <a:srgbClr val="297FD5"/>
+            </a:solidFill>
+          </a:ln>
+          <a:effectLst/>
+        </p:spPr>
+        <p:style>
+          <a:lnRef idx="1">
+            <a:schemeClr val="accent1"/>
+          </a:lnRef>
+          <a:fillRef idx="3">
+            <a:schemeClr val="accent1"/>
+          </a:fillRef>
+          <a:effectRef idx="2">
+            <a:schemeClr val="accent1"/>
+          </a:effectRef>
+          <a:fontRef idx="minor">
+            <a:schemeClr val="lt1"/>
+          </a:fontRef>
+        </p:style>
+        <p:txBody>
+          <a:bodyPr wrap="square" lIns="109728" tIns="54864" rIns="109728" bIns="54864" rtlCol="0" anchor="t"/>
+          <a:lstStyle/>
+          <a:p>
+            <a:pPr algn="l">
+              <a:spcAft>
+                <a:spcPts val="200"/>
+              </a:spcAft>
+            </a:pPr>
+            <a:r>
+              <a:rPr sz="1400" b="1" i="0">
+                <a:solidFill>
+                  <a:srgbClr val="242852"/>
+                </a:solidFill>
+              </a:rPr>
+              <a:t>Orden de 1994, art. 7</a:t>
+            </a:r>
+          </a:p>
+          <a:p>
+            <a:pPr algn="l">
+              <a:spcAft>
+                <a:spcPts val="200"/>
+              </a:spcAft>
+            </a:pPr>
+            <a:r>
+              <a:rPr sz="1200" b="0" i="1">
+                <a:solidFill>
+                  <a:srgbClr val="1F4E79"/>
+                </a:solidFill>
+              </a:rPr>
+              <a:t>La categoría: ordinaria o extraordinaria</a:t>
+            </a:r>
+          </a:p>
+        </p:txBody>
+      </p:sp>
+      <p:sp>
+        <p:nvSpPr>
+          <p:cNvPr id="31" name="Decide Ministerio"/>
+          <p:cNvSpPr/>
+          <p:nvPr/>
+        </p:nvSpPr>
+        <p:spPr>
+          <a:xfrm>
+            <a:off x="3977639" y="2926080"/>
+            <a:ext cx="1737360" cy="594360"/>
+          </a:xfrm>
+          <a:prstGeom prst="roundRect">
+            <a:avLst>
+              <a:gd name="adj" fmla="val 8000"/>
+            </a:avLst>
+          </a:prstGeom>
+          <a:solidFill>
+            <a:srgbClr val="242852"/>
+          </a:solidFill>
+          <a:ln>
+            <a:noFill/>
+          </a:ln>
+          <a:effectLst/>
+        </p:spPr>
+        <p:style>
+          <a:lnRef idx="1">
+            <a:schemeClr val="accent1"/>
+          </a:lnRef>
+          <a:fillRef idx="3">
+            <a:schemeClr val="accent1"/>
+          </a:fillRef>
+          <a:effectRef idx="2">
+            <a:schemeClr val="accent1"/>
+          </a:effectRef>
+          <a:fontRef idx="minor">
+            <a:schemeClr val="lt1"/>
+          </a:fontRef>
+        </p:style>
+        <p:txBody>
+          <a:bodyPr wrap="square" lIns="109728" tIns="54864" rIns="109728" bIns="54864" rtlCol="0" anchor="ctr"/>
+          <a:lstStyle/>
+          <a:p>
+            <a:pPr algn="ctr">
+              <a:spcAft>
+                <a:spcPts val="0"/>
+              </a:spcAft>
+            </a:pPr>
+            <a:r>
+              <a:rPr sz="1500" b="1" i="0">
+                <a:solidFill>
+                  <a:srgbClr val="FFFFFF"/>
+                </a:solidFill>
+              </a:rPr>
+              <a:t>Ministerio</a:t>
+            </a:r>
+          </a:p>
+        </p:txBody>
+      </p:sp>
+      <p:sp>
+        <p:nvSpPr>
+          <p:cNvPr id="32" name="Pedimos Ministerio"/>
+          <p:cNvSpPr/>
+          <p:nvPr/>
+        </p:nvSpPr>
+        <p:spPr>
+          <a:xfrm>
+            <a:off x="5897880" y="2743200"/>
+            <a:ext cx="3977639" cy="960120"/>
+          </a:xfrm>
+          <a:prstGeom prst="roundRect">
+            <a:avLst>
+              <a:gd name="adj" fmla="val 8000"/>
+            </a:avLst>
+          </a:prstGeom>
+          <a:solidFill>
+            <a:srgbClr val="E6F2DF"/>
+          </a:solidFill>
+          <a:ln w="15875">
+            <a:solidFill>
+              <a:srgbClr val="3B7D3A"/>
+            </a:solidFill>
+          </a:ln>
+          <a:effectLst/>
+        </p:spPr>
+        <p:style>
+          <a:lnRef idx="1">
+            <a:schemeClr val="accent1"/>
+          </a:lnRef>
+          <a:fillRef idx="3">
+            <a:schemeClr val="accent1"/>
+          </a:fillRef>
+          <a:effectRef idx="2">
+            <a:schemeClr val="accent1"/>
+          </a:effectRef>
+          <a:fontRef idx="minor">
+            <a:schemeClr val="lt1"/>
+          </a:fontRef>
+        </p:style>
+        <p:txBody>
+          <a:bodyPr wrap="square" lIns="109728" tIns="54864" rIns="109728" bIns="54864" rtlCol="0" anchor="t"/>
+          <a:lstStyle/>
+          <a:p>
+            <a:pPr algn="l">
+              <a:spcAft>
+                <a:spcPts val="200"/>
+              </a:spcAft>
+            </a:pPr>
+            <a:r>
+              <a:rPr sz="1200" b="0" i="0" dirty="0">
+                <a:solidFill>
+                  <a:srgbClr val="262626"/>
+                </a:solidFill>
+              </a:rPr>
+              <a:t>C1 · </a:t>
+            </a:r>
+            <a:r>
+              <a:rPr sz="1200" b="0" i="0" dirty="0">
+                <a:solidFill>
+                  <a:srgbClr val="FF0000"/>
+                </a:solidFill>
+              </a:rPr>
+              <a:t>R3</a:t>
+            </a:r>
+            <a:endParaRPr lang="es-ES" sz="1200" b="0" i="0" dirty="0">
+              <a:solidFill>
+                <a:srgbClr val="262626"/>
+              </a:solidFill>
+            </a:endParaRPr>
+          </a:p>
+          <a:p>
+            <a:pPr algn="l">
+              <a:spcAft>
+                <a:spcPts val="200"/>
+              </a:spcAft>
+            </a:pPr>
+            <a:r>
+              <a:rPr sz="1200" b="0" i="0" dirty="0">
+                <a:solidFill>
+                  <a:srgbClr val="262626"/>
+                </a:solidFill>
+              </a:rPr>
+              <a:t>los </a:t>
+            </a:r>
+            <a:r>
+              <a:rPr sz="1200" b="0" i="0" dirty="0" err="1">
+                <a:solidFill>
+                  <a:srgbClr val="262626"/>
+                </a:solidFill>
+              </a:rPr>
+              <a:t>artículos</a:t>
+            </a:r>
+            <a:r>
+              <a:rPr sz="1200" b="0" i="0" dirty="0">
+                <a:solidFill>
+                  <a:srgbClr val="262626"/>
+                </a:solidFill>
+              </a:rPr>
+              <a:t> </a:t>
+            </a:r>
+            <a:r>
+              <a:rPr sz="1200" b="0" i="0" dirty="0" err="1">
+                <a:solidFill>
+                  <a:srgbClr val="262626"/>
+                </a:solidFill>
+              </a:rPr>
+              <a:t>completos</a:t>
+            </a:r>
+            <a:r>
+              <a:rPr sz="1200" b="0" i="0" dirty="0">
+                <a:solidFill>
+                  <a:srgbClr val="262626"/>
+                </a:solidFill>
+              </a:rPr>
+              <a:t> </a:t>
+            </a:r>
+            <a:r>
+              <a:rPr sz="1200" b="0" i="0" dirty="0" err="1">
+                <a:solidFill>
+                  <a:srgbClr val="262626"/>
+                </a:solidFill>
+              </a:rPr>
+              <a:t>en</a:t>
+            </a:r>
+            <a:r>
+              <a:rPr sz="1200" b="0" i="0" dirty="0">
+                <a:solidFill>
+                  <a:srgbClr val="262626"/>
+                </a:solidFill>
+              </a:rPr>
+              <a:t> </a:t>
+            </a:r>
+            <a:r>
+              <a:rPr sz="1200" b="0" i="0" dirty="0" err="1">
+                <a:solidFill>
+                  <a:srgbClr val="262626"/>
+                </a:solidFill>
+              </a:rPr>
+              <a:t>congresos</a:t>
+            </a:r>
+            <a:r>
+              <a:rPr sz="1200" b="0" i="0" dirty="0">
+                <a:solidFill>
+                  <a:srgbClr val="262626"/>
+                </a:solidFill>
+              </a:rPr>
+              <a:t> de </a:t>
+            </a:r>
+            <a:r>
+              <a:rPr sz="1200" b="0" i="0" dirty="0" err="1">
+                <a:solidFill>
+                  <a:srgbClr val="262626"/>
+                </a:solidFill>
+              </a:rPr>
+              <a:t>prestigio</a:t>
+            </a:r>
+            <a:r>
+              <a:rPr sz="1200" b="0" i="0" dirty="0">
+                <a:solidFill>
+                  <a:srgbClr val="262626"/>
+                </a:solidFill>
+              </a:rPr>
+              <a:t>, </a:t>
+            </a:r>
+            <a:r>
+              <a:rPr sz="1200" b="0" i="0" dirty="0" err="1">
+                <a:solidFill>
+                  <a:srgbClr val="262626"/>
+                </a:solidFill>
+              </a:rPr>
+              <a:t>ordinarios</a:t>
+            </a:r>
+            <a:r>
+              <a:rPr sz="1200" b="0" i="0" dirty="0">
+                <a:solidFill>
+                  <a:srgbClr val="262626"/>
+                </a:solidFill>
+              </a:rPr>
+              <a:t> (</a:t>
+            </a:r>
+            <a:r>
+              <a:rPr sz="1200" b="0" i="0" dirty="0" err="1">
+                <a:solidFill>
+                  <a:srgbClr val="262626"/>
+                </a:solidFill>
+              </a:rPr>
+              <a:t>todas</a:t>
+            </a:r>
+            <a:r>
+              <a:rPr sz="1200" b="0" i="0" dirty="0">
+                <a:solidFill>
+                  <a:srgbClr val="262626"/>
+                </a:solidFill>
+              </a:rPr>
+              <a:t> las </a:t>
+            </a:r>
+            <a:r>
+              <a:rPr sz="1200" b="0" i="0" dirty="0" err="1">
+                <a:solidFill>
+                  <a:srgbClr val="262626"/>
+                </a:solidFill>
+              </a:rPr>
+              <a:t>disciplinas</a:t>
+            </a:r>
+            <a:r>
+              <a:rPr sz="1200" b="0" i="0" dirty="0">
+                <a:solidFill>
+                  <a:srgbClr val="262626"/>
+                </a:solidFill>
+              </a:rPr>
+              <a:t>)</a:t>
+            </a:r>
+          </a:p>
+          <a:p>
+            <a:pPr algn="l">
+              <a:spcAft>
+                <a:spcPts val="200"/>
+              </a:spcAft>
+            </a:pPr>
+            <a:r>
+              <a:rPr sz="1100" b="1" i="1" dirty="0">
+                <a:solidFill>
+                  <a:srgbClr val="3B7D3A"/>
+                </a:solidFill>
+              </a:rPr>
+              <a:t>Irreversible, </a:t>
+            </a:r>
+            <a:r>
+              <a:rPr sz="1100" b="1" i="1" dirty="0" err="1">
+                <a:solidFill>
+                  <a:srgbClr val="3B7D3A"/>
+                </a:solidFill>
+              </a:rPr>
+              <a:t>pero</a:t>
+            </a:r>
+            <a:r>
+              <a:rPr sz="1100" b="1" i="1" dirty="0">
+                <a:solidFill>
+                  <a:srgbClr val="3B7D3A"/>
+                </a:solidFill>
+              </a:rPr>
+              <a:t> </a:t>
+            </a:r>
+            <a:r>
+              <a:rPr sz="1100" b="1" i="1" dirty="0" err="1">
+                <a:solidFill>
+                  <a:srgbClr val="3B7D3A"/>
+                </a:solidFill>
+              </a:rPr>
+              <a:t>más</a:t>
+            </a:r>
+            <a:r>
+              <a:rPr sz="1100" b="1" i="1" dirty="0">
+                <a:solidFill>
+                  <a:srgbClr val="3B7D3A"/>
+                </a:solidFill>
+              </a:rPr>
+              <a:t> lento</a:t>
+            </a:r>
+          </a:p>
+        </p:txBody>
+      </p:sp>
+      <p:sp>
+        <p:nvSpPr>
+          <p:cNvPr id="33" name="TextBox 32"/>
+          <p:cNvSpPr txBox="1"/>
+          <p:nvPr/>
+        </p:nvSpPr>
+        <p:spPr>
+          <a:xfrm>
+            <a:off x="10058400" y="2743200"/>
+            <a:ext cx="1600200" cy="960120"/>
+          </a:xfrm>
+          <a:prstGeom prst="rect">
+            <a:avLst/>
+          </a:prstGeom>
+          <a:noFill/>
+        </p:spPr>
+        <p:txBody>
+          <a:bodyPr wrap="square" lIns="0" rIns="0" anchor="ctr">
+            <a:spAutoFit/>
+          </a:bodyPr>
+          <a:lstStyle/>
+          <a:p>
+            <a:pPr algn="l">
+              <a:spcAft>
+                <a:spcPts val="200"/>
+              </a:spcAft>
+            </a:pPr>
+            <a:r>
+              <a:rPr sz="1200" b="1" i="0">
+                <a:solidFill>
+                  <a:srgbClr val="242852"/>
+                </a:solidFill>
+              </a:rPr>
+              <a:t>Fases 2–3</a:t>
+            </a:r>
+          </a:p>
+          <a:p>
+            <a:pPr algn="l">
+              <a:spcAft>
+                <a:spcPts val="200"/>
+              </a:spcAft>
+            </a:pPr>
+            <a:r>
+              <a:rPr sz="1100" b="0" i="0">
+                <a:solidFill>
+                  <a:srgbClr val="595959"/>
+                </a:solidFill>
+              </a:rPr>
+              <a:t>1–5 años</a:t>
+            </a:r>
+          </a:p>
+        </p:txBody>
+      </p:sp>
+      <p:cxnSp>
+        <p:nvCxnSpPr>
+          <p:cNvPr id="34" name="Connector 33"/>
+          <p:cNvCxnSpPr/>
+          <p:nvPr/>
+        </p:nvCxnSpPr>
+        <p:spPr>
+          <a:xfrm>
+            <a:off x="3794760" y="3223260"/>
+            <a:ext cx="182879" cy="0"/>
+          </a:xfrm>
+          <a:prstGeom prst="line">
+            <a:avLst/>
+          </a:prstGeom>
+          <a:ln w="22225">
+            <a:solidFill>
+              <a:srgbClr val="595959"/>
+            </a:solidFill>
+            <a:tailEnd type="triangle" w="med" len="med"/>
+          </a:ln>
+        </p:spPr>
+        <p:style>
+          <a:lnRef idx="2">
+            <a:schemeClr val="accent1"/>
+          </a:lnRef>
+          <a:fillRef idx="0">
+            <a:schemeClr val="accent1"/>
+          </a:fillRef>
+          <a:effectRef idx="1">
+            <a:schemeClr val="accent1"/>
+          </a:effectRef>
+          <a:fontRef idx="minor">
+            <a:schemeClr val="tx1"/>
+          </a:fontRef>
+        </p:style>
+      </p:cxnSp>
+      <p:cxnSp>
+        <p:nvCxnSpPr>
+          <p:cNvPr id="35" name="Connector 34"/>
+          <p:cNvCxnSpPr/>
+          <p:nvPr/>
+        </p:nvCxnSpPr>
+        <p:spPr>
+          <a:xfrm>
+            <a:off x="5715000" y="3223260"/>
+            <a:ext cx="182880" cy="0"/>
+          </a:xfrm>
+          <a:prstGeom prst="line">
+            <a:avLst/>
+          </a:prstGeom>
+          <a:ln w="22225">
+            <a:solidFill>
+              <a:srgbClr val="595959"/>
+            </a:solidFill>
+            <a:tailEnd type="triangle" w="med" len="med"/>
+          </a:ln>
+        </p:spPr>
+        <p:style>
+          <a:lnRef idx="2">
+            <a:schemeClr val="accent1"/>
+          </a:lnRef>
+          <a:fillRef idx="0">
+            <a:schemeClr val="accent1"/>
+          </a:fillRef>
+          <a:effectRef idx="1">
+            <a:schemeClr val="accent1"/>
+          </a:effectRef>
+          <a:fontRef idx="minor">
+            <a:schemeClr val="tx1"/>
+          </a:fontRef>
+        </p:style>
+      </p:cxnSp>
+      <p:sp>
+        <p:nvSpPr>
+          <p:cNvPr id="36" name="Norma Criterios CNEAI (6.2)"/>
+          <p:cNvSpPr/>
+          <p:nvPr/>
+        </p:nvSpPr>
+        <p:spPr>
+          <a:xfrm>
+            <a:off x="548640" y="3858768"/>
+            <a:ext cx="3246120" cy="960120"/>
+          </a:xfrm>
+          <a:prstGeom prst="roundRect">
+            <a:avLst>
+              <a:gd name="adj" fmla="val 8000"/>
+            </a:avLst>
+          </a:prstGeom>
+          <a:solidFill>
+            <a:srgbClr val="E3EEFA"/>
+          </a:solidFill>
+          <a:ln w="15875">
+            <a:solidFill>
+              <a:srgbClr val="297FD5"/>
+            </a:solidFill>
+          </a:ln>
+          <a:effectLst/>
+        </p:spPr>
+        <p:style>
+          <a:lnRef idx="1">
+            <a:schemeClr val="accent1"/>
+          </a:lnRef>
+          <a:fillRef idx="3">
+            <a:schemeClr val="accent1"/>
+          </a:fillRef>
+          <a:effectRef idx="2">
+            <a:schemeClr val="accent1"/>
+          </a:effectRef>
+          <a:fontRef idx="minor">
+            <a:schemeClr val="lt1"/>
+          </a:fontRef>
+        </p:style>
+        <p:txBody>
+          <a:bodyPr wrap="square" lIns="109728" tIns="54864" rIns="109728" bIns="54864" rtlCol="0" anchor="t"/>
+          <a:lstStyle/>
+          <a:p>
+            <a:pPr algn="l">
+              <a:spcAft>
+                <a:spcPts val="200"/>
+              </a:spcAft>
+            </a:pPr>
+            <a:r>
+              <a:rPr sz="1400" b="1" i="0">
+                <a:solidFill>
+                  <a:srgbClr val="242852"/>
+                </a:solidFill>
+              </a:rPr>
+              <a:t>Criterios CNEAI (6.2)</a:t>
+            </a:r>
+          </a:p>
+          <a:p>
+            <a:pPr algn="l">
+              <a:spcAft>
+                <a:spcPts val="200"/>
+              </a:spcAft>
+            </a:pPr>
+            <a:r>
+              <a:rPr sz="1200" b="0" i="1">
+                <a:solidFill>
+                  <a:srgbClr val="1F4E79"/>
+                </a:solidFill>
+              </a:rPr>
+              <a:t>El peso, el cupo y la estabilidad</a:t>
+            </a:r>
+          </a:p>
+        </p:txBody>
+      </p:sp>
+      <p:sp>
+        <p:nvSpPr>
+          <p:cNvPr id="37" name="Decide CNEAI"/>
+          <p:cNvSpPr/>
+          <p:nvPr/>
+        </p:nvSpPr>
+        <p:spPr>
+          <a:xfrm>
+            <a:off x="3977639" y="4041648"/>
+            <a:ext cx="1737360" cy="594360"/>
+          </a:xfrm>
+          <a:prstGeom prst="roundRect">
+            <a:avLst>
+              <a:gd name="adj" fmla="val 8000"/>
+            </a:avLst>
+          </a:prstGeom>
+          <a:solidFill>
+            <a:srgbClr val="242852"/>
+          </a:solidFill>
+          <a:ln>
+            <a:noFill/>
+          </a:ln>
+          <a:effectLst/>
+        </p:spPr>
+        <p:style>
+          <a:lnRef idx="1">
+            <a:schemeClr val="accent1"/>
+          </a:lnRef>
+          <a:fillRef idx="3">
+            <a:schemeClr val="accent1"/>
+          </a:fillRef>
+          <a:effectRef idx="2">
+            <a:schemeClr val="accent1"/>
+          </a:effectRef>
+          <a:fontRef idx="minor">
+            <a:schemeClr val="lt1"/>
+          </a:fontRef>
+        </p:style>
+        <p:txBody>
+          <a:bodyPr wrap="square" lIns="109728" tIns="54864" rIns="109728" bIns="54864" rtlCol="0" anchor="ctr"/>
+          <a:lstStyle/>
+          <a:p>
+            <a:pPr algn="ctr">
+              <a:spcAft>
+                <a:spcPts val="0"/>
+              </a:spcAft>
+            </a:pPr>
+            <a:r>
+              <a:rPr sz="1500" b="1" i="0">
+                <a:solidFill>
+                  <a:srgbClr val="FFFFFF"/>
+                </a:solidFill>
+              </a:rPr>
+              <a:t>CNEAI</a:t>
+            </a:r>
+          </a:p>
+        </p:txBody>
+      </p:sp>
+      <p:sp>
+        <p:nvSpPr>
+          <p:cNvPr id="38" name="Pedimos CNEAI"/>
+          <p:cNvSpPr/>
+          <p:nvPr/>
+        </p:nvSpPr>
+        <p:spPr>
+          <a:xfrm>
+            <a:off x="5897880" y="3858768"/>
+            <a:ext cx="3977639" cy="960120"/>
+          </a:xfrm>
+          <a:prstGeom prst="roundRect">
+            <a:avLst>
+              <a:gd name="adj" fmla="val 8000"/>
+            </a:avLst>
+          </a:prstGeom>
+          <a:solidFill>
+            <a:srgbClr val="E6F2DF"/>
+          </a:solidFill>
+          <a:ln w="15875">
+            <a:solidFill>
+              <a:srgbClr val="3B7D3A"/>
+            </a:solidFill>
+          </a:ln>
+          <a:effectLst/>
+        </p:spPr>
+        <p:style>
+          <a:lnRef idx="1">
+            <a:schemeClr val="accent1"/>
+          </a:lnRef>
+          <a:fillRef idx="3">
+            <a:schemeClr val="accent1"/>
+          </a:fillRef>
+          <a:effectRef idx="2">
+            <a:schemeClr val="accent1"/>
+          </a:effectRef>
+          <a:fontRef idx="minor">
+            <a:schemeClr val="lt1"/>
+          </a:fontRef>
+        </p:style>
+        <p:txBody>
+          <a:bodyPr wrap="square" lIns="109728" tIns="54864" rIns="109728" bIns="54864" rtlCol="0" anchor="t"/>
+          <a:lstStyle/>
+          <a:p>
+            <a:pPr algn="l">
+              <a:spcAft>
+                <a:spcPts val="200"/>
+              </a:spcAft>
+            </a:pPr>
+            <a:r>
+              <a:rPr sz="1200" b="0" i="0" dirty="0">
+                <a:solidFill>
+                  <a:srgbClr val="262626"/>
+                </a:solidFill>
+              </a:rPr>
+              <a:t>C2 · </a:t>
+            </a:r>
+            <a:r>
+              <a:rPr sz="1200" b="0" i="0" dirty="0">
+                <a:solidFill>
+                  <a:srgbClr val="FF0000"/>
+                </a:solidFill>
+              </a:rPr>
+              <a:t>R1 + R2</a:t>
+            </a:r>
+            <a:endParaRPr lang="es-ES" sz="1200" b="0" i="0" dirty="0">
+              <a:solidFill>
+                <a:srgbClr val="262626"/>
+              </a:solidFill>
+            </a:endParaRPr>
+          </a:p>
+          <a:p>
+            <a:pPr algn="l">
+              <a:spcAft>
+                <a:spcPts val="200"/>
+              </a:spcAft>
+            </a:pPr>
+            <a:r>
+              <a:rPr sz="1200" b="0" i="0" dirty="0">
+                <a:solidFill>
+                  <a:srgbClr val="262626"/>
+                </a:solidFill>
+              </a:rPr>
+              <a:t>A*/A </a:t>
+            </a:r>
+            <a:r>
+              <a:rPr sz="1200" b="0" i="0" dirty="0" err="1">
+                <a:solidFill>
+                  <a:srgbClr val="262626"/>
+                </a:solidFill>
+              </a:rPr>
+              <a:t>como</a:t>
+            </a:r>
+            <a:r>
+              <a:rPr sz="1200" b="0" i="0" dirty="0">
+                <a:solidFill>
+                  <a:srgbClr val="262626"/>
+                </a:solidFill>
+              </a:rPr>
+              <a:t> </a:t>
+            </a:r>
+            <a:r>
+              <a:rPr sz="1200" b="0" i="0" dirty="0" err="1">
+                <a:solidFill>
+                  <a:srgbClr val="262626"/>
+                </a:solidFill>
+              </a:rPr>
+              <a:t>revistas</a:t>
+            </a:r>
+            <a:r>
+              <a:rPr sz="1200" b="0" i="0" dirty="0">
+                <a:solidFill>
+                  <a:srgbClr val="262626"/>
+                </a:solidFill>
+              </a:rPr>
+              <a:t>, </a:t>
+            </a:r>
+            <a:r>
+              <a:rPr sz="1200" b="0" i="0" dirty="0" err="1">
+                <a:solidFill>
+                  <a:srgbClr val="262626"/>
+                </a:solidFill>
+              </a:rPr>
+              <a:t>cupo</a:t>
+            </a:r>
+            <a:r>
+              <a:rPr sz="1200" b="0" i="0" dirty="0">
+                <a:solidFill>
+                  <a:srgbClr val="262626"/>
+                </a:solidFill>
+              </a:rPr>
+              <a:t> de 3 a 5,</a:t>
+            </a:r>
+            <a:endParaRPr lang="es-ES" sz="1200" b="0" i="0" dirty="0">
+              <a:solidFill>
+                <a:srgbClr val="262626"/>
+              </a:solidFill>
+            </a:endParaRPr>
+          </a:p>
+          <a:p>
+            <a:pPr algn="l">
+              <a:spcAft>
+                <a:spcPts val="200"/>
+              </a:spcAft>
+            </a:pPr>
+            <a:r>
+              <a:rPr sz="1200" b="0" i="0" dirty="0" err="1">
+                <a:solidFill>
+                  <a:srgbClr val="262626"/>
+                </a:solidFill>
+              </a:rPr>
+              <a:t>criterio</a:t>
+            </a:r>
+            <a:r>
+              <a:rPr sz="1200" b="0" i="0" dirty="0">
+                <a:solidFill>
+                  <a:srgbClr val="262626"/>
+                </a:solidFill>
+              </a:rPr>
+              <a:t> </a:t>
+            </a:r>
+            <a:r>
+              <a:rPr sz="1200" b="0" i="0" dirty="0" err="1">
+                <a:solidFill>
+                  <a:srgbClr val="262626"/>
+                </a:solidFill>
+              </a:rPr>
+              <a:t>bienal</a:t>
+            </a:r>
+            <a:r>
+              <a:rPr sz="1200" b="0" i="0" dirty="0">
+                <a:solidFill>
+                  <a:srgbClr val="262626"/>
+                </a:solidFill>
+              </a:rPr>
+              <a:t> y </a:t>
+            </a:r>
+            <a:r>
+              <a:rPr sz="1200" b="0" i="0" dirty="0" err="1">
+                <a:solidFill>
+                  <a:srgbClr val="262626"/>
+                </a:solidFill>
+              </a:rPr>
+              <a:t>transitorio</a:t>
+            </a:r>
+            <a:endParaRPr sz="1200" b="0" i="0" dirty="0">
+              <a:solidFill>
+                <a:srgbClr val="262626"/>
+              </a:solidFill>
+            </a:endParaRPr>
+          </a:p>
+          <a:p>
+            <a:pPr algn="l">
+              <a:spcAft>
+                <a:spcPts val="200"/>
+              </a:spcAft>
+            </a:pPr>
+            <a:r>
+              <a:rPr sz="1100" b="1" i="1" dirty="0" err="1">
+                <a:solidFill>
+                  <a:srgbClr val="3B7D3A"/>
+                </a:solidFill>
+              </a:rPr>
+              <a:t>Inmediato</a:t>
+            </a:r>
+            <a:r>
+              <a:rPr sz="1100" b="1" i="1" dirty="0">
+                <a:solidFill>
+                  <a:srgbClr val="3B7D3A"/>
+                </a:solidFill>
+              </a:rPr>
+              <a:t>, </a:t>
+            </a:r>
+            <a:r>
+              <a:rPr sz="1100" b="1" i="1" dirty="0" err="1">
+                <a:solidFill>
+                  <a:srgbClr val="3B7D3A"/>
+                </a:solidFill>
+              </a:rPr>
+              <a:t>pero</a:t>
+            </a:r>
+            <a:r>
+              <a:rPr sz="1100" b="1" i="1" dirty="0">
+                <a:solidFill>
+                  <a:srgbClr val="3B7D3A"/>
+                </a:solidFill>
+              </a:rPr>
+              <a:t> reversible</a:t>
+            </a:r>
+          </a:p>
+        </p:txBody>
+      </p:sp>
+      <p:sp>
+        <p:nvSpPr>
+          <p:cNvPr id="39" name="TextBox 38"/>
+          <p:cNvSpPr txBox="1"/>
+          <p:nvPr/>
+        </p:nvSpPr>
+        <p:spPr>
+          <a:xfrm>
+            <a:off x="10058400" y="3858768"/>
+            <a:ext cx="1600200" cy="960120"/>
+          </a:xfrm>
+          <a:prstGeom prst="rect">
+            <a:avLst/>
+          </a:prstGeom>
+          <a:noFill/>
+        </p:spPr>
+        <p:txBody>
+          <a:bodyPr wrap="square" lIns="0" rIns="0" anchor="ctr">
+            <a:spAutoFit/>
+          </a:bodyPr>
+          <a:lstStyle/>
+          <a:p>
+            <a:pPr algn="l">
+              <a:spcAft>
+                <a:spcPts val="200"/>
+              </a:spcAft>
+            </a:pPr>
+            <a:r>
+              <a:rPr sz="1200" b="1" i="0">
+                <a:solidFill>
+                  <a:srgbClr val="242852"/>
+                </a:solidFill>
+              </a:rPr>
+              <a:t>Fase 1</a:t>
+            </a:r>
+          </a:p>
+          <a:p>
+            <a:pPr algn="l">
+              <a:spcAft>
+                <a:spcPts val="200"/>
+              </a:spcAft>
+            </a:pPr>
+            <a:r>
+              <a:rPr sz="1100" b="0" i="0">
+                <a:solidFill>
+                  <a:srgbClr val="595959"/>
+                </a:solidFill>
+              </a:rPr>
+              <a:t>convocatoria 2026</a:t>
+            </a:r>
+          </a:p>
+        </p:txBody>
+      </p:sp>
+      <p:cxnSp>
+        <p:nvCxnSpPr>
+          <p:cNvPr id="40" name="Connector 39"/>
+          <p:cNvCxnSpPr/>
+          <p:nvPr/>
+        </p:nvCxnSpPr>
+        <p:spPr>
+          <a:xfrm>
+            <a:off x="3794760" y="4338828"/>
+            <a:ext cx="182879" cy="0"/>
+          </a:xfrm>
+          <a:prstGeom prst="line">
+            <a:avLst/>
+          </a:prstGeom>
+          <a:ln w="22225">
+            <a:solidFill>
+              <a:srgbClr val="595959"/>
+            </a:solidFill>
+            <a:tailEnd type="triangle" w="med" len="med"/>
+          </a:ln>
+        </p:spPr>
+        <p:style>
+          <a:lnRef idx="2">
+            <a:schemeClr val="accent1"/>
+          </a:lnRef>
+          <a:fillRef idx="0">
+            <a:schemeClr val="accent1"/>
+          </a:fillRef>
+          <a:effectRef idx="1">
+            <a:schemeClr val="accent1"/>
+          </a:effectRef>
+          <a:fontRef idx="minor">
+            <a:schemeClr val="tx1"/>
+          </a:fontRef>
+        </p:style>
+      </p:cxnSp>
+      <p:cxnSp>
+        <p:nvCxnSpPr>
+          <p:cNvPr id="41" name="Connector 40"/>
+          <p:cNvCxnSpPr/>
+          <p:nvPr/>
+        </p:nvCxnSpPr>
+        <p:spPr>
+          <a:xfrm>
+            <a:off x="5715000" y="4338828"/>
+            <a:ext cx="182880" cy="0"/>
+          </a:xfrm>
+          <a:prstGeom prst="line">
+            <a:avLst/>
+          </a:prstGeom>
+          <a:ln w="22225">
+            <a:solidFill>
+              <a:srgbClr val="595959"/>
+            </a:solidFill>
+            <a:tailEnd type="triangle" w="med" len="med"/>
+          </a:ln>
+        </p:spPr>
+        <p:style>
+          <a:lnRef idx="2">
+            <a:schemeClr val="accent1"/>
+          </a:lnRef>
+          <a:fillRef idx="0">
+            <a:schemeClr val="accent1"/>
+          </a:fillRef>
+          <a:effectRef idx="1">
+            <a:schemeClr val="accent1"/>
+          </a:effectRef>
+          <a:fontRef idx="minor">
+            <a:schemeClr val="tx1"/>
+          </a:fontRef>
+        </p:style>
+      </p:cxnSp>
+      <p:sp>
+        <p:nvSpPr>
+          <p:cNvPr id="42" name="Norma Acreditación (RD 678/2023)"/>
+          <p:cNvSpPr/>
+          <p:nvPr/>
+        </p:nvSpPr>
+        <p:spPr>
+          <a:xfrm>
+            <a:off x="548640" y="4974336"/>
+            <a:ext cx="3246120" cy="960120"/>
+          </a:xfrm>
+          <a:prstGeom prst="roundRect">
+            <a:avLst>
+              <a:gd name="adj" fmla="val 8000"/>
+            </a:avLst>
+          </a:prstGeom>
+          <a:solidFill>
+            <a:srgbClr val="E3EEFA"/>
+          </a:solidFill>
+          <a:ln w="15875">
+            <a:solidFill>
+              <a:srgbClr val="297FD5"/>
+            </a:solidFill>
+          </a:ln>
+          <a:effectLst/>
+        </p:spPr>
+        <p:style>
+          <a:lnRef idx="1">
+            <a:schemeClr val="accent1"/>
+          </a:lnRef>
+          <a:fillRef idx="3">
+            <a:schemeClr val="accent1"/>
+          </a:fillRef>
+          <a:effectRef idx="2">
+            <a:schemeClr val="accent1"/>
+          </a:effectRef>
+          <a:fontRef idx="minor">
+            <a:schemeClr val="lt1"/>
+          </a:fontRef>
+        </p:style>
+        <p:txBody>
+          <a:bodyPr wrap="square" lIns="109728" tIns="54864" rIns="109728" bIns="54864" rtlCol="0" anchor="t"/>
+          <a:lstStyle/>
+          <a:p>
+            <a:pPr algn="l">
+              <a:spcAft>
+                <a:spcPts val="200"/>
+              </a:spcAft>
+            </a:pPr>
+            <a:r>
+              <a:rPr sz="1400" b="1" i="0">
+                <a:solidFill>
+                  <a:srgbClr val="242852"/>
+                </a:solidFill>
+              </a:rPr>
+              <a:t>Acreditación (RD 678/2023)</a:t>
+            </a:r>
+          </a:p>
+          <a:p>
+            <a:pPr algn="l">
+              <a:spcAft>
+                <a:spcPts val="200"/>
+              </a:spcAft>
+            </a:pPr>
+            <a:r>
+              <a:rPr sz="1200" b="0" i="1">
+                <a:solidFill>
+                  <a:srgbClr val="1F4E79"/>
+                </a:solidFill>
+              </a:rPr>
+              <a:t>No distingue ordinarias de extraordinarias</a:t>
+            </a:r>
+          </a:p>
+        </p:txBody>
+      </p:sp>
+      <p:sp>
+        <p:nvSpPr>
+          <p:cNvPr id="43" name="Decide ANECA"/>
+          <p:cNvSpPr/>
+          <p:nvPr/>
+        </p:nvSpPr>
+        <p:spPr>
+          <a:xfrm>
+            <a:off x="3977639" y="5157216"/>
+            <a:ext cx="1737360" cy="594360"/>
+          </a:xfrm>
+          <a:prstGeom prst="roundRect">
+            <a:avLst>
+              <a:gd name="adj" fmla="val 8000"/>
+            </a:avLst>
+          </a:prstGeom>
+          <a:solidFill>
+            <a:srgbClr val="242852"/>
+          </a:solidFill>
+          <a:ln>
+            <a:noFill/>
+          </a:ln>
+          <a:effectLst/>
+        </p:spPr>
+        <p:style>
+          <a:lnRef idx="1">
+            <a:schemeClr val="accent1"/>
+          </a:lnRef>
+          <a:fillRef idx="3">
+            <a:schemeClr val="accent1"/>
+          </a:fillRef>
+          <a:effectRef idx="2">
+            <a:schemeClr val="accent1"/>
+          </a:effectRef>
+          <a:fontRef idx="minor">
+            <a:schemeClr val="lt1"/>
+          </a:fontRef>
+        </p:style>
+        <p:txBody>
+          <a:bodyPr wrap="square" lIns="109728" tIns="54864" rIns="109728" bIns="54864" rtlCol="0" anchor="ctr"/>
+          <a:lstStyle/>
+          <a:p>
+            <a:pPr algn="ctr">
+              <a:spcAft>
+                <a:spcPts val="0"/>
+              </a:spcAft>
+            </a:pPr>
+            <a:r>
+              <a:rPr sz="1500" b="1" i="0">
+                <a:solidFill>
+                  <a:srgbClr val="FFFFFF"/>
+                </a:solidFill>
+              </a:rPr>
+              <a:t>ANECA</a:t>
+            </a:r>
+          </a:p>
+        </p:txBody>
+      </p:sp>
+      <p:sp>
+        <p:nvSpPr>
+          <p:cNvPr id="44" name="Pedimos ANECA"/>
+          <p:cNvSpPr/>
+          <p:nvPr/>
+        </p:nvSpPr>
+        <p:spPr>
+          <a:xfrm>
+            <a:off x="5897880" y="4974336"/>
+            <a:ext cx="3977639" cy="960120"/>
+          </a:xfrm>
+          <a:prstGeom prst="roundRect">
+            <a:avLst>
+              <a:gd name="adj" fmla="val 8000"/>
+            </a:avLst>
+          </a:prstGeom>
+          <a:solidFill>
+            <a:srgbClr val="E6F2DF"/>
+          </a:solidFill>
+          <a:ln w="15875">
+            <a:solidFill>
+              <a:srgbClr val="3B7D3A"/>
+            </a:solidFill>
+          </a:ln>
+          <a:effectLst/>
+        </p:spPr>
+        <p:style>
+          <a:lnRef idx="1">
+            <a:schemeClr val="accent1"/>
+          </a:lnRef>
+          <a:fillRef idx="3">
+            <a:schemeClr val="accent1"/>
+          </a:fillRef>
+          <a:effectRef idx="2">
+            <a:schemeClr val="accent1"/>
+          </a:effectRef>
+          <a:fontRef idx="minor">
+            <a:schemeClr val="lt1"/>
+          </a:fontRef>
+        </p:style>
+        <p:txBody>
+          <a:bodyPr wrap="square" lIns="109728" tIns="54864" rIns="109728" bIns="54864" rtlCol="0" anchor="t"/>
+          <a:lstStyle/>
+          <a:p>
+            <a:pPr algn="l">
+              <a:spcAft>
+                <a:spcPts val="200"/>
+              </a:spcAft>
+            </a:pPr>
+            <a:r>
+              <a:rPr sz="1200" b="0" i="0" dirty="0">
+                <a:solidFill>
+                  <a:srgbClr val="262626"/>
+                </a:solidFill>
+              </a:rPr>
+              <a:t>C3 · </a:t>
+            </a:r>
+            <a:r>
+              <a:rPr sz="1200" b="0" i="0" dirty="0">
+                <a:solidFill>
+                  <a:srgbClr val="FF0000"/>
+                </a:solidFill>
+              </a:rPr>
+              <a:t>R4 + R6</a:t>
+            </a:r>
+            <a:endParaRPr lang="es-ES" sz="1200" dirty="0">
+              <a:solidFill>
+                <a:srgbClr val="262626"/>
+              </a:solidFill>
+            </a:endParaRPr>
+          </a:p>
+          <a:p>
+            <a:pPr algn="l">
+              <a:spcAft>
+                <a:spcPts val="200"/>
+              </a:spcAft>
+            </a:pPr>
+            <a:r>
+              <a:rPr sz="1200" b="0" i="0" dirty="0" err="1">
+                <a:solidFill>
+                  <a:srgbClr val="262626"/>
+                </a:solidFill>
+              </a:rPr>
+              <a:t>aclaración</a:t>
+            </a:r>
+            <a:r>
+              <a:rPr sz="1200" b="0" i="0" dirty="0">
+                <a:solidFill>
+                  <a:srgbClr val="262626"/>
+                </a:solidFill>
+              </a:rPr>
+              <a:t> general, </a:t>
+            </a:r>
+            <a:r>
+              <a:rPr sz="1200" b="0" i="0" dirty="0" err="1">
+                <a:solidFill>
+                  <a:srgbClr val="262626"/>
+                </a:solidFill>
+              </a:rPr>
+              <a:t>gobernanza</a:t>
+            </a:r>
+            <a:r>
+              <a:rPr sz="1200" b="0" i="0" dirty="0">
+                <a:solidFill>
+                  <a:srgbClr val="262626"/>
+                </a:solidFill>
+              </a:rPr>
+              <a:t> </a:t>
+            </a:r>
+            <a:r>
+              <a:rPr sz="1200" b="0" i="0" dirty="0" err="1">
+                <a:solidFill>
+                  <a:srgbClr val="262626"/>
+                </a:solidFill>
+              </a:rPr>
+              <a:t>como</a:t>
+            </a:r>
+            <a:r>
+              <a:rPr sz="1200" b="0" i="0" dirty="0">
+                <a:solidFill>
+                  <a:srgbClr val="262626"/>
+                </a:solidFill>
+              </a:rPr>
+              <a:t> </a:t>
+            </a:r>
+            <a:r>
+              <a:rPr sz="1200" b="0" i="0" dirty="0" err="1">
+                <a:solidFill>
+                  <a:srgbClr val="262626"/>
+                </a:solidFill>
+              </a:rPr>
+              <a:t>mérito</a:t>
+            </a:r>
+            <a:r>
+              <a:rPr sz="1200" b="0" i="0" dirty="0">
+                <a:solidFill>
+                  <a:srgbClr val="262626"/>
+                </a:solidFill>
+              </a:rPr>
+              <a:t>, </a:t>
+            </a:r>
+            <a:r>
+              <a:rPr sz="1200" b="0" i="0" dirty="0" err="1">
+                <a:solidFill>
+                  <a:srgbClr val="262626"/>
+                </a:solidFill>
+              </a:rPr>
+              <a:t>coherencia</a:t>
+            </a:r>
+            <a:endParaRPr sz="1200" b="0" i="0" dirty="0">
+              <a:solidFill>
+                <a:srgbClr val="262626"/>
+              </a:solidFill>
+            </a:endParaRPr>
+          </a:p>
+          <a:p>
+            <a:pPr algn="l">
+              <a:spcAft>
+                <a:spcPts val="200"/>
+              </a:spcAft>
+            </a:pPr>
+            <a:r>
+              <a:rPr sz="1100" b="1" i="1" dirty="0">
+                <a:solidFill>
+                  <a:srgbClr val="3B7D3A"/>
+                </a:solidFill>
+              </a:rPr>
+              <a:t>Sin </a:t>
+            </a:r>
+            <a:r>
+              <a:rPr sz="1100" b="1" i="1" dirty="0" err="1">
+                <a:solidFill>
+                  <a:srgbClr val="3B7D3A"/>
+                </a:solidFill>
+              </a:rPr>
+              <a:t>cambiar</a:t>
+            </a:r>
+            <a:r>
+              <a:rPr sz="1100" b="1" i="1" dirty="0">
+                <a:solidFill>
+                  <a:srgbClr val="3B7D3A"/>
+                </a:solidFill>
+              </a:rPr>
+              <a:t> </a:t>
+            </a:r>
+            <a:r>
+              <a:rPr sz="1100" b="1" i="1" dirty="0" err="1">
+                <a:solidFill>
+                  <a:srgbClr val="3B7D3A"/>
+                </a:solidFill>
+              </a:rPr>
+              <a:t>ninguna</a:t>
+            </a:r>
+            <a:r>
+              <a:rPr sz="1100" b="1" i="1" dirty="0">
+                <a:solidFill>
+                  <a:srgbClr val="3B7D3A"/>
+                </a:solidFill>
+              </a:rPr>
+              <a:t> </a:t>
+            </a:r>
+            <a:r>
+              <a:rPr sz="1100" b="1" i="1" dirty="0" err="1">
+                <a:solidFill>
+                  <a:srgbClr val="3B7D3A"/>
+                </a:solidFill>
+              </a:rPr>
+              <a:t>norma</a:t>
+            </a:r>
+            <a:endParaRPr sz="1100" b="1" i="1" dirty="0">
+              <a:solidFill>
+                <a:srgbClr val="3B7D3A"/>
+              </a:solidFill>
+            </a:endParaRPr>
+          </a:p>
+        </p:txBody>
+      </p:sp>
+      <p:sp>
+        <p:nvSpPr>
+          <p:cNvPr id="45" name="TextBox 44"/>
+          <p:cNvSpPr txBox="1"/>
+          <p:nvPr/>
+        </p:nvSpPr>
+        <p:spPr>
+          <a:xfrm>
+            <a:off x="10058400" y="4974336"/>
+            <a:ext cx="1600200" cy="960120"/>
+          </a:xfrm>
+          <a:prstGeom prst="rect">
+            <a:avLst/>
+          </a:prstGeom>
+          <a:noFill/>
+        </p:spPr>
+        <p:txBody>
+          <a:bodyPr wrap="square" lIns="0" rIns="0" anchor="ctr">
+            <a:spAutoFit/>
+          </a:bodyPr>
+          <a:lstStyle/>
+          <a:p>
+            <a:pPr algn="l">
+              <a:spcAft>
+                <a:spcPts val="200"/>
+              </a:spcAft>
+            </a:pPr>
+            <a:r>
+              <a:rPr sz="1200" b="1" i="0">
+                <a:solidFill>
+                  <a:srgbClr val="242852"/>
+                </a:solidFill>
+              </a:rPr>
+              <a:t>Fase 1</a:t>
+            </a:r>
+          </a:p>
+          <a:p>
+            <a:pPr algn="l">
+              <a:spcAft>
+                <a:spcPts val="200"/>
+              </a:spcAft>
+            </a:pPr>
+            <a:r>
+              <a:rPr sz="1100" b="0" i="0">
+                <a:solidFill>
+                  <a:srgbClr val="595959"/>
+                </a:solidFill>
+              </a:rPr>
+              <a:t>corto plazo</a:t>
+            </a:r>
+          </a:p>
+        </p:txBody>
+      </p:sp>
+      <p:cxnSp>
+        <p:nvCxnSpPr>
+          <p:cNvPr id="46" name="Connector 45"/>
+          <p:cNvCxnSpPr/>
+          <p:nvPr/>
+        </p:nvCxnSpPr>
+        <p:spPr>
+          <a:xfrm>
+            <a:off x="3794760" y="5454396"/>
+            <a:ext cx="182879" cy="0"/>
+          </a:xfrm>
+          <a:prstGeom prst="line">
+            <a:avLst/>
+          </a:prstGeom>
+          <a:ln w="22225">
+            <a:solidFill>
+              <a:srgbClr val="595959"/>
+            </a:solidFill>
+            <a:tailEnd type="triangle" w="med" len="med"/>
+          </a:ln>
+        </p:spPr>
+        <p:style>
+          <a:lnRef idx="2">
+            <a:schemeClr val="accent1"/>
+          </a:lnRef>
+          <a:fillRef idx="0">
+            <a:schemeClr val="accent1"/>
+          </a:fillRef>
+          <a:effectRef idx="1">
+            <a:schemeClr val="accent1"/>
+          </a:effectRef>
+          <a:fontRef idx="minor">
+            <a:schemeClr val="tx1"/>
+          </a:fontRef>
+        </p:style>
+      </p:cxnSp>
+      <p:cxnSp>
+        <p:nvCxnSpPr>
+          <p:cNvPr id="47" name="Connector 46"/>
+          <p:cNvCxnSpPr/>
+          <p:nvPr/>
+        </p:nvCxnSpPr>
+        <p:spPr>
+          <a:xfrm>
+            <a:off x="5715000" y="5454396"/>
+            <a:ext cx="182880" cy="0"/>
+          </a:xfrm>
+          <a:prstGeom prst="line">
+            <a:avLst/>
+          </a:prstGeom>
+          <a:ln w="22225">
+            <a:solidFill>
+              <a:srgbClr val="595959"/>
+            </a:solidFill>
+            <a:tailEnd type="triangle" w="med" len="med"/>
+          </a:ln>
+        </p:spPr>
+        <p:style>
+          <a:lnRef idx="2">
+            <a:schemeClr val="accent1"/>
+          </a:lnRef>
+          <a:fillRef idx="0">
+            <a:schemeClr val="accent1"/>
+          </a:fillRef>
+          <a:effectRef idx="1">
+            <a:schemeClr val="accent1"/>
+          </a:effectRef>
+          <a:fontRef idx="minor">
+            <a:schemeClr val="tx1"/>
+          </a:fontRef>
+        </p:style>
+      </p:cxnSp>
+    </p:spTree>
+    <p:extLst>
+      <p:ext uri="{BB962C8B-B14F-4D97-AF65-F5344CB8AC3E}">
+        <p14:creationId xmlns:p14="http://schemas.microsoft.com/office/powerpoint/2010/main" val="423446900"/>
+      </p:ext>
+    </p:extLst>
+  </p:cSld>
+  <p:clrMapOvr>
+    <a:masterClrMapping/>
+  </p:clrMapOvr>
+</p:sld>
+</file>
+
+<file path=ppt/slides/slide28.xml><?xml version="1.0" encoding="utf-8"?>
 <p:sld xmlns:a="http://schemas.openxmlformats.org/drawingml/2006/main" xmlns:r="http://schemas.openxmlformats.org/officeDocument/2006/relationships" xmlns:p="http://schemas.openxmlformats.org/presentationml/2006/main">
   <p:cSld>
     <p:spTree>
@@ -26630,7 +31756,7 @@
             <a:fld id="{4A490C5D-AEA8-4823-B9B3-806910A0ECF7}" type="slidenum">
               <a:rPr lang="es-ES" smtClean="0"/>
               <a:pPr/>
-              <a:t>25</a:t>
+              <a:t>28</a:t>
             </a:fld>
             <a:endParaRPr lang="es-ES" dirty="0"/>
           </a:p>
@@ -26941,3397 +32067,6 @@
 </p:sld>
 </file>
 
-<file path=ppt/slides/slide26.xml><?xml version="1.0" encoding="utf-8"?>
-<p:sld xmlns:a="http://schemas.openxmlformats.org/drawingml/2006/main" xmlns:r="http://schemas.openxmlformats.org/officeDocument/2006/relationships" xmlns:p="http://schemas.openxmlformats.org/presentationml/2006/main">
-  <p:cSld>
-    <p:spTree>
-      <p:nvGrpSpPr>
-        <p:cNvPr id="1" name=""/>
-        <p:cNvGrpSpPr/>
-        <p:nvPr/>
-      </p:nvGrpSpPr>
-      <p:grpSpPr>
-        <a:xfrm>
-          <a:off x="0" y="0"/>
-          <a:ext cx="0" cy="0"/>
-          <a:chOff x="0" y="0"/>
-          <a:chExt cx="0" cy="0"/>
-        </a:xfrm>
-      </p:grpSpPr>
-      <p:sp>
-        <p:nvSpPr>
-          <p:cNvPr id="7" name="Title 6">
-            <a:extLst>
-              <a:ext uri="{FF2B5EF4-FFF2-40B4-BE49-F238E27FC236}">
-                <a16:creationId xmlns:a16="http://schemas.microsoft.com/office/drawing/2014/main" id="{3EAA235A-E47A-4963-B160-062E476FC7B7}"/>
-              </a:ext>
-            </a:extLst>
-          </p:cNvPr>
-          <p:cNvSpPr>
-            <a:spLocks noGrp="1"/>
-          </p:cNvSpPr>
-          <p:nvPr>
-            <p:ph type="title"/>
-          </p:nvPr>
-        </p:nvSpPr>
-        <p:spPr/>
-        <p:txBody>
-          <a:bodyPr/>
-          <a:lstStyle/>
-          <a:p>
-            <a:r>
-              <a:t>La reivindicación en 7 documentos</a:t>
-            </a:r>
-          </a:p>
-        </p:txBody>
-      </p:sp>
-      <p:sp>
-        <p:nvSpPr>
-          <p:cNvPr id="3" name="Footer Placeholder 2">
-            <a:extLst>
-              <a:ext uri="{FF2B5EF4-FFF2-40B4-BE49-F238E27FC236}">
-                <a16:creationId xmlns:a16="http://schemas.microsoft.com/office/drawing/2014/main" id="{E770E632-9998-40C0-81B7-B6103B8DD5CD}"/>
-              </a:ext>
-            </a:extLst>
-          </p:cNvPr>
-          <p:cNvSpPr>
-            <a:spLocks noGrp="1"/>
-          </p:cNvSpPr>
-          <p:nvPr>
-            <p:ph type="ftr" sz="quarter" idx="11"/>
-          </p:nvPr>
-        </p:nvSpPr>
-        <p:spPr/>
-        <p:txBody>
-          <a:bodyPr/>
-          <a:lstStyle/>
-          <a:p>
-            <a:r>
-              <a:rPr lang="es-ES"/>
-              <a:t>Ecosistema Científico y Tecnológico Español</a:t>
-            </a:r>
-            <a:r>
-              <a:rPr lang="es-ES">
-                <a:latin typeface="Arial Black" panose="020B0A04020102020204" pitchFamily="34" charset="0"/>
-              </a:rPr>
-              <a:t> </a:t>
-            </a:r>
-            <a:r>
-              <a:rPr lang="es-ES">
-                <a:latin typeface="Arial Black" panose="020B0A04020102020204" pitchFamily="34" charset="0"/>
-                <a:sym typeface="Symbol" panose="05050102010706020507" pitchFamily="18" charset="2"/>
-              </a:rPr>
-              <a:t> </a:t>
-            </a:r>
-            <a:r>
-              <a:rPr lang="es-ES"/>
-              <a:t>COSCE 2026</a:t>
-            </a:r>
-            <a:r>
-              <a:rPr lang="es-ES">
-                <a:latin typeface="Arial Black" panose="020B0A04020102020204" pitchFamily="34" charset="0"/>
-              </a:rPr>
-              <a:t> </a:t>
-            </a:r>
-            <a:r>
-              <a:rPr lang="es-ES">
-                <a:latin typeface="Arial Black" panose="020B0A04020102020204" pitchFamily="34" charset="0"/>
-                <a:sym typeface="Symbol" panose="05050102010706020507" pitchFamily="18" charset="2"/>
-              </a:rPr>
-              <a:t> </a:t>
-            </a:r>
-            <a:r>
-              <a:rPr lang="es-ES"/>
-              <a:t>Transferencia y congresos en Informática</a:t>
-            </a:r>
-            <a:endParaRPr lang="es-ES" dirty="0"/>
-          </a:p>
-        </p:txBody>
-      </p:sp>
-      <p:sp>
-        <p:nvSpPr>
-          <p:cNvPr id="4" name="Slide Number Placeholder 3">
-            <a:extLst>
-              <a:ext uri="{FF2B5EF4-FFF2-40B4-BE49-F238E27FC236}">
-                <a16:creationId xmlns:a16="http://schemas.microsoft.com/office/drawing/2014/main" id="{ACAE09C3-23FA-4EAF-AC5A-5E9DEEEAC337}"/>
-              </a:ext>
-            </a:extLst>
-          </p:cNvPr>
-          <p:cNvSpPr>
-            <a:spLocks noGrp="1"/>
-          </p:cNvSpPr>
-          <p:nvPr>
-            <p:ph type="sldNum" sz="quarter" idx="12"/>
-          </p:nvPr>
-        </p:nvSpPr>
-        <p:spPr/>
-        <p:txBody>
-          <a:bodyPr/>
-          <a:lstStyle/>
-          <a:p>
-            <a:fld id="{4A490C5D-AEA8-4823-B9B3-806910A0ECF7}" type="slidenum">
-              <a:rPr lang="es-ES" smtClean="0"/>
-              <a:pPr/>
-              <a:t>24</a:t>
-            </a:fld>
-            <a:endParaRPr lang="es-ES" dirty="0"/>
-          </a:p>
-        </p:txBody>
-      </p:sp>
-      <p:sp>
-        <p:nvSpPr>
-          <p:cNvPr id="8" name="TextBox 7"/>
-          <p:cNvSpPr txBox="1"/>
-          <p:nvPr/>
-        </p:nvSpPr>
-        <p:spPr>
-          <a:xfrm>
-            <a:off x="548640" y="914400"/>
-            <a:ext cx="3474720" cy="274320"/>
-          </a:xfrm>
-          <a:prstGeom prst="rect">
-            <a:avLst/>
-          </a:prstGeom>
-          <a:noFill/>
-        </p:spPr>
-        <p:txBody>
-          <a:bodyPr wrap="square" lIns="0" rIns="0" anchor="t">
-            <a:spAutoFit/>
-          </a:bodyPr>
-          <a:lstStyle/>
-          <a:p>
-            <a:pPr algn="l">
-              <a:spcAft>
-                <a:spcPts val="200"/>
-              </a:spcAft>
-            </a:pPr>
-            <a:r>
-              <a:rPr sz="1300" b="1" i="1">
-                <a:solidFill>
-                  <a:srgbClr val="595959"/>
-                </a:solidFill>
-              </a:rPr>
-              <a:t>Los hechos</a:t>
-            </a:r>
-          </a:p>
-        </p:txBody>
-      </p:sp>
-      <p:sp>
-        <p:nvSpPr>
-          <p:cNvPr id="9" name="TextBox 8"/>
-          <p:cNvSpPr txBox="1"/>
-          <p:nvPr/>
-        </p:nvSpPr>
-        <p:spPr>
-          <a:xfrm>
-            <a:off x="4526280" y="914400"/>
-            <a:ext cx="3474720" cy="274320"/>
-          </a:xfrm>
-          <a:prstGeom prst="rect">
-            <a:avLst/>
-          </a:prstGeom>
-          <a:noFill/>
-        </p:spPr>
-        <p:txBody>
-          <a:bodyPr wrap="square" lIns="0" rIns="0" anchor="t">
-            <a:spAutoFit/>
-          </a:bodyPr>
-          <a:lstStyle/>
-          <a:p>
-            <a:pPr algn="l">
-              <a:spcAft>
-                <a:spcPts val="200"/>
-              </a:spcAft>
-            </a:pPr>
-            <a:r>
-              <a:rPr sz="1300" b="1" i="1">
-                <a:solidFill>
-                  <a:srgbClr val="595959"/>
-                </a:solidFill>
-              </a:rPr>
-              <a:t>La propuesta</a:t>
-            </a:r>
-          </a:p>
-        </p:txBody>
-      </p:sp>
-      <p:sp>
-        <p:nvSpPr>
-          <p:cNvPr id="10" name="TextBox 9"/>
-          <p:cNvSpPr txBox="1"/>
-          <p:nvPr/>
-        </p:nvSpPr>
-        <p:spPr>
-          <a:xfrm>
-            <a:off x="8229600" y="914400"/>
-            <a:ext cx="3474720" cy="274320"/>
-          </a:xfrm>
-          <a:prstGeom prst="rect">
-            <a:avLst/>
-          </a:prstGeom>
-          <a:noFill/>
-        </p:spPr>
-        <p:txBody>
-          <a:bodyPr wrap="square" lIns="0" rIns="0" anchor="t">
-            <a:spAutoFit/>
-          </a:bodyPr>
-          <a:lstStyle/>
-          <a:p>
-            <a:pPr algn="l">
-              <a:spcAft>
-                <a:spcPts val="200"/>
-              </a:spcAft>
-            </a:pPr>
-            <a:r>
-              <a:rPr sz="1300" b="1" i="1">
-                <a:solidFill>
-                  <a:srgbClr val="595959"/>
-                </a:solidFill>
-              </a:rPr>
-              <a:t>Qué pedimos y a quién</a:t>
-            </a:r>
-          </a:p>
-        </p:txBody>
-      </p:sp>
-      <p:sp>
-        <p:nvSpPr>
-          <p:cNvPr id="11" name="Informe A1"/>
-          <p:cNvSpPr/>
-          <p:nvPr/>
-        </p:nvSpPr>
-        <p:spPr>
-          <a:xfrm>
-            <a:off x="548640" y="1234440"/>
-            <a:ext cx="3566160" cy="1463040"/>
-          </a:xfrm>
-          <a:prstGeom prst="roundRect">
-            <a:avLst>
-              <a:gd name="adj" fmla="val 8000"/>
-            </a:avLst>
-          </a:prstGeom>
-          <a:solidFill>
-            <a:srgbClr val="E3EEFA"/>
-          </a:solidFill>
-          <a:ln w="15875">
-            <a:solidFill>
-              <a:srgbClr val="297FD5"/>
-            </a:solidFill>
-          </a:ln>
-          <a:effectLst/>
-        </p:spPr>
-        <p:style>
-          <a:lnRef idx="1">
-            <a:schemeClr val="accent1"/>
-          </a:lnRef>
-          <a:fillRef idx="3">
-            <a:schemeClr val="accent1"/>
-          </a:fillRef>
-          <a:effectRef idx="2">
-            <a:schemeClr val="accent1"/>
-          </a:effectRef>
-          <a:fontRef idx="minor">
-            <a:schemeClr val="lt1"/>
-          </a:fontRef>
-        </p:style>
-        <p:txBody>
-          <a:bodyPr rtlCol="0" anchor="t" wrap="square" lIns="109728" rIns="109728" tIns="54864" bIns="54864"/>
-          <a:lstStyle/>
-          <a:p>
-            <a:pPr algn="l">
-              <a:spcAft>
-                <a:spcPts val="200"/>
-              </a:spcAft>
-            </a:pPr>
-            <a:r>
-              <a:rPr sz="1400" b="1" i="0">
-                <a:solidFill>
-                  <a:srgbClr val="297FD5"/>
-                </a:solidFill>
-              </a:rPr>
-              <a:t>A1  </a:t>
-            </a:r>
-            <a:r>
-              <a:rPr sz="1300" b="1" i="0">
-                <a:solidFill>
-                  <a:srgbClr val="242852"/>
-                </a:solidFill>
-              </a:rPr>
-              <a:t>Informe de fundamentación</a:t>
-            </a:r>
-          </a:p>
-          <a:p>
-            <a:pPr algn="l">
-              <a:spcAft>
-                <a:spcPts val="200"/>
-              </a:spcAft>
-            </a:pPr>
-            <a:r>
-              <a:rPr sz="1200" b="0" i="1">
-                <a:solidFill>
-                  <a:srgbClr val="1F4E79"/>
-                </a:solidFill>
-              </a:rPr>
-              <a:t>Por qué: la práctica de la disciplina</a:t>
-            </a:r>
-          </a:p>
-          <a:p>
-            <a:pPr algn="l">
-              <a:spcAft>
-                <a:spcPts val="200"/>
-              </a:spcAft>
-            </a:pPr>
-            <a:r>
-              <a:rPr sz="1200" b="0" i="0">
-                <a:solidFill>
-                  <a:srgbClr val="262626"/>
-                </a:solidFill>
-              </a:rPr>
-              <a:t>El congreso selectivo es el canal terminal: 3 de los 10 artículos más citados del s. XXI; 63,5 % de las citas científicas en patentes</a:t>
-            </a:r>
-          </a:p>
-        </p:txBody>
-      </p:sp>
-      <p:sp>
-        <p:nvSpPr>
-          <p:cNvPr id="12" name="Informe A2"/>
-          <p:cNvSpPr/>
-          <p:nvPr/>
-        </p:nvSpPr>
-        <p:spPr>
-          <a:xfrm>
-            <a:off x="548640" y="2852928"/>
-            <a:ext cx="3566160" cy="1463040"/>
-          </a:xfrm>
-          <a:prstGeom prst="roundRect">
-            <a:avLst>
-              <a:gd name="adj" fmla="val 8000"/>
-            </a:avLst>
-          </a:prstGeom>
-          <a:solidFill>
-            <a:srgbClr val="E3EEFA"/>
-          </a:solidFill>
-          <a:ln w="15875">
-            <a:solidFill>
-              <a:srgbClr val="297FD5"/>
-            </a:solidFill>
-          </a:ln>
-          <a:effectLst/>
-        </p:spPr>
-        <p:style>
-          <a:lnRef idx="1">
-            <a:schemeClr val="accent1"/>
-          </a:lnRef>
-          <a:fillRef idx="3">
-            <a:schemeClr val="accent1"/>
-          </a:fillRef>
-          <a:effectRef idx="2">
-            <a:schemeClr val="accent1"/>
-          </a:effectRef>
-          <a:fontRef idx="minor">
-            <a:schemeClr val="lt1"/>
-          </a:fontRef>
-        </p:style>
-        <p:txBody>
-          <a:bodyPr rtlCol="0" anchor="t" wrap="square" lIns="109728" rIns="109728" tIns="54864" bIns="54864"/>
-          <a:lstStyle/>
-          <a:p>
-            <a:pPr algn="l">
-              <a:spcAft>
-                <a:spcPts val="200"/>
-              </a:spcAft>
-            </a:pPr>
-            <a:r>
-              <a:rPr sz="1400" b="1" i="0">
-                <a:solidFill>
-                  <a:srgbClr val="297FD5"/>
-                </a:solidFill>
-              </a:rPr>
-              <a:t>A2  </a:t>
-            </a:r>
-            <a:r>
-              <a:rPr sz="1300" b="1" i="0">
-                <a:solidFill>
-                  <a:srgbClr val="242852"/>
-                </a:solidFill>
-              </a:rPr>
-              <a:t>Informe de presencia española</a:t>
-            </a:r>
-          </a:p>
-          <a:p>
-            <a:pPr algn="l">
-              <a:spcAft>
-                <a:spcPts val="200"/>
-              </a:spcAft>
-            </a:pPr>
-            <a:r>
-              <a:rPr sz="1200" b="0" i="1">
-                <a:solidFill>
-                  <a:srgbClr val="1F4E79"/>
-                </a:solidFill>
-              </a:rPr>
-              <a:t>Qué está pasando</a:t>
-            </a:r>
-          </a:p>
-          <a:p>
-            <a:pPr algn="l">
-              <a:spcAft>
-                <a:spcPts val="200"/>
-              </a:spcAft>
-            </a:pPr>
-            <a:r>
-              <a:rPr sz="1200" b="0" i="0">
-                <a:solidFill>
-                  <a:srgbClr val="262626"/>
-                </a:solidFill>
-              </a:rPr>
-              <a:t>España crece en artículos pero pierde peso: 7,62 % → 4,23 % de UE27+RU; puesto 5.º → 8.º (en A*, 5.º → 9.º)</a:t>
-            </a:r>
-          </a:p>
-        </p:txBody>
-      </p:sp>
-      <p:sp>
-        <p:nvSpPr>
-          <p:cNvPr id="13" name="Informe A3"/>
-          <p:cNvSpPr/>
-          <p:nvPr/>
-        </p:nvSpPr>
-        <p:spPr>
-          <a:xfrm>
-            <a:off x="548640" y="4471416"/>
-            <a:ext cx="3566160" cy="1463040"/>
-          </a:xfrm>
-          <a:prstGeom prst="roundRect">
-            <a:avLst>
-              <a:gd name="adj" fmla="val 8000"/>
-            </a:avLst>
-          </a:prstGeom>
-          <a:solidFill>
-            <a:srgbClr val="E3EEFA"/>
-          </a:solidFill>
-          <a:ln w="15875">
-            <a:solidFill>
-              <a:srgbClr val="297FD5"/>
-            </a:solidFill>
-          </a:ln>
-          <a:effectLst/>
-        </p:spPr>
-        <p:style>
-          <a:lnRef idx="1">
-            <a:schemeClr val="accent1"/>
-          </a:lnRef>
-          <a:fillRef idx="3">
-            <a:schemeClr val="accent1"/>
-          </a:fillRef>
-          <a:effectRef idx="2">
-            <a:schemeClr val="accent1"/>
-          </a:effectRef>
-          <a:fontRef idx="minor">
-            <a:schemeClr val="lt1"/>
-          </a:fontRef>
-        </p:style>
-        <p:txBody>
-          <a:bodyPr rtlCol="0" anchor="t" wrap="square" lIns="109728" rIns="109728" tIns="54864" bIns="54864"/>
-          <a:lstStyle/>
-          <a:p>
-            <a:pPr algn="l">
-              <a:spcAft>
-                <a:spcPts val="200"/>
-              </a:spcAft>
-            </a:pPr>
-            <a:r>
-              <a:rPr sz="1400" b="1" i="0">
-                <a:solidFill>
-                  <a:srgbClr val="297FD5"/>
-                </a:solidFill>
-              </a:rPr>
-              <a:t>A3  </a:t>
-            </a:r>
-            <a:r>
-              <a:rPr sz="1300" b="1" i="0">
-                <a:solidFill>
-                  <a:srgbClr val="242852"/>
-                </a:solidFill>
-              </a:rPr>
-              <a:t>Informe sobre los criterios de sexenios</a:t>
-            </a:r>
-          </a:p>
-          <a:p>
-            <a:pPr algn="l">
-              <a:spcAft>
-                <a:spcPts val="200"/>
-              </a:spcAft>
-            </a:pPr>
-            <a:r>
-              <a:rPr sz="1200" b="0" i="1">
-                <a:solidFill>
-                  <a:srgbClr val="1F4E79"/>
-                </a:solidFill>
-              </a:rPr>
-              <a:t>Por qué el reconocimiento no se consolida</a:t>
-            </a:r>
-          </a:p>
-          <a:p>
-            <a:pPr algn="l">
-              <a:spcAft>
-                <a:spcPts val="200"/>
-              </a:spcAft>
-            </a:pPr>
-            <a:r>
-              <a:rPr sz="1200" b="0" i="0">
-                <a:solidFill>
-                  <a:srgbClr val="262626"/>
-                </a:solidFill>
-              </a:rPr>
-              <a:t>25 convocatorias, 7 cambios de régimen sin transitorio. Causa: el art. 7 de la Orden de 1994</a:t>
-            </a:r>
-          </a:p>
-        </p:txBody>
-      </p:sp>
-      <p:sp>
-        <p:nvSpPr>
-          <p:cNvPr id="14" name="Propuesta"/>
-          <p:cNvSpPr/>
-          <p:nvPr/>
-        </p:nvSpPr>
-        <p:spPr>
-          <a:xfrm>
-            <a:off x="4526280" y="1691640"/>
-            <a:ext cx="3291840" cy="3749039"/>
-          </a:xfrm>
-          <a:prstGeom prst="roundRect">
-            <a:avLst>
-              <a:gd name="adj" fmla="val 8000"/>
-            </a:avLst>
-          </a:prstGeom>
-          <a:solidFill>
-            <a:srgbClr val="242852"/>
-          </a:solidFill>
-          <a:ln>
-            <a:noFill/>
-          </a:ln>
-          <a:effectLst/>
-        </p:spPr>
-        <p:style>
-          <a:lnRef idx="1">
-            <a:schemeClr val="accent1"/>
-          </a:lnRef>
-          <a:fillRef idx="3">
-            <a:schemeClr val="accent1"/>
-          </a:fillRef>
-          <a:effectRef idx="2">
-            <a:schemeClr val="accent1"/>
-          </a:effectRef>
-          <a:fontRef idx="minor">
-            <a:schemeClr val="lt1"/>
-          </a:fontRef>
-        </p:style>
-        <p:txBody>
-          <a:bodyPr rtlCol="0" anchor="ctr" wrap="square" lIns="182880" rIns="182880" tIns="54864" bIns="54864"/>
-          <a:lstStyle/>
-          <a:p>
-            <a:pPr algn="ctr">
-              <a:spcAft>
-                <a:spcPts val="800"/>
-              </a:spcAft>
-            </a:pPr>
-            <a:r>
-              <a:rPr sz="1700" b="1" i="0">
-                <a:solidFill>
-                  <a:srgbClr val="FFFFFF"/>
-                </a:solidFill>
-              </a:rPr>
-              <a:t>00  Propuesta SCIE</a:t>
-            </a:r>
-          </a:p>
-          <a:p>
-            <a:pPr algn="l">
-              <a:spcAft>
-                <a:spcPts val="800"/>
-              </a:spcAft>
-            </a:pPr>
-            <a:r>
-              <a:rPr sz="1300" b="1" i="0">
-                <a:solidFill>
-                  <a:srgbClr val="ACCBF9"/>
-                </a:solidFill>
-              </a:rPr>
-              <a:t>Tesis: </a:t>
-            </a:r>
-            <a:r>
-              <a:rPr sz="1300" b="0" i="0">
-                <a:solidFill>
-                  <a:srgbClr val="FFFFFF"/>
-                </a:solidFill>
-              </a:rPr>
-              <a:t>congresos ICORE A* y A valorados como revistas de calidad contrastada, con un criterio estable</a:t>
-            </a:r>
-          </a:p>
-          <a:p>
-            <a:pPr algn="l">
-              <a:spcAft>
-                <a:spcPts val="300"/>
-              </a:spcAft>
-            </a:pPr>
-            <a:r>
-              <a:rPr sz="1300" b="0" i="0">
-                <a:solidFill>
-                  <a:srgbClr val="FFFFFF"/>
-                </a:solidFill>
-              </a:rPr>
-              <a:t>▸ Diagnóstico (§1)</a:t>
-            </a:r>
-          </a:p>
-          <a:p>
-            <a:pPr algn="l">
-              <a:spcAft>
-                <a:spcPts val="300"/>
-              </a:spcAft>
-            </a:pPr>
-            <a:r>
-              <a:rPr sz="1300" b="0" i="0">
-                <a:solidFill>
-                  <a:srgbClr val="FFFFFF"/>
-                </a:solidFill>
-              </a:rPr>
-              <a:t>▸ Principios P1–P5</a:t>
-            </a:r>
-          </a:p>
-          <a:p>
-            <a:pPr algn="l">
-              <a:spcAft>
-                <a:spcPts val="300"/>
-              </a:spcAft>
-            </a:pPr>
-            <a:r>
-              <a:rPr sz="1300" b="0" i="0">
-                <a:solidFill>
-                  <a:srgbClr val="FFFFFF"/>
-                </a:solidFill>
-              </a:rPr>
-              <a:t>▸ Recomendaciones R1–R7</a:t>
-            </a:r>
-          </a:p>
-          <a:p>
-            <a:pPr algn="l">
-              <a:spcAft>
-                <a:spcPts val="300"/>
-              </a:spcAft>
-            </a:pPr>
-            <a:r>
-              <a:rPr sz="1300" b="0" i="0">
-                <a:solidFill>
-                  <a:srgbClr val="FFFFFF"/>
-                </a:solidFill>
-              </a:rPr>
-              <a:t>▸ Plan en 3 fases</a:t>
-            </a:r>
-          </a:p>
-        </p:txBody>
-      </p:sp>
-      <p:sp>
-        <p:nvSpPr>
-          <p:cNvPr id="15" name="Aval COSCE"/>
-          <p:cNvSpPr/>
-          <p:nvPr/>
-        </p:nvSpPr>
-        <p:spPr>
-          <a:xfrm>
-            <a:off x="4892040" y="1207008"/>
-            <a:ext cx="2560320" cy="365760"/>
-          </a:xfrm>
-          <a:prstGeom prst="roundRect">
-            <a:avLst>
-              <a:gd name="adj" fmla="val 50000"/>
-            </a:avLst>
-          </a:prstGeom>
-          <a:solidFill>
-            <a:srgbClr val="F2F2F2"/>
-          </a:solidFill>
-          <a:ln w="15875">
-            <a:solidFill>
-              <a:srgbClr val="242852"/>
-            </a:solidFill>
-          </a:ln>
-          <a:effectLst/>
-        </p:spPr>
-        <p:style>
-          <a:lnRef idx="1">
-            <a:schemeClr val="accent1"/>
-          </a:lnRef>
-          <a:fillRef idx="3">
-            <a:schemeClr val="accent1"/>
-          </a:fillRef>
-          <a:effectRef idx="2">
-            <a:schemeClr val="accent1"/>
-          </a:effectRef>
-          <a:fontRef idx="minor">
-            <a:schemeClr val="lt1"/>
-          </a:fontRef>
-        </p:style>
-        <p:txBody>
-          <a:bodyPr rtlCol="0" anchor="ctr" wrap="square" lIns="109728" rIns="109728" tIns="54864" bIns="54864"/>
-          <a:lstStyle/>
-          <a:p>
-            <a:pPr algn="ctr">
-              <a:spcAft>
-                <a:spcPts val="0"/>
-              </a:spcAft>
-            </a:pPr>
-            <a:r>
-              <a:rPr sz="1200" b="1" i="0">
-                <a:solidFill>
-                  <a:srgbClr val="242852"/>
-                </a:solidFill>
-              </a:rPr>
-              <a:t>SCIE propone · COSCE avala</a:t>
-            </a:r>
-          </a:p>
-        </p:txBody>
-      </p:sp>
-      <p:sp>
-        <p:nvSpPr>
-          <p:cNvPr id="16" name="Carta C1"/>
-          <p:cNvSpPr/>
-          <p:nvPr/>
-        </p:nvSpPr>
-        <p:spPr>
-          <a:xfrm>
-            <a:off x="8229600" y="1234440"/>
-            <a:ext cx="3429000" cy="1463040"/>
-          </a:xfrm>
-          <a:prstGeom prst="roundRect">
-            <a:avLst>
-              <a:gd name="adj" fmla="val 8000"/>
-            </a:avLst>
-          </a:prstGeom>
-          <a:solidFill>
-            <a:srgbClr val="E6F2DF"/>
-          </a:solidFill>
-          <a:ln w="15875">
-            <a:solidFill>
-              <a:srgbClr val="3B7D3A"/>
-            </a:solidFill>
-          </a:ln>
-          <a:effectLst/>
-        </p:spPr>
-        <p:style>
-          <a:lnRef idx="1">
-            <a:schemeClr val="accent1"/>
-          </a:lnRef>
-          <a:fillRef idx="3">
-            <a:schemeClr val="accent1"/>
-          </a:fillRef>
-          <a:effectRef idx="2">
-            <a:schemeClr val="accent1"/>
-          </a:effectRef>
-          <a:fontRef idx="minor">
-            <a:schemeClr val="lt1"/>
-          </a:fontRef>
-        </p:style>
-        <p:txBody>
-          <a:bodyPr rtlCol="0" anchor="t" wrap="square" lIns="109728" rIns="109728" tIns="54864" bIns="54864"/>
-          <a:lstStyle/>
-          <a:p>
-            <a:pPr algn="l">
-              <a:spcAft>
-                <a:spcPts val="200"/>
-              </a:spcAft>
-            </a:pPr>
-            <a:r>
-              <a:rPr sz="1400" b="1" i="0">
-                <a:solidFill>
-                  <a:srgbClr val="3B7D3A"/>
-                </a:solidFill>
-              </a:rPr>
-              <a:t>C1  </a:t>
-            </a:r>
-            <a:r>
-              <a:rPr sz="1300" b="1" i="0">
-                <a:solidFill>
-                  <a:srgbClr val="242852"/>
-                </a:solidFill>
-              </a:rPr>
-              <a:t>Ministerio · Secretaría General de Universidades</a:t>
-            </a:r>
-          </a:p>
-          <a:p>
-            <a:pPr algn="l">
-              <a:spcAft>
-                <a:spcPts val="200"/>
-              </a:spcAft>
-            </a:pPr>
-            <a:r>
-              <a:rPr sz="1200" b="0" i="0">
-                <a:solidFill>
-                  <a:srgbClr val="262626"/>
-                </a:solidFill>
-              </a:rPr>
-              <a:t>R3 · Modificar el art. 7.2 de la Orden de 1994 (y la CNU/1181/2019): artículo completo en congreso de prestigio = aportación ordinaria, para todas las disciplinas</a:t>
-            </a:r>
-          </a:p>
-        </p:txBody>
-      </p:sp>
-      <p:sp>
-        <p:nvSpPr>
-          <p:cNvPr id="17" name="Carta C2"/>
-          <p:cNvSpPr/>
-          <p:nvPr/>
-        </p:nvSpPr>
-        <p:spPr>
-          <a:xfrm>
-            <a:off x="8229600" y="2852928"/>
-            <a:ext cx="3429000" cy="1463040"/>
-          </a:xfrm>
-          <a:prstGeom prst="roundRect">
-            <a:avLst>
-              <a:gd name="adj" fmla="val 8000"/>
-            </a:avLst>
-          </a:prstGeom>
-          <a:solidFill>
-            <a:srgbClr val="E6F2DF"/>
-          </a:solidFill>
-          <a:ln w="15875">
-            <a:solidFill>
-              <a:srgbClr val="3B7D3A"/>
-            </a:solidFill>
-          </a:ln>
-          <a:effectLst/>
-        </p:spPr>
-        <p:style>
-          <a:lnRef idx="1">
-            <a:schemeClr val="accent1"/>
-          </a:lnRef>
-          <a:fillRef idx="3">
-            <a:schemeClr val="accent1"/>
-          </a:fillRef>
-          <a:effectRef idx="2">
-            <a:schemeClr val="accent1"/>
-          </a:effectRef>
-          <a:fontRef idx="minor">
-            <a:schemeClr val="lt1"/>
-          </a:fontRef>
-        </p:style>
-        <p:txBody>
-          <a:bodyPr rtlCol="0" anchor="t" wrap="square" lIns="109728" rIns="109728" tIns="54864" bIns="54864"/>
-          <a:lstStyle/>
-          <a:p>
-            <a:pPr algn="l">
-              <a:spcAft>
-                <a:spcPts val="200"/>
-              </a:spcAft>
-            </a:pPr>
-            <a:r>
-              <a:rPr sz="1400" b="1" i="0">
-                <a:solidFill>
-                  <a:srgbClr val="3B7D3A"/>
-                </a:solidFill>
-              </a:rPr>
-              <a:t>C2  </a:t>
-            </a:r>
-            <a:r>
-              <a:rPr sz="1300" b="1" i="0">
-                <a:solidFill>
-                  <a:srgbClr val="242852"/>
-                </a:solidFill>
-              </a:rPr>
-              <a:t>CNEAI · criterios de sexenios 6.2</a:t>
-            </a:r>
-          </a:p>
-          <a:p>
-            <a:pPr algn="l">
-              <a:spcAft>
-                <a:spcPts val="200"/>
-              </a:spcAft>
-            </a:pPr>
-            <a:r>
-              <a:rPr sz="1200" b="0" i="0">
-                <a:solidFill>
-                  <a:srgbClr val="262626"/>
-                </a:solidFill>
-              </a:rPr>
-              <a:t>R1 + R2 · Cupo de extraordinarias de 3 a 5 para ICORE A*/A; A* ≈ Q1, A ≈ Q1/Q2; criterio bienal y régimen transitorio</a:t>
-            </a:r>
-          </a:p>
-        </p:txBody>
-      </p:sp>
-      <p:sp>
-        <p:nvSpPr>
-          <p:cNvPr id="18" name="Carta C3"/>
-          <p:cNvSpPr/>
-          <p:nvPr/>
-        </p:nvSpPr>
-        <p:spPr>
-          <a:xfrm>
-            <a:off x="8229600" y="4471416"/>
-            <a:ext cx="3429000" cy="1463040"/>
-          </a:xfrm>
-          <a:prstGeom prst="roundRect">
-            <a:avLst>
-              <a:gd name="adj" fmla="val 8000"/>
-            </a:avLst>
-          </a:prstGeom>
-          <a:solidFill>
-            <a:srgbClr val="E6F2DF"/>
-          </a:solidFill>
-          <a:ln w="15875">
-            <a:solidFill>
-              <a:srgbClr val="3B7D3A"/>
-            </a:solidFill>
-          </a:ln>
-          <a:effectLst/>
-        </p:spPr>
-        <p:style>
-          <a:lnRef idx="1">
-            <a:schemeClr val="accent1"/>
-          </a:lnRef>
-          <a:fillRef idx="3">
-            <a:schemeClr val="accent1"/>
-          </a:fillRef>
-          <a:effectRef idx="2">
-            <a:schemeClr val="accent1"/>
-          </a:effectRef>
-          <a:fontRef idx="minor">
-            <a:schemeClr val="lt1"/>
-          </a:fontRef>
-        </p:style>
-        <p:txBody>
-          <a:bodyPr rtlCol="0" anchor="t" wrap="square" lIns="109728" rIns="109728" tIns="54864" bIns="54864"/>
-          <a:lstStyle/>
-          <a:p>
-            <a:pPr algn="l">
-              <a:spcAft>
-                <a:spcPts val="200"/>
-              </a:spcAft>
-            </a:pPr>
-            <a:r>
-              <a:rPr sz="1400" b="1" i="0">
-                <a:solidFill>
-                  <a:srgbClr val="3B7D3A"/>
-                </a:solidFill>
-              </a:rPr>
-              <a:t>C3  </a:t>
-            </a:r>
-            <a:r>
-              <a:rPr sz="1300" b="1" i="0">
-                <a:solidFill>
-                  <a:srgbClr val="242852"/>
-                </a:solidFill>
-              </a:rPr>
-              <a:t>ANECA · acreditación</a:t>
-            </a:r>
-          </a:p>
-          <a:p>
-            <a:pPr algn="l">
-              <a:spcAft>
-                <a:spcPts val="200"/>
-              </a:spcAft>
-            </a:pPr>
-            <a:r>
-              <a:rPr sz="1200" b="0" i="0">
-                <a:solidFill>
-                  <a:srgbClr val="262626"/>
-                </a:solidFill>
-              </a:rPr>
-              <a:t>R4 + R6 · Aclaración general a las comisiones; comités de programa como mérito; coherencia con sexenios</a:t>
-            </a:r>
-          </a:p>
-        </p:txBody>
-      </p:sp>
-      <p:cxnSp>
-        <p:nvCxnSpPr>
-          <p:cNvPr id="19" name="Connector 18"/>
-          <p:cNvCxnSpPr/>
-          <p:nvPr/>
-        </p:nvCxnSpPr>
-        <p:spPr>
-          <a:xfrm>
-            <a:off x="4114800" y="1965960"/>
-            <a:ext cx="411480" cy="91440"/>
-          </a:xfrm>
-          <a:prstGeom prst="line">
-            <a:avLst/>
-          </a:prstGeom>
-          <a:ln w="22225">
-            <a:solidFill>
-              <a:srgbClr val="595959"/>
-            </a:solidFill>
-            <a:tailEnd type="triangle" w="med" len="med"/>
-          </a:ln>
-        </p:spPr>
-        <p:style>
-          <a:lnRef idx="2">
-            <a:schemeClr val="accent1"/>
-          </a:lnRef>
-          <a:fillRef idx="0">
-            <a:schemeClr val="accent1"/>
-          </a:fillRef>
-          <a:effectRef idx="1">
-            <a:schemeClr val="accent1"/>
-          </a:effectRef>
-          <a:fontRef idx="minor">
-            <a:schemeClr val="tx1"/>
-          </a:fontRef>
-        </p:style>
-      </p:cxnSp>
-      <p:cxnSp>
-        <p:nvCxnSpPr>
-          <p:cNvPr id="20" name="Connector 19"/>
-          <p:cNvCxnSpPr/>
-          <p:nvPr/>
-        </p:nvCxnSpPr>
-        <p:spPr>
-          <a:xfrm flipV="1">
-            <a:off x="7818120" y="1965960"/>
-            <a:ext cx="411480" cy="91440"/>
-          </a:xfrm>
-          <a:prstGeom prst="line">
-            <a:avLst/>
-          </a:prstGeom>
-          <a:ln w="22225">
-            <a:solidFill>
-              <a:srgbClr val="595959"/>
-            </a:solidFill>
-            <a:tailEnd type="triangle" w="med" len="med"/>
-          </a:ln>
-        </p:spPr>
-        <p:style>
-          <a:lnRef idx="2">
-            <a:schemeClr val="accent1"/>
-          </a:lnRef>
-          <a:fillRef idx="0">
-            <a:schemeClr val="accent1"/>
-          </a:fillRef>
-          <a:effectRef idx="1">
-            <a:schemeClr val="accent1"/>
-          </a:effectRef>
-          <a:fontRef idx="minor">
-            <a:schemeClr val="tx1"/>
-          </a:fontRef>
-        </p:style>
-      </p:cxnSp>
-      <p:cxnSp>
-        <p:nvCxnSpPr>
-          <p:cNvPr id="21" name="Connector 20"/>
-          <p:cNvCxnSpPr/>
-          <p:nvPr/>
-        </p:nvCxnSpPr>
-        <p:spPr>
-          <a:xfrm>
-            <a:off x="4114800" y="3584448"/>
-            <a:ext cx="411480" cy="0"/>
-          </a:xfrm>
-          <a:prstGeom prst="line">
-            <a:avLst/>
-          </a:prstGeom>
-          <a:ln w="22225">
-            <a:solidFill>
-              <a:srgbClr val="595959"/>
-            </a:solidFill>
-            <a:tailEnd type="triangle" w="med" len="med"/>
-          </a:ln>
-        </p:spPr>
-        <p:style>
-          <a:lnRef idx="2">
-            <a:schemeClr val="accent1"/>
-          </a:lnRef>
-          <a:fillRef idx="0">
-            <a:schemeClr val="accent1"/>
-          </a:fillRef>
-          <a:effectRef idx="1">
-            <a:schemeClr val="accent1"/>
-          </a:effectRef>
-          <a:fontRef idx="minor">
-            <a:schemeClr val="tx1"/>
-          </a:fontRef>
-        </p:style>
-      </p:cxnSp>
-      <p:cxnSp>
-        <p:nvCxnSpPr>
-          <p:cNvPr id="22" name="Connector 21"/>
-          <p:cNvCxnSpPr/>
-          <p:nvPr/>
-        </p:nvCxnSpPr>
-        <p:spPr>
-          <a:xfrm>
-            <a:off x="7818120" y="3584448"/>
-            <a:ext cx="411480" cy="0"/>
-          </a:xfrm>
-          <a:prstGeom prst="line">
-            <a:avLst/>
-          </a:prstGeom>
-          <a:ln w="22225">
-            <a:solidFill>
-              <a:srgbClr val="595959"/>
-            </a:solidFill>
-            <a:tailEnd type="triangle" w="med" len="med"/>
-          </a:ln>
-        </p:spPr>
-        <p:style>
-          <a:lnRef idx="2">
-            <a:schemeClr val="accent1"/>
-          </a:lnRef>
-          <a:fillRef idx="0">
-            <a:schemeClr val="accent1"/>
-          </a:fillRef>
-          <a:effectRef idx="1">
-            <a:schemeClr val="accent1"/>
-          </a:effectRef>
-          <a:fontRef idx="minor">
-            <a:schemeClr val="tx1"/>
-          </a:fontRef>
-        </p:style>
-      </p:cxnSp>
-      <p:cxnSp>
-        <p:nvCxnSpPr>
-          <p:cNvPr id="23" name="Connector 22"/>
-          <p:cNvCxnSpPr/>
-          <p:nvPr/>
-        </p:nvCxnSpPr>
-        <p:spPr>
-          <a:xfrm flipV="1">
-            <a:off x="4114800" y="5074919"/>
-            <a:ext cx="411480" cy="128017"/>
-          </a:xfrm>
-          <a:prstGeom prst="line">
-            <a:avLst/>
-          </a:prstGeom>
-          <a:ln w="22225">
-            <a:solidFill>
-              <a:srgbClr val="595959"/>
-            </a:solidFill>
-            <a:tailEnd type="triangle" w="med" len="med"/>
-          </a:ln>
-        </p:spPr>
-        <p:style>
-          <a:lnRef idx="2">
-            <a:schemeClr val="accent1"/>
-          </a:lnRef>
-          <a:fillRef idx="0">
-            <a:schemeClr val="accent1"/>
-          </a:fillRef>
-          <a:effectRef idx="1">
-            <a:schemeClr val="accent1"/>
-          </a:effectRef>
-          <a:fontRef idx="minor">
-            <a:schemeClr val="tx1"/>
-          </a:fontRef>
-        </p:style>
-      </p:cxnSp>
-      <p:cxnSp>
-        <p:nvCxnSpPr>
-          <p:cNvPr id="24" name="Connector 23"/>
-          <p:cNvCxnSpPr/>
-          <p:nvPr/>
-        </p:nvCxnSpPr>
-        <p:spPr>
-          <a:xfrm>
-            <a:off x="7818120" y="5074919"/>
-            <a:ext cx="411480" cy="128017"/>
-          </a:xfrm>
-          <a:prstGeom prst="line">
-            <a:avLst/>
-          </a:prstGeom>
-          <a:ln w="22225">
-            <a:solidFill>
-              <a:srgbClr val="595959"/>
-            </a:solidFill>
-            <a:tailEnd type="triangle" w="med" len="med"/>
-          </a:ln>
-        </p:spPr>
-        <p:style>
-          <a:lnRef idx="2">
-            <a:schemeClr val="accent1"/>
-          </a:lnRef>
-          <a:fillRef idx="0">
-            <a:schemeClr val="accent1"/>
-          </a:fillRef>
-          <a:effectRef idx="1">
-            <a:schemeClr val="accent1"/>
-          </a:effectRef>
-          <a:fontRef idx="minor">
-            <a:schemeClr val="tx1"/>
-          </a:fontRef>
-        </p:style>
-      </p:cxnSp>
-      <p:sp>
-        <p:nvSpPr>
-          <p:cNvPr id="25" name="TextBox 24"/>
-          <p:cNvSpPr txBox="1"/>
-          <p:nvPr/>
-        </p:nvSpPr>
-        <p:spPr>
-          <a:xfrm>
-            <a:off x="548640" y="6016752"/>
-            <a:ext cx="11109960" cy="274320"/>
-          </a:xfrm>
-          <a:prstGeom prst="rect">
-            <a:avLst/>
-          </a:prstGeom>
-          <a:noFill/>
-        </p:spPr>
-        <p:txBody>
-          <a:bodyPr wrap="square" lIns="0" rIns="0" anchor="t">
-            <a:spAutoFit/>
-          </a:bodyPr>
-          <a:lstStyle/>
-          <a:p>
-            <a:pPr algn="ctr">
-              <a:spcAft>
-                <a:spcPts val="200"/>
-              </a:spcAft>
-            </a:pPr>
-            <a:r>
-              <a:rPr sz="1100" b="0" i="1">
-                <a:solidFill>
-                  <a:srgbClr val="595959"/>
-                </a:solidFill>
-              </a:rPr>
-              <a:t>Cada carta pide a su destinatario solo lo que este puede conceder; los tres informes y la propuesta van adjuntos a las tres cartas.</a:t>
-            </a:r>
-          </a:p>
-        </p:txBody>
-      </p:sp>
-    </p:spTree>
-    <p:extLst>
-      <p:ext uri="{BB962C8B-B14F-4D97-AF65-F5344CB8AC3E}">
-        <p14:creationId xmlns:p14="http://schemas.microsoft.com/office/powerpoint/2010/main" val="423446900"/>
-      </p:ext>
-    </p:extLst>
-  </p:cSld>
-  <p:clrMapOvr>
-    <a:masterClrMapping/>
-  </p:clrMapOvr>
-</p:sld>
-</file>
-
-<file path=ppt/slides/slide27.xml><?xml version="1.0" encoding="utf-8"?>
-<p:sld xmlns:a="http://schemas.openxmlformats.org/drawingml/2006/main" xmlns:r="http://schemas.openxmlformats.org/officeDocument/2006/relationships" xmlns:p="http://schemas.openxmlformats.org/presentationml/2006/main">
-  <p:cSld>
-    <p:spTree>
-      <p:nvGrpSpPr>
-        <p:cNvPr id="1" name=""/>
-        <p:cNvGrpSpPr/>
-        <p:nvPr/>
-      </p:nvGrpSpPr>
-      <p:grpSpPr>
-        <a:xfrm>
-          <a:off x="0" y="0"/>
-          <a:ext cx="0" cy="0"/>
-          <a:chOff x="0" y="0"/>
-          <a:chExt cx="0" cy="0"/>
-        </a:xfrm>
-      </p:grpSpPr>
-      <p:sp>
-        <p:nvSpPr>
-          <p:cNvPr id="7" name="Title 6">
-            <a:extLst>
-              <a:ext uri="{FF2B5EF4-FFF2-40B4-BE49-F238E27FC236}">
-                <a16:creationId xmlns:a16="http://schemas.microsoft.com/office/drawing/2014/main" id="{3EAA235A-E47A-4963-B160-062E476FC7B7}"/>
-              </a:ext>
-            </a:extLst>
-          </p:cNvPr>
-          <p:cNvSpPr>
-            <a:spLocks noGrp="1"/>
-          </p:cNvSpPr>
-          <p:nvPr>
-            <p:ph type="title"/>
-          </p:nvPr>
-        </p:nvSpPr>
-        <p:spPr/>
-        <p:txBody>
-          <a:bodyPr/>
-          <a:lstStyle/>
-          <a:p>
-            <a:r>
-              <a:t>Quién decide qué, y cuándo</a:t>
-            </a:r>
-          </a:p>
-        </p:txBody>
-      </p:sp>
-      <p:sp>
-        <p:nvSpPr>
-          <p:cNvPr id="3" name="Footer Placeholder 2">
-            <a:extLst>
-              <a:ext uri="{FF2B5EF4-FFF2-40B4-BE49-F238E27FC236}">
-                <a16:creationId xmlns:a16="http://schemas.microsoft.com/office/drawing/2014/main" id="{E770E632-9998-40C0-81B7-B6103B8DD5CD}"/>
-              </a:ext>
-            </a:extLst>
-          </p:cNvPr>
-          <p:cNvSpPr>
-            <a:spLocks noGrp="1"/>
-          </p:cNvSpPr>
-          <p:nvPr>
-            <p:ph type="ftr" sz="quarter" idx="11"/>
-          </p:nvPr>
-        </p:nvSpPr>
-        <p:spPr/>
-        <p:txBody>
-          <a:bodyPr/>
-          <a:lstStyle/>
-          <a:p>
-            <a:r>
-              <a:rPr lang="es-ES"/>
-              <a:t>Ecosistema Científico y Tecnológico Español</a:t>
-            </a:r>
-            <a:r>
-              <a:rPr lang="es-ES">
-                <a:latin typeface="Arial Black" panose="020B0A04020102020204" pitchFamily="34" charset="0"/>
-              </a:rPr>
-              <a:t> </a:t>
-            </a:r>
-            <a:r>
-              <a:rPr lang="es-ES">
-                <a:latin typeface="Arial Black" panose="020B0A04020102020204" pitchFamily="34" charset="0"/>
-                <a:sym typeface="Symbol" panose="05050102010706020507" pitchFamily="18" charset="2"/>
-              </a:rPr>
-              <a:t> </a:t>
-            </a:r>
-            <a:r>
-              <a:rPr lang="es-ES"/>
-              <a:t>COSCE 2026</a:t>
-            </a:r>
-            <a:r>
-              <a:rPr lang="es-ES">
-                <a:latin typeface="Arial Black" panose="020B0A04020102020204" pitchFamily="34" charset="0"/>
-              </a:rPr>
-              <a:t> </a:t>
-            </a:r>
-            <a:r>
-              <a:rPr lang="es-ES">
-                <a:latin typeface="Arial Black" panose="020B0A04020102020204" pitchFamily="34" charset="0"/>
-                <a:sym typeface="Symbol" panose="05050102010706020507" pitchFamily="18" charset="2"/>
-              </a:rPr>
-              <a:t> </a:t>
-            </a:r>
-            <a:r>
-              <a:rPr lang="es-ES"/>
-              <a:t>Transferencia y congresos en Informática</a:t>
-            </a:r>
-            <a:endParaRPr lang="es-ES" dirty="0"/>
-          </a:p>
-        </p:txBody>
-      </p:sp>
-      <p:sp>
-        <p:nvSpPr>
-          <p:cNvPr id="4" name="Slide Number Placeholder 3">
-            <a:extLst>
-              <a:ext uri="{FF2B5EF4-FFF2-40B4-BE49-F238E27FC236}">
-                <a16:creationId xmlns:a16="http://schemas.microsoft.com/office/drawing/2014/main" id="{ACAE09C3-23FA-4EAF-AC5A-5E9DEEEAC337}"/>
-              </a:ext>
-            </a:extLst>
-          </p:cNvPr>
-          <p:cNvSpPr>
-            <a:spLocks noGrp="1"/>
-          </p:cNvSpPr>
-          <p:nvPr>
-            <p:ph type="sldNum" sz="quarter" idx="12"/>
-          </p:nvPr>
-        </p:nvSpPr>
-        <p:spPr/>
-        <p:txBody>
-          <a:bodyPr/>
-          <a:lstStyle/>
-          <a:p>
-            <a:fld id="{4A490C5D-AEA8-4823-B9B3-806910A0ECF7}" type="slidenum">
-              <a:rPr lang="es-ES" smtClean="0"/>
-              <a:pPr/>
-              <a:t>24</a:t>
-            </a:fld>
-            <a:endParaRPr lang="es-ES" dirty="0"/>
-          </a:p>
-        </p:txBody>
-      </p:sp>
-      <p:sp>
-        <p:nvSpPr>
-          <p:cNvPr id="8" name="TextBox 7"/>
-          <p:cNvSpPr txBox="1"/>
-          <p:nvPr/>
-        </p:nvSpPr>
-        <p:spPr>
-          <a:xfrm>
-            <a:off x="548640" y="914400"/>
-            <a:ext cx="11109960" cy="274320"/>
-          </a:xfrm>
-          <a:prstGeom prst="rect">
-            <a:avLst/>
-          </a:prstGeom>
-          <a:noFill/>
-        </p:spPr>
-        <p:txBody>
-          <a:bodyPr wrap="square" lIns="0" rIns="0" anchor="t">
-            <a:spAutoFit/>
-          </a:bodyPr>
-          <a:lstStyle/>
-          <a:p>
-            <a:pPr algn="l">
-              <a:spcAft>
-                <a:spcPts val="200"/>
-              </a:spcAft>
-            </a:pPr>
-            <a:r>
-              <a:rPr sz="1200" b="0" i="1">
-                <a:solidFill>
-                  <a:srgbClr val="595959"/>
-                </a:solidFill>
-              </a:rPr>
-              <a:t>Máximo de congresos entre las 5 aportaciones de un sexenio de informática, 2001–2025 (las revistas: siempre 5)</a:t>
-            </a:r>
-          </a:p>
-        </p:txBody>
-      </p:sp>
-      <p:sp>
-        <p:nvSpPr>
-          <p:cNvPr id="9" name="Régimen 2001–04"/>
-          <p:cNvSpPr/>
-          <p:nvPr/>
-        </p:nvSpPr>
-        <p:spPr>
-          <a:xfrm>
-            <a:off x="548640" y="1207008"/>
-            <a:ext cx="1750161" cy="457200"/>
-          </a:xfrm>
-          <a:prstGeom prst="rect">
-            <a:avLst/>
-          </a:prstGeom>
-          <a:solidFill>
-            <a:srgbClr val="3B7D3A"/>
-          </a:solidFill>
-          <a:ln>
-            <a:noFill/>
-          </a:ln>
-          <a:effectLst/>
-        </p:spPr>
-        <p:style>
-          <a:lnRef idx="1">
-            <a:schemeClr val="accent1"/>
-          </a:lnRef>
-          <a:fillRef idx="3">
-            <a:schemeClr val="accent1"/>
-          </a:fillRef>
-          <a:effectRef idx="2">
-            <a:schemeClr val="accent1"/>
-          </a:effectRef>
-          <a:fontRef idx="minor">
-            <a:schemeClr val="lt1"/>
-          </a:fontRef>
-        </p:style>
-        <p:txBody>
-          <a:bodyPr rtlCol="0" anchor="ctr" wrap="square" lIns="18288" rIns="18288" tIns="54864" bIns="54864"/>
-          <a:lstStyle/>
-          <a:p>
-            <a:pPr algn="ctr">
-              <a:spcAft>
-                <a:spcPts val="0"/>
-              </a:spcAft>
-            </a:pPr>
-            <a:r>
-              <a:rPr sz="1500" b="1" i="0">
-                <a:solidFill>
-                  <a:srgbClr val="FFFFFF"/>
-                </a:solidFill>
-              </a:rPr>
-              <a:t>5</a:t>
-            </a:r>
-          </a:p>
-        </p:txBody>
-      </p:sp>
-      <p:sp>
-        <p:nvSpPr>
-          <p:cNvPr id="10" name="TextBox 9"/>
-          <p:cNvSpPr txBox="1"/>
-          <p:nvPr/>
-        </p:nvSpPr>
-        <p:spPr>
-          <a:xfrm>
-            <a:off x="548640" y="1682496"/>
-            <a:ext cx="1750161" cy="228600"/>
-          </a:xfrm>
-          <a:prstGeom prst="rect">
-            <a:avLst/>
-          </a:prstGeom>
-          <a:noFill/>
-        </p:spPr>
-        <p:txBody>
-          <a:bodyPr wrap="square" lIns="0" rIns="0" anchor="t">
-            <a:spAutoFit/>
-          </a:bodyPr>
-          <a:lstStyle/>
-          <a:p>
-            <a:pPr algn="ctr">
-              <a:spcAft>
-                <a:spcPts val="200"/>
-              </a:spcAft>
-            </a:pPr>
-            <a:r>
-              <a:rPr sz="1000" b="0" i="0">
-                <a:solidFill>
-                  <a:srgbClr val="595959"/>
-                </a:solidFill>
-              </a:rPr>
-              <a:t>2001–04</a:t>
-            </a:r>
-          </a:p>
-        </p:txBody>
-      </p:sp>
-      <p:sp>
-        <p:nvSpPr>
-          <p:cNvPr id="11" name="Régimen 05–06"/>
-          <p:cNvSpPr/>
-          <p:nvPr/>
-        </p:nvSpPr>
-        <p:spPr>
-          <a:xfrm>
-            <a:off x="2326233" y="1207008"/>
-            <a:ext cx="861364" cy="457200"/>
-          </a:xfrm>
-          <a:prstGeom prst="rect">
-            <a:avLst/>
-          </a:prstGeom>
-          <a:solidFill>
-            <a:srgbClr val="E09B2D"/>
-          </a:solidFill>
-          <a:ln>
-            <a:noFill/>
-          </a:ln>
-          <a:effectLst/>
-        </p:spPr>
-        <p:style>
-          <a:lnRef idx="1">
-            <a:schemeClr val="accent1"/>
-          </a:lnRef>
-          <a:fillRef idx="3">
-            <a:schemeClr val="accent1"/>
-          </a:fillRef>
-          <a:effectRef idx="2">
-            <a:schemeClr val="accent1"/>
-          </a:effectRef>
-          <a:fontRef idx="minor">
-            <a:schemeClr val="lt1"/>
-          </a:fontRef>
-        </p:style>
-        <p:txBody>
-          <a:bodyPr rtlCol="0" anchor="ctr" wrap="square" lIns="18288" rIns="18288" tIns="54864" bIns="54864"/>
-          <a:lstStyle/>
-          <a:p>
-            <a:pPr algn="ctr">
-              <a:spcAft>
-                <a:spcPts val="0"/>
-              </a:spcAft>
-            </a:pPr>
-            <a:r>
-              <a:rPr sz="1500" b="1" i="0">
-                <a:solidFill>
-                  <a:srgbClr val="FFFFFF"/>
-                </a:solidFill>
-              </a:rPr>
-              <a:t>3</a:t>
-            </a:r>
-          </a:p>
-        </p:txBody>
-      </p:sp>
-      <p:sp>
-        <p:nvSpPr>
-          <p:cNvPr id="12" name="TextBox 11"/>
-          <p:cNvSpPr txBox="1"/>
-          <p:nvPr/>
-        </p:nvSpPr>
-        <p:spPr>
-          <a:xfrm>
-            <a:off x="2326233" y="1682496"/>
-            <a:ext cx="861364" cy="228600"/>
-          </a:xfrm>
-          <a:prstGeom prst="rect">
-            <a:avLst/>
-          </a:prstGeom>
-          <a:noFill/>
-        </p:spPr>
-        <p:txBody>
-          <a:bodyPr wrap="square" lIns="0" rIns="0" anchor="t">
-            <a:spAutoFit/>
-          </a:bodyPr>
-          <a:lstStyle/>
-          <a:p>
-            <a:pPr algn="ctr">
-              <a:spcAft>
-                <a:spcPts val="200"/>
-              </a:spcAft>
-            </a:pPr>
-            <a:r>
-              <a:rPr sz="1000" b="0" i="0">
-                <a:solidFill>
-                  <a:srgbClr val="595959"/>
-                </a:solidFill>
-              </a:rPr>
-              <a:t>05–06</a:t>
-            </a:r>
-          </a:p>
-        </p:txBody>
-      </p:sp>
-      <p:sp>
-        <p:nvSpPr>
-          <p:cNvPr id="13" name="Régimen 2007–2013"/>
-          <p:cNvSpPr/>
-          <p:nvPr/>
-        </p:nvSpPr>
-        <p:spPr>
-          <a:xfrm>
-            <a:off x="3215030" y="1207008"/>
-            <a:ext cx="3083356" cy="457200"/>
-          </a:xfrm>
-          <a:prstGeom prst="rect">
-            <a:avLst/>
-          </a:prstGeom>
-          <a:solidFill>
-            <a:srgbClr val="3B7D3A"/>
-          </a:solidFill>
-          <a:ln>
-            <a:noFill/>
-          </a:ln>
-          <a:effectLst/>
-        </p:spPr>
-        <p:style>
-          <a:lnRef idx="1">
-            <a:schemeClr val="accent1"/>
-          </a:lnRef>
-          <a:fillRef idx="3">
-            <a:schemeClr val="accent1"/>
-          </a:fillRef>
-          <a:effectRef idx="2">
-            <a:schemeClr val="accent1"/>
-          </a:effectRef>
-          <a:fontRef idx="minor">
-            <a:schemeClr val="lt1"/>
-          </a:fontRef>
-        </p:style>
-        <p:txBody>
-          <a:bodyPr rtlCol="0" anchor="ctr" wrap="square" lIns="18288" rIns="18288" tIns="54864" bIns="54864"/>
-          <a:lstStyle/>
-          <a:p>
-            <a:pPr algn="ctr">
-              <a:spcAft>
-                <a:spcPts val="0"/>
-              </a:spcAft>
-            </a:pPr>
-            <a:r>
-              <a:rPr sz="1500" b="1" i="0">
-                <a:solidFill>
-                  <a:srgbClr val="FFFFFF"/>
-                </a:solidFill>
-              </a:rPr>
-              <a:t>5</a:t>
-            </a:r>
-          </a:p>
-        </p:txBody>
-      </p:sp>
-      <p:sp>
-        <p:nvSpPr>
-          <p:cNvPr id="14" name="TextBox 13"/>
-          <p:cNvSpPr txBox="1"/>
-          <p:nvPr/>
-        </p:nvSpPr>
-        <p:spPr>
-          <a:xfrm>
-            <a:off x="3215030" y="1682496"/>
-            <a:ext cx="3083356" cy="228600"/>
-          </a:xfrm>
-          <a:prstGeom prst="rect">
-            <a:avLst/>
-          </a:prstGeom>
-          <a:noFill/>
-        </p:spPr>
-        <p:txBody>
-          <a:bodyPr wrap="square" lIns="0" rIns="0" anchor="t">
-            <a:spAutoFit/>
-          </a:bodyPr>
-          <a:lstStyle/>
-          <a:p>
-            <a:pPr algn="ctr">
-              <a:spcAft>
-                <a:spcPts val="200"/>
-              </a:spcAft>
-            </a:pPr>
-            <a:r>
-              <a:rPr sz="1000" b="0" i="0">
-                <a:solidFill>
-                  <a:srgbClr val="595959"/>
-                </a:solidFill>
-              </a:rPr>
-              <a:t>2007–2013</a:t>
-            </a:r>
-          </a:p>
-        </p:txBody>
-      </p:sp>
-      <p:sp>
-        <p:nvSpPr>
-          <p:cNvPr id="15" name="Régimen 14"/>
-          <p:cNvSpPr/>
-          <p:nvPr/>
-        </p:nvSpPr>
-        <p:spPr>
-          <a:xfrm>
-            <a:off x="6325819" y="1207008"/>
-            <a:ext cx="416966" cy="457200"/>
-          </a:xfrm>
-          <a:prstGeom prst="rect">
-            <a:avLst/>
-          </a:prstGeom>
-          <a:solidFill>
-            <a:srgbClr val="E09B2D"/>
-          </a:solidFill>
-          <a:ln>
-            <a:noFill/>
-          </a:ln>
-          <a:effectLst/>
-        </p:spPr>
-        <p:style>
-          <a:lnRef idx="1">
-            <a:schemeClr val="accent1"/>
-          </a:lnRef>
-          <a:fillRef idx="3">
-            <a:schemeClr val="accent1"/>
-          </a:fillRef>
-          <a:effectRef idx="2">
-            <a:schemeClr val="accent1"/>
-          </a:effectRef>
-          <a:fontRef idx="minor">
-            <a:schemeClr val="lt1"/>
-          </a:fontRef>
-        </p:style>
-        <p:txBody>
-          <a:bodyPr rtlCol="0" anchor="ctr" wrap="square" lIns="18288" rIns="18288" tIns="54864" bIns="54864"/>
-          <a:lstStyle/>
-          <a:p>
-            <a:pPr algn="ctr">
-              <a:spcAft>
-                <a:spcPts val="0"/>
-              </a:spcAft>
-            </a:pPr>
-            <a:r>
-              <a:rPr sz="1500" b="1" i="0">
-                <a:solidFill>
-                  <a:srgbClr val="FFFFFF"/>
-                </a:solidFill>
-              </a:rPr>
-              <a:t>3</a:t>
-            </a:r>
-          </a:p>
-        </p:txBody>
-      </p:sp>
-      <p:sp>
-        <p:nvSpPr>
-          <p:cNvPr id="16" name="TextBox 15"/>
-          <p:cNvSpPr txBox="1"/>
-          <p:nvPr/>
-        </p:nvSpPr>
-        <p:spPr>
-          <a:xfrm>
-            <a:off x="6325819" y="1682496"/>
-            <a:ext cx="416966" cy="228600"/>
-          </a:xfrm>
-          <a:prstGeom prst="rect">
-            <a:avLst/>
-          </a:prstGeom>
-          <a:noFill/>
-        </p:spPr>
-        <p:txBody>
-          <a:bodyPr wrap="square" lIns="0" rIns="0" anchor="t">
-            <a:spAutoFit/>
-          </a:bodyPr>
-          <a:lstStyle/>
-          <a:p>
-            <a:pPr algn="ctr">
-              <a:spcAft>
-                <a:spcPts val="200"/>
-              </a:spcAft>
-            </a:pPr>
-            <a:r>
-              <a:rPr sz="1000" b="0" i="0">
-                <a:solidFill>
-                  <a:srgbClr val="595959"/>
-                </a:solidFill>
-              </a:rPr>
-              <a:t>14</a:t>
-            </a:r>
-          </a:p>
-        </p:txBody>
-      </p:sp>
-      <p:sp>
-        <p:nvSpPr>
-          <p:cNvPr id="17" name="Régimen 2015–2020"/>
-          <p:cNvSpPr/>
-          <p:nvPr/>
-        </p:nvSpPr>
-        <p:spPr>
-          <a:xfrm>
-            <a:off x="6770217" y="1207008"/>
-            <a:ext cx="2638958" cy="457200"/>
-          </a:xfrm>
-          <a:prstGeom prst="rect">
-            <a:avLst/>
-          </a:prstGeom>
-          <a:solidFill>
-            <a:srgbClr val="C0392B"/>
-          </a:solidFill>
-          <a:ln>
-            <a:noFill/>
-          </a:ln>
-          <a:effectLst/>
-        </p:spPr>
-        <p:style>
-          <a:lnRef idx="1">
-            <a:schemeClr val="accent1"/>
-          </a:lnRef>
-          <a:fillRef idx="3">
-            <a:schemeClr val="accent1"/>
-          </a:fillRef>
-          <a:effectRef idx="2">
-            <a:schemeClr val="accent1"/>
-          </a:effectRef>
-          <a:fontRef idx="minor">
-            <a:schemeClr val="lt1"/>
-          </a:fontRef>
-        </p:style>
-        <p:txBody>
-          <a:bodyPr rtlCol="0" anchor="ctr" wrap="square" lIns="18288" rIns="18288" tIns="54864" bIns="54864"/>
-          <a:lstStyle/>
-          <a:p>
-            <a:pPr algn="ctr">
-              <a:spcAft>
-                <a:spcPts val="0"/>
-              </a:spcAft>
-            </a:pPr>
-            <a:r>
-              <a:rPr sz="1500" b="1" i="0">
-                <a:solidFill>
-                  <a:srgbClr val="FFFFFF"/>
-                </a:solidFill>
-              </a:rPr>
-              <a:t>2</a:t>
-            </a:r>
-          </a:p>
-        </p:txBody>
-      </p:sp>
-      <p:sp>
-        <p:nvSpPr>
-          <p:cNvPr id="18" name="TextBox 17"/>
-          <p:cNvSpPr txBox="1"/>
-          <p:nvPr/>
-        </p:nvSpPr>
-        <p:spPr>
-          <a:xfrm>
-            <a:off x="6770217" y="1682496"/>
-            <a:ext cx="2638958" cy="228600"/>
-          </a:xfrm>
-          <a:prstGeom prst="rect">
-            <a:avLst/>
-          </a:prstGeom>
-          <a:noFill/>
-        </p:spPr>
-        <p:txBody>
-          <a:bodyPr wrap="square" lIns="0" rIns="0" anchor="t">
-            <a:spAutoFit/>
-          </a:bodyPr>
-          <a:lstStyle/>
-          <a:p>
-            <a:pPr algn="ctr">
-              <a:spcAft>
-                <a:spcPts val="200"/>
-              </a:spcAft>
-            </a:pPr>
-            <a:r>
-              <a:rPr sz="1000" b="0" i="0">
-                <a:solidFill>
-                  <a:srgbClr val="595959"/>
-                </a:solidFill>
-              </a:rPr>
-              <a:t>2015–2020</a:t>
-            </a:r>
-          </a:p>
-        </p:txBody>
-      </p:sp>
-      <p:sp>
-        <p:nvSpPr>
-          <p:cNvPr id="19" name="Régimen 21–22"/>
-          <p:cNvSpPr/>
-          <p:nvPr/>
-        </p:nvSpPr>
-        <p:spPr>
-          <a:xfrm>
-            <a:off x="9436608" y="1207008"/>
-            <a:ext cx="861364" cy="457200"/>
-          </a:xfrm>
-          <a:prstGeom prst="rect">
-            <a:avLst/>
-          </a:prstGeom>
-          <a:solidFill>
-            <a:srgbClr val="3B7D3A"/>
-          </a:solidFill>
-          <a:ln>
-            <a:noFill/>
-          </a:ln>
-          <a:effectLst/>
-        </p:spPr>
-        <p:style>
-          <a:lnRef idx="1">
-            <a:schemeClr val="accent1"/>
-          </a:lnRef>
-          <a:fillRef idx="3">
-            <a:schemeClr val="accent1"/>
-          </a:fillRef>
-          <a:effectRef idx="2">
-            <a:schemeClr val="accent1"/>
-          </a:effectRef>
-          <a:fontRef idx="minor">
-            <a:schemeClr val="lt1"/>
-          </a:fontRef>
-        </p:style>
-        <p:txBody>
-          <a:bodyPr rtlCol="0" anchor="ctr" wrap="square" lIns="18288" rIns="18288" tIns="54864" bIns="54864"/>
-          <a:lstStyle/>
-          <a:p>
-            <a:pPr algn="ctr">
-              <a:spcAft>
-                <a:spcPts val="0"/>
-              </a:spcAft>
-            </a:pPr>
-            <a:r>
-              <a:rPr sz="1500" b="1" i="0">
-                <a:solidFill>
-                  <a:srgbClr val="FFFFFF"/>
-                </a:solidFill>
-              </a:rPr>
-              <a:t>5</a:t>
-            </a:r>
-          </a:p>
-        </p:txBody>
-      </p:sp>
-      <p:sp>
-        <p:nvSpPr>
-          <p:cNvPr id="20" name="TextBox 19"/>
-          <p:cNvSpPr txBox="1"/>
-          <p:nvPr/>
-        </p:nvSpPr>
-        <p:spPr>
-          <a:xfrm>
-            <a:off x="9436608" y="1682496"/>
-            <a:ext cx="861364" cy="228600"/>
-          </a:xfrm>
-          <a:prstGeom prst="rect">
-            <a:avLst/>
-          </a:prstGeom>
-          <a:noFill/>
-        </p:spPr>
-        <p:txBody>
-          <a:bodyPr wrap="square" lIns="0" rIns="0" anchor="t">
-            <a:spAutoFit/>
-          </a:bodyPr>
-          <a:lstStyle/>
-          <a:p>
-            <a:pPr algn="ctr">
-              <a:spcAft>
-                <a:spcPts val="200"/>
-              </a:spcAft>
-            </a:pPr>
-            <a:r>
-              <a:rPr sz="1000" b="0" i="0">
-                <a:solidFill>
-                  <a:srgbClr val="595959"/>
-                </a:solidFill>
-              </a:rPr>
-              <a:t>21–22</a:t>
-            </a:r>
-          </a:p>
-        </p:txBody>
-      </p:sp>
-      <p:sp>
-        <p:nvSpPr>
-          <p:cNvPr id="21" name="Régimen 23"/>
-          <p:cNvSpPr/>
-          <p:nvPr/>
-        </p:nvSpPr>
-        <p:spPr>
-          <a:xfrm>
-            <a:off x="10325404" y="1207008"/>
-            <a:ext cx="416966" cy="457200"/>
-          </a:xfrm>
-          <a:prstGeom prst="rect">
-            <a:avLst/>
-          </a:prstGeom>
-          <a:solidFill>
-            <a:srgbClr val="C0392B"/>
-          </a:solidFill>
-          <a:ln>
-            <a:noFill/>
-          </a:ln>
-          <a:effectLst/>
-        </p:spPr>
-        <p:style>
-          <a:lnRef idx="1">
-            <a:schemeClr val="accent1"/>
-          </a:lnRef>
-          <a:fillRef idx="3">
-            <a:schemeClr val="accent1"/>
-          </a:fillRef>
-          <a:effectRef idx="2">
-            <a:schemeClr val="accent1"/>
-          </a:effectRef>
-          <a:fontRef idx="minor">
-            <a:schemeClr val="lt1"/>
-          </a:fontRef>
-        </p:style>
-        <p:txBody>
-          <a:bodyPr rtlCol="0" anchor="ctr" wrap="square" lIns="18288" rIns="18288" tIns="54864" bIns="54864"/>
-          <a:lstStyle/>
-          <a:p>
-            <a:pPr algn="ctr">
-              <a:spcAft>
-                <a:spcPts val="0"/>
-              </a:spcAft>
-            </a:pPr>
-            <a:r>
-              <a:rPr sz="1500" b="1" i="0">
-                <a:solidFill>
-                  <a:srgbClr val="FFFFFF"/>
-                </a:solidFill>
-              </a:rPr>
-              <a:t>2</a:t>
-            </a:r>
-          </a:p>
-        </p:txBody>
-      </p:sp>
-      <p:sp>
-        <p:nvSpPr>
-          <p:cNvPr id="22" name="TextBox 21"/>
-          <p:cNvSpPr txBox="1"/>
-          <p:nvPr/>
-        </p:nvSpPr>
-        <p:spPr>
-          <a:xfrm>
-            <a:off x="10325404" y="1682496"/>
-            <a:ext cx="416966" cy="228600"/>
-          </a:xfrm>
-          <a:prstGeom prst="rect">
-            <a:avLst/>
-          </a:prstGeom>
-          <a:noFill/>
-        </p:spPr>
-        <p:txBody>
-          <a:bodyPr wrap="square" lIns="0" rIns="0" anchor="t">
-            <a:spAutoFit/>
-          </a:bodyPr>
-          <a:lstStyle/>
-          <a:p>
-            <a:pPr algn="ctr">
-              <a:spcAft>
-                <a:spcPts val="200"/>
-              </a:spcAft>
-            </a:pPr>
-            <a:r>
-              <a:rPr sz="1000" b="0" i="0">
-                <a:solidFill>
-                  <a:srgbClr val="595959"/>
-                </a:solidFill>
-              </a:rPr>
-              <a:t>23</a:t>
-            </a:r>
-          </a:p>
-        </p:txBody>
-      </p:sp>
-      <p:sp>
-        <p:nvSpPr>
-          <p:cNvPr id="23" name="Régimen 24–25"/>
-          <p:cNvSpPr/>
-          <p:nvPr/>
-        </p:nvSpPr>
-        <p:spPr>
-          <a:xfrm>
-            <a:off x="10769803" y="1207008"/>
-            <a:ext cx="861364" cy="457200"/>
-          </a:xfrm>
-          <a:prstGeom prst="rect">
-            <a:avLst/>
-          </a:prstGeom>
-          <a:solidFill>
-            <a:srgbClr val="E09B2D"/>
-          </a:solidFill>
-          <a:ln>
-            <a:noFill/>
-          </a:ln>
-          <a:effectLst/>
-        </p:spPr>
-        <p:style>
-          <a:lnRef idx="1">
-            <a:schemeClr val="accent1"/>
-          </a:lnRef>
-          <a:fillRef idx="3">
-            <a:schemeClr val="accent1"/>
-          </a:fillRef>
-          <a:effectRef idx="2">
-            <a:schemeClr val="accent1"/>
-          </a:effectRef>
-          <a:fontRef idx="minor">
-            <a:schemeClr val="lt1"/>
-          </a:fontRef>
-        </p:style>
-        <p:txBody>
-          <a:bodyPr rtlCol="0" anchor="ctr" wrap="square" lIns="18288" rIns="18288" tIns="54864" bIns="54864"/>
-          <a:lstStyle/>
-          <a:p>
-            <a:pPr algn="ctr">
-              <a:spcAft>
-                <a:spcPts val="0"/>
-              </a:spcAft>
-            </a:pPr>
-            <a:r>
-              <a:rPr sz="1500" b="1" i="0">
-                <a:solidFill>
-                  <a:srgbClr val="FFFFFF"/>
-                </a:solidFill>
-              </a:rPr>
-              <a:t>3</a:t>
-            </a:r>
-          </a:p>
-        </p:txBody>
-      </p:sp>
-      <p:sp>
-        <p:nvSpPr>
-          <p:cNvPr id="24" name="TextBox 23"/>
-          <p:cNvSpPr txBox="1"/>
-          <p:nvPr/>
-        </p:nvSpPr>
-        <p:spPr>
-          <a:xfrm>
-            <a:off x="10769803" y="1682496"/>
-            <a:ext cx="861364" cy="228600"/>
-          </a:xfrm>
-          <a:prstGeom prst="rect">
-            <a:avLst/>
-          </a:prstGeom>
-          <a:noFill/>
-        </p:spPr>
-        <p:txBody>
-          <a:bodyPr wrap="square" lIns="0" rIns="0" anchor="t">
-            <a:spAutoFit/>
-          </a:bodyPr>
-          <a:lstStyle/>
-          <a:p>
-            <a:pPr algn="ctr">
-              <a:spcAft>
-                <a:spcPts val="200"/>
-              </a:spcAft>
-            </a:pPr>
-            <a:r>
-              <a:rPr sz="1000" b="0" i="0">
-                <a:solidFill>
-                  <a:srgbClr val="595959"/>
-                </a:solidFill>
-              </a:rPr>
-              <a:t>24–25</a:t>
-            </a:r>
-          </a:p>
-        </p:txBody>
-      </p:sp>
-      <p:sp>
-        <p:nvSpPr>
-          <p:cNvPr id="25" name="TextBox 24"/>
-          <p:cNvSpPr txBox="1"/>
-          <p:nvPr/>
-        </p:nvSpPr>
-        <p:spPr>
-          <a:xfrm>
-            <a:off x="548640" y="1938528"/>
-            <a:ext cx="11109960" cy="274320"/>
-          </a:xfrm>
-          <a:prstGeom prst="rect">
-            <a:avLst/>
-          </a:prstGeom>
-          <a:noFill/>
-        </p:spPr>
-        <p:txBody>
-          <a:bodyPr wrap="square" lIns="0" rIns="0" anchor="t">
-            <a:spAutoFit/>
-          </a:bodyPr>
-          <a:lstStyle/>
-          <a:p>
-            <a:pPr algn="ctr">
-              <a:spcAft>
-                <a:spcPts val="200"/>
-              </a:spcAft>
-            </a:pPr>
-            <a:r>
-              <a:rPr sz="1200" b="1" i="0">
-                <a:solidFill>
-                  <a:srgbClr val="242852"/>
-                </a:solidFill>
-              </a:rPr>
-              <a:t>7 cambios en 25 convocatorias, todos en la resolución anual y aplicados a trabajos ya publicados</a:t>
-            </a:r>
-          </a:p>
-        </p:txBody>
-      </p:sp>
-      <p:sp>
-        <p:nvSpPr>
-          <p:cNvPr id="26" name="TextBox 25"/>
-          <p:cNvSpPr txBox="1"/>
-          <p:nvPr/>
-        </p:nvSpPr>
-        <p:spPr>
-          <a:xfrm>
-            <a:off x="548640" y="2377440"/>
-            <a:ext cx="3246120" cy="274320"/>
-          </a:xfrm>
-          <a:prstGeom prst="rect">
-            <a:avLst/>
-          </a:prstGeom>
-          <a:noFill/>
-        </p:spPr>
-        <p:txBody>
-          <a:bodyPr wrap="square" lIns="0" rIns="0" anchor="t">
-            <a:spAutoFit/>
-          </a:bodyPr>
-          <a:lstStyle/>
-          <a:p>
-            <a:pPr algn="l">
-              <a:spcAft>
-                <a:spcPts val="200"/>
-              </a:spcAft>
-            </a:pPr>
-            <a:r>
-              <a:rPr sz="1200" b="1" i="1">
-                <a:solidFill>
-                  <a:srgbClr val="595959"/>
-                </a:solidFill>
-              </a:rPr>
-              <a:t>Qué regula</a:t>
-            </a:r>
-          </a:p>
-        </p:txBody>
-      </p:sp>
-      <p:sp>
-        <p:nvSpPr>
-          <p:cNvPr id="27" name="TextBox 26"/>
-          <p:cNvSpPr txBox="1"/>
-          <p:nvPr/>
-        </p:nvSpPr>
-        <p:spPr>
-          <a:xfrm>
-            <a:off x="3977639" y="2377440"/>
-            <a:ext cx="1737360" cy="274320"/>
-          </a:xfrm>
-          <a:prstGeom prst="rect">
-            <a:avLst/>
-          </a:prstGeom>
-          <a:noFill/>
-        </p:spPr>
-        <p:txBody>
-          <a:bodyPr wrap="square" lIns="0" rIns="0" anchor="t">
-            <a:spAutoFit/>
-          </a:bodyPr>
-          <a:lstStyle/>
-          <a:p>
-            <a:pPr algn="l">
-              <a:spcAft>
-                <a:spcPts val="200"/>
-              </a:spcAft>
-            </a:pPr>
-            <a:r>
-              <a:rPr sz="1200" b="1" i="1">
-                <a:solidFill>
-                  <a:srgbClr val="595959"/>
-                </a:solidFill>
-              </a:rPr>
-              <a:t>Quién decide</a:t>
-            </a:r>
-          </a:p>
-        </p:txBody>
-      </p:sp>
-      <p:sp>
-        <p:nvSpPr>
-          <p:cNvPr id="28" name="TextBox 27"/>
-          <p:cNvSpPr txBox="1"/>
-          <p:nvPr/>
-        </p:nvSpPr>
-        <p:spPr>
-          <a:xfrm>
-            <a:off x="5897880" y="2377440"/>
-            <a:ext cx="3977639" cy="274320"/>
-          </a:xfrm>
-          <a:prstGeom prst="rect">
-            <a:avLst/>
-          </a:prstGeom>
-          <a:noFill/>
-        </p:spPr>
-        <p:txBody>
-          <a:bodyPr wrap="square" lIns="0" rIns="0" anchor="t">
-            <a:spAutoFit/>
-          </a:bodyPr>
-          <a:lstStyle/>
-          <a:p>
-            <a:pPr algn="l">
-              <a:spcAft>
-                <a:spcPts val="200"/>
-              </a:spcAft>
-            </a:pPr>
-            <a:r>
-              <a:rPr sz="1200" b="1" i="1">
-                <a:solidFill>
-                  <a:srgbClr val="595959"/>
-                </a:solidFill>
-              </a:rPr>
-              <a:t>Qué pedimos</a:t>
-            </a:r>
-          </a:p>
-        </p:txBody>
-      </p:sp>
-      <p:sp>
-        <p:nvSpPr>
-          <p:cNvPr id="29" name="TextBox 28"/>
-          <p:cNvSpPr txBox="1"/>
-          <p:nvPr/>
-        </p:nvSpPr>
-        <p:spPr>
-          <a:xfrm>
-            <a:off x="10058400" y="2377440"/>
-            <a:ext cx="1600200" cy="274320"/>
-          </a:xfrm>
-          <a:prstGeom prst="rect">
-            <a:avLst/>
-          </a:prstGeom>
-          <a:noFill/>
-        </p:spPr>
-        <p:txBody>
-          <a:bodyPr wrap="square" lIns="0" rIns="0" anchor="t">
-            <a:spAutoFit/>
-          </a:bodyPr>
-          <a:lstStyle/>
-          <a:p>
-            <a:pPr algn="l">
-              <a:spcAft>
-                <a:spcPts val="200"/>
-              </a:spcAft>
-            </a:pPr>
-            <a:r>
-              <a:rPr sz="1200" b="1" i="1">
-                <a:solidFill>
-                  <a:srgbClr val="595959"/>
-                </a:solidFill>
-              </a:rPr>
-              <a:t>Cuándo</a:t>
-            </a:r>
-          </a:p>
-        </p:txBody>
-      </p:sp>
-      <p:sp>
-        <p:nvSpPr>
-          <p:cNvPr id="30" name="Norma Orden de 1994, art. 7"/>
-          <p:cNvSpPr/>
-          <p:nvPr/>
-        </p:nvSpPr>
-        <p:spPr>
-          <a:xfrm>
-            <a:off x="548640" y="2743200"/>
-            <a:ext cx="3246120" cy="960120"/>
-          </a:xfrm>
-          <a:prstGeom prst="roundRect">
-            <a:avLst>
-              <a:gd name="adj" fmla="val 8000"/>
-            </a:avLst>
-          </a:prstGeom>
-          <a:solidFill>
-            <a:srgbClr val="E3EEFA"/>
-          </a:solidFill>
-          <a:ln w="15875">
-            <a:solidFill>
-              <a:srgbClr val="297FD5"/>
-            </a:solidFill>
-          </a:ln>
-          <a:effectLst/>
-        </p:spPr>
-        <p:style>
-          <a:lnRef idx="1">
-            <a:schemeClr val="accent1"/>
-          </a:lnRef>
-          <a:fillRef idx="3">
-            <a:schemeClr val="accent1"/>
-          </a:fillRef>
-          <a:effectRef idx="2">
-            <a:schemeClr val="accent1"/>
-          </a:effectRef>
-          <a:fontRef idx="minor">
-            <a:schemeClr val="lt1"/>
-          </a:fontRef>
-        </p:style>
-        <p:txBody>
-          <a:bodyPr rtlCol="0" anchor="t" wrap="square" lIns="109728" rIns="109728" tIns="54864" bIns="54864"/>
-          <a:lstStyle/>
-          <a:p>
-            <a:pPr algn="l">
-              <a:spcAft>
-                <a:spcPts val="200"/>
-              </a:spcAft>
-            </a:pPr>
-            <a:r>
-              <a:rPr sz="1400" b="1" i="0">
-                <a:solidFill>
-                  <a:srgbClr val="242852"/>
-                </a:solidFill>
-              </a:rPr>
-              <a:t>Orden de 1994, art. 7</a:t>
-            </a:r>
-          </a:p>
-          <a:p>
-            <a:pPr algn="l">
-              <a:spcAft>
-                <a:spcPts val="200"/>
-              </a:spcAft>
-            </a:pPr>
-            <a:r>
-              <a:rPr sz="1200" b="0" i="1">
-                <a:solidFill>
-                  <a:srgbClr val="1F4E79"/>
-                </a:solidFill>
-              </a:rPr>
-              <a:t>La categoría: ordinaria o extraordinaria</a:t>
-            </a:r>
-          </a:p>
-        </p:txBody>
-      </p:sp>
-      <p:sp>
-        <p:nvSpPr>
-          <p:cNvPr id="31" name="Decide Ministerio"/>
-          <p:cNvSpPr/>
-          <p:nvPr/>
-        </p:nvSpPr>
-        <p:spPr>
-          <a:xfrm>
-            <a:off x="3977639" y="2926080"/>
-            <a:ext cx="1737360" cy="594360"/>
-          </a:xfrm>
-          <a:prstGeom prst="roundRect">
-            <a:avLst>
-              <a:gd name="adj" fmla="val 8000"/>
-            </a:avLst>
-          </a:prstGeom>
-          <a:solidFill>
-            <a:srgbClr val="242852"/>
-          </a:solidFill>
-          <a:ln>
-            <a:noFill/>
-          </a:ln>
-          <a:effectLst/>
-        </p:spPr>
-        <p:style>
-          <a:lnRef idx="1">
-            <a:schemeClr val="accent1"/>
-          </a:lnRef>
-          <a:fillRef idx="3">
-            <a:schemeClr val="accent1"/>
-          </a:fillRef>
-          <a:effectRef idx="2">
-            <a:schemeClr val="accent1"/>
-          </a:effectRef>
-          <a:fontRef idx="minor">
-            <a:schemeClr val="lt1"/>
-          </a:fontRef>
-        </p:style>
-        <p:txBody>
-          <a:bodyPr rtlCol="0" anchor="ctr" wrap="square" lIns="109728" rIns="109728" tIns="54864" bIns="54864"/>
-          <a:lstStyle/>
-          <a:p>
-            <a:pPr algn="ctr">
-              <a:spcAft>
-                <a:spcPts val="0"/>
-              </a:spcAft>
-            </a:pPr>
-            <a:r>
-              <a:rPr sz="1500" b="1" i="0">
-                <a:solidFill>
-                  <a:srgbClr val="FFFFFF"/>
-                </a:solidFill>
-              </a:rPr>
-              <a:t>Ministerio</a:t>
-            </a:r>
-          </a:p>
-        </p:txBody>
-      </p:sp>
-      <p:sp>
-        <p:nvSpPr>
-          <p:cNvPr id="32" name="Pedimos Ministerio"/>
-          <p:cNvSpPr/>
-          <p:nvPr/>
-        </p:nvSpPr>
-        <p:spPr>
-          <a:xfrm>
-            <a:off x="5897880" y="2743200"/>
-            <a:ext cx="3977639" cy="960120"/>
-          </a:xfrm>
-          <a:prstGeom prst="roundRect">
-            <a:avLst>
-              <a:gd name="adj" fmla="val 8000"/>
-            </a:avLst>
-          </a:prstGeom>
-          <a:solidFill>
-            <a:srgbClr val="E6F2DF"/>
-          </a:solidFill>
-          <a:ln w="15875">
-            <a:solidFill>
-              <a:srgbClr val="3B7D3A"/>
-            </a:solidFill>
-          </a:ln>
-          <a:effectLst/>
-        </p:spPr>
-        <p:style>
-          <a:lnRef idx="1">
-            <a:schemeClr val="accent1"/>
-          </a:lnRef>
-          <a:fillRef idx="3">
-            <a:schemeClr val="accent1"/>
-          </a:fillRef>
-          <a:effectRef idx="2">
-            <a:schemeClr val="accent1"/>
-          </a:effectRef>
-          <a:fontRef idx="minor">
-            <a:schemeClr val="lt1"/>
-          </a:fontRef>
-        </p:style>
-        <p:txBody>
-          <a:bodyPr rtlCol="0" anchor="t" wrap="square" lIns="109728" rIns="109728" tIns="54864" bIns="54864"/>
-          <a:lstStyle/>
-          <a:p>
-            <a:pPr algn="l">
-              <a:spcAft>
-                <a:spcPts val="200"/>
-              </a:spcAft>
-            </a:pPr>
-            <a:r>
-              <a:rPr sz="1200" b="0" i="0">
-                <a:solidFill>
-                  <a:srgbClr val="262626"/>
-                </a:solidFill>
-              </a:rPr>
-              <a:t>C1 · R3: los artículos completos en congresos de prestigio, ordinarios (todas las disciplinas)</a:t>
-            </a:r>
-          </a:p>
-          <a:p>
-            <a:pPr algn="l">
-              <a:spcAft>
-                <a:spcPts val="200"/>
-              </a:spcAft>
-            </a:pPr>
-            <a:r>
-              <a:rPr sz="1100" b="1" i="1">
-                <a:solidFill>
-                  <a:srgbClr val="3B7D3A"/>
-                </a:solidFill>
-              </a:rPr>
-              <a:t>Irreversible, pero más lento</a:t>
-            </a:r>
-          </a:p>
-        </p:txBody>
-      </p:sp>
-      <p:sp>
-        <p:nvSpPr>
-          <p:cNvPr id="33" name="TextBox 32"/>
-          <p:cNvSpPr txBox="1"/>
-          <p:nvPr/>
-        </p:nvSpPr>
-        <p:spPr>
-          <a:xfrm>
-            <a:off x="10058400" y="2743200"/>
-            <a:ext cx="1600200" cy="960120"/>
-          </a:xfrm>
-          <a:prstGeom prst="rect">
-            <a:avLst/>
-          </a:prstGeom>
-          <a:noFill/>
-        </p:spPr>
-        <p:txBody>
-          <a:bodyPr wrap="square" lIns="0" rIns="0" anchor="ctr">
-            <a:spAutoFit/>
-          </a:bodyPr>
-          <a:lstStyle/>
-          <a:p>
-            <a:pPr algn="l">
-              <a:spcAft>
-                <a:spcPts val="200"/>
-              </a:spcAft>
-            </a:pPr>
-            <a:r>
-              <a:rPr sz="1200" b="1" i="0">
-                <a:solidFill>
-                  <a:srgbClr val="242852"/>
-                </a:solidFill>
-              </a:rPr>
-              <a:t>Fases 2–3</a:t>
-            </a:r>
-          </a:p>
-          <a:p>
-            <a:pPr algn="l">
-              <a:spcAft>
-                <a:spcPts val="200"/>
-              </a:spcAft>
-            </a:pPr>
-            <a:r>
-              <a:rPr sz="1100" b="0" i="0">
-                <a:solidFill>
-                  <a:srgbClr val="595959"/>
-                </a:solidFill>
-              </a:rPr>
-              <a:t>1–5 años</a:t>
-            </a:r>
-          </a:p>
-        </p:txBody>
-      </p:sp>
-      <p:cxnSp>
-        <p:nvCxnSpPr>
-          <p:cNvPr id="34" name="Connector 33"/>
-          <p:cNvCxnSpPr/>
-          <p:nvPr/>
-        </p:nvCxnSpPr>
-        <p:spPr>
-          <a:xfrm>
-            <a:off x="3794760" y="3223260"/>
-            <a:ext cx="182879" cy="0"/>
-          </a:xfrm>
-          <a:prstGeom prst="line">
-            <a:avLst/>
-          </a:prstGeom>
-          <a:ln w="22225">
-            <a:solidFill>
-              <a:srgbClr val="595959"/>
-            </a:solidFill>
-            <a:tailEnd type="triangle" w="med" len="med"/>
-          </a:ln>
-        </p:spPr>
-        <p:style>
-          <a:lnRef idx="2">
-            <a:schemeClr val="accent1"/>
-          </a:lnRef>
-          <a:fillRef idx="0">
-            <a:schemeClr val="accent1"/>
-          </a:fillRef>
-          <a:effectRef idx="1">
-            <a:schemeClr val="accent1"/>
-          </a:effectRef>
-          <a:fontRef idx="minor">
-            <a:schemeClr val="tx1"/>
-          </a:fontRef>
-        </p:style>
-      </p:cxnSp>
-      <p:cxnSp>
-        <p:nvCxnSpPr>
-          <p:cNvPr id="35" name="Connector 34"/>
-          <p:cNvCxnSpPr/>
-          <p:nvPr/>
-        </p:nvCxnSpPr>
-        <p:spPr>
-          <a:xfrm>
-            <a:off x="5715000" y="3223260"/>
-            <a:ext cx="182880" cy="0"/>
-          </a:xfrm>
-          <a:prstGeom prst="line">
-            <a:avLst/>
-          </a:prstGeom>
-          <a:ln w="22225">
-            <a:solidFill>
-              <a:srgbClr val="595959"/>
-            </a:solidFill>
-            <a:tailEnd type="triangle" w="med" len="med"/>
-          </a:ln>
-        </p:spPr>
-        <p:style>
-          <a:lnRef idx="2">
-            <a:schemeClr val="accent1"/>
-          </a:lnRef>
-          <a:fillRef idx="0">
-            <a:schemeClr val="accent1"/>
-          </a:fillRef>
-          <a:effectRef idx="1">
-            <a:schemeClr val="accent1"/>
-          </a:effectRef>
-          <a:fontRef idx="minor">
-            <a:schemeClr val="tx1"/>
-          </a:fontRef>
-        </p:style>
-      </p:cxnSp>
-      <p:sp>
-        <p:nvSpPr>
-          <p:cNvPr id="36" name="Norma Criterios CNEAI (6.2)"/>
-          <p:cNvSpPr/>
-          <p:nvPr/>
-        </p:nvSpPr>
-        <p:spPr>
-          <a:xfrm>
-            <a:off x="548640" y="3858768"/>
-            <a:ext cx="3246120" cy="960120"/>
-          </a:xfrm>
-          <a:prstGeom prst="roundRect">
-            <a:avLst>
-              <a:gd name="adj" fmla="val 8000"/>
-            </a:avLst>
-          </a:prstGeom>
-          <a:solidFill>
-            <a:srgbClr val="E3EEFA"/>
-          </a:solidFill>
-          <a:ln w="15875">
-            <a:solidFill>
-              <a:srgbClr val="297FD5"/>
-            </a:solidFill>
-          </a:ln>
-          <a:effectLst/>
-        </p:spPr>
-        <p:style>
-          <a:lnRef idx="1">
-            <a:schemeClr val="accent1"/>
-          </a:lnRef>
-          <a:fillRef idx="3">
-            <a:schemeClr val="accent1"/>
-          </a:fillRef>
-          <a:effectRef idx="2">
-            <a:schemeClr val="accent1"/>
-          </a:effectRef>
-          <a:fontRef idx="minor">
-            <a:schemeClr val="lt1"/>
-          </a:fontRef>
-        </p:style>
-        <p:txBody>
-          <a:bodyPr rtlCol="0" anchor="t" wrap="square" lIns="109728" rIns="109728" tIns="54864" bIns="54864"/>
-          <a:lstStyle/>
-          <a:p>
-            <a:pPr algn="l">
-              <a:spcAft>
-                <a:spcPts val="200"/>
-              </a:spcAft>
-            </a:pPr>
-            <a:r>
-              <a:rPr sz="1400" b="1" i="0">
-                <a:solidFill>
-                  <a:srgbClr val="242852"/>
-                </a:solidFill>
-              </a:rPr>
-              <a:t>Criterios CNEAI (6.2)</a:t>
-            </a:r>
-          </a:p>
-          <a:p>
-            <a:pPr algn="l">
-              <a:spcAft>
-                <a:spcPts val="200"/>
-              </a:spcAft>
-            </a:pPr>
-            <a:r>
-              <a:rPr sz="1200" b="0" i="1">
-                <a:solidFill>
-                  <a:srgbClr val="1F4E79"/>
-                </a:solidFill>
-              </a:rPr>
-              <a:t>El peso, el cupo y la estabilidad</a:t>
-            </a:r>
-          </a:p>
-        </p:txBody>
-      </p:sp>
-      <p:sp>
-        <p:nvSpPr>
-          <p:cNvPr id="37" name="Decide CNEAI"/>
-          <p:cNvSpPr/>
-          <p:nvPr/>
-        </p:nvSpPr>
-        <p:spPr>
-          <a:xfrm>
-            <a:off x="3977639" y="4041648"/>
-            <a:ext cx="1737360" cy="594360"/>
-          </a:xfrm>
-          <a:prstGeom prst="roundRect">
-            <a:avLst>
-              <a:gd name="adj" fmla="val 8000"/>
-            </a:avLst>
-          </a:prstGeom>
-          <a:solidFill>
-            <a:srgbClr val="242852"/>
-          </a:solidFill>
-          <a:ln>
-            <a:noFill/>
-          </a:ln>
-          <a:effectLst/>
-        </p:spPr>
-        <p:style>
-          <a:lnRef idx="1">
-            <a:schemeClr val="accent1"/>
-          </a:lnRef>
-          <a:fillRef idx="3">
-            <a:schemeClr val="accent1"/>
-          </a:fillRef>
-          <a:effectRef idx="2">
-            <a:schemeClr val="accent1"/>
-          </a:effectRef>
-          <a:fontRef idx="minor">
-            <a:schemeClr val="lt1"/>
-          </a:fontRef>
-        </p:style>
-        <p:txBody>
-          <a:bodyPr rtlCol="0" anchor="ctr" wrap="square" lIns="109728" rIns="109728" tIns="54864" bIns="54864"/>
-          <a:lstStyle/>
-          <a:p>
-            <a:pPr algn="ctr">
-              <a:spcAft>
-                <a:spcPts val="0"/>
-              </a:spcAft>
-            </a:pPr>
-            <a:r>
-              <a:rPr sz="1500" b="1" i="0">
-                <a:solidFill>
-                  <a:srgbClr val="FFFFFF"/>
-                </a:solidFill>
-              </a:rPr>
-              <a:t>CNEAI</a:t>
-            </a:r>
-          </a:p>
-        </p:txBody>
-      </p:sp>
-      <p:sp>
-        <p:nvSpPr>
-          <p:cNvPr id="38" name="Pedimos CNEAI"/>
-          <p:cNvSpPr/>
-          <p:nvPr/>
-        </p:nvSpPr>
-        <p:spPr>
-          <a:xfrm>
-            <a:off x="5897880" y="3858768"/>
-            <a:ext cx="3977639" cy="960120"/>
-          </a:xfrm>
-          <a:prstGeom prst="roundRect">
-            <a:avLst>
-              <a:gd name="adj" fmla="val 8000"/>
-            </a:avLst>
-          </a:prstGeom>
-          <a:solidFill>
-            <a:srgbClr val="E6F2DF"/>
-          </a:solidFill>
-          <a:ln w="15875">
-            <a:solidFill>
-              <a:srgbClr val="3B7D3A"/>
-            </a:solidFill>
-          </a:ln>
-          <a:effectLst/>
-        </p:spPr>
-        <p:style>
-          <a:lnRef idx="1">
-            <a:schemeClr val="accent1"/>
-          </a:lnRef>
-          <a:fillRef idx="3">
-            <a:schemeClr val="accent1"/>
-          </a:fillRef>
-          <a:effectRef idx="2">
-            <a:schemeClr val="accent1"/>
-          </a:effectRef>
-          <a:fontRef idx="minor">
-            <a:schemeClr val="lt1"/>
-          </a:fontRef>
-        </p:style>
-        <p:txBody>
-          <a:bodyPr rtlCol="0" anchor="t" wrap="square" lIns="109728" rIns="109728" tIns="54864" bIns="54864"/>
-          <a:lstStyle/>
-          <a:p>
-            <a:pPr algn="l">
-              <a:spcAft>
-                <a:spcPts val="200"/>
-              </a:spcAft>
-            </a:pPr>
-            <a:r>
-              <a:rPr sz="1200" b="0" i="0">
-                <a:solidFill>
-                  <a:srgbClr val="262626"/>
-                </a:solidFill>
-              </a:rPr>
-              <a:t>C2 · R1 + R2: A*/A como revistas, cupo de 3 a 5, criterio bienal y transitorio</a:t>
-            </a:r>
-          </a:p>
-          <a:p>
-            <a:pPr algn="l">
-              <a:spcAft>
-                <a:spcPts val="200"/>
-              </a:spcAft>
-            </a:pPr>
-            <a:r>
-              <a:rPr sz="1100" b="1" i="1">
-                <a:solidFill>
-                  <a:srgbClr val="3B7D3A"/>
-                </a:solidFill>
-              </a:rPr>
-              <a:t>Inmediato, pero reversible</a:t>
-            </a:r>
-          </a:p>
-        </p:txBody>
-      </p:sp>
-      <p:sp>
-        <p:nvSpPr>
-          <p:cNvPr id="39" name="TextBox 38"/>
-          <p:cNvSpPr txBox="1"/>
-          <p:nvPr/>
-        </p:nvSpPr>
-        <p:spPr>
-          <a:xfrm>
-            <a:off x="10058400" y="3858768"/>
-            <a:ext cx="1600200" cy="960120"/>
-          </a:xfrm>
-          <a:prstGeom prst="rect">
-            <a:avLst/>
-          </a:prstGeom>
-          <a:noFill/>
-        </p:spPr>
-        <p:txBody>
-          <a:bodyPr wrap="square" lIns="0" rIns="0" anchor="ctr">
-            <a:spAutoFit/>
-          </a:bodyPr>
-          <a:lstStyle/>
-          <a:p>
-            <a:pPr algn="l">
-              <a:spcAft>
-                <a:spcPts val="200"/>
-              </a:spcAft>
-            </a:pPr>
-            <a:r>
-              <a:rPr sz="1200" b="1" i="0">
-                <a:solidFill>
-                  <a:srgbClr val="242852"/>
-                </a:solidFill>
-              </a:rPr>
-              <a:t>Fase 1</a:t>
-            </a:r>
-          </a:p>
-          <a:p>
-            <a:pPr algn="l">
-              <a:spcAft>
-                <a:spcPts val="200"/>
-              </a:spcAft>
-            </a:pPr>
-            <a:r>
-              <a:rPr sz="1100" b="0" i="0">
-                <a:solidFill>
-                  <a:srgbClr val="595959"/>
-                </a:solidFill>
-              </a:rPr>
-              <a:t>convocatoria 2026</a:t>
-            </a:r>
-          </a:p>
-        </p:txBody>
-      </p:sp>
-      <p:cxnSp>
-        <p:nvCxnSpPr>
-          <p:cNvPr id="40" name="Connector 39"/>
-          <p:cNvCxnSpPr/>
-          <p:nvPr/>
-        </p:nvCxnSpPr>
-        <p:spPr>
-          <a:xfrm>
-            <a:off x="3794760" y="4338828"/>
-            <a:ext cx="182879" cy="0"/>
-          </a:xfrm>
-          <a:prstGeom prst="line">
-            <a:avLst/>
-          </a:prstGeom>
-          <a:ln w="22225">
-            <a:solidFill>
-              <a:srgbClr val="595959"/>
-            </a:solidFill>
-            <a:tailEnd type="triangle" w="med" len="med"/>
-          </a:ln>
-        </p:spPr>
-        <p:style>
-          <a:lnRef idx="2">
-            <a:schemeClr val="accent1"/>
-          </a:lnRef>
-          <a:fillRef idx="0">
-            <a:schemeClr val="accent1"/>
-          </a:fillRef>
-          <a:effectRef idx="1">
-            <a:schemeClr val="accent1"/>
-          </a:effectRef>
-          <a:fontRef idx="minor">
-            <a:schemeClr val="tx1"/>
-          </a:fontRef>
-        </p:style>
-      </p:cxnSp>
-      <p:cxnSp>
-        <p:nvCxnSpPr>
-          <p:cNvPr id="41" name="Connector 40"/>
-          <p:cNvCxnSpPr/>
-          <p:nvPr/>
-        </p:nvCxnSpPr>
-        <p:spPr>
-          <a:xfrm>
-            <a:off x="5715000" y="4338828"/>
-            <a:ext cx="182880" cy="0"/>
-          </a:xfrm>
-          <a:prstGeom prst="line">
-            <a:avLst/>
-          </a:prstGeom>
-          <a:ln w="22225">
-            <a:solidFill>
-              <a:srgbClr val="595959"/>
-            </a:solidFill>
-            <a:tailEnd type="triangle" w="med" len="med"/>
-          </a:ln>
-        </p:spPr>
-        <p:style>
-          <a:lnRef idx="2">
-            <a:schemeClr val="accent1"/>
-          </a:lnRef>
-          <a:fillRef idx="0">
-            <a:schemeClr val="accent1"/>
-          </a:fillRef>
-          <a:effectRef idx="1">
-            <a:schemeClr val="accent1"/>
-          </a:effectRef>
-          <a:fontRef idx="minor">
-            <a:schemeClr val="tx1"/>
-          </a:fontRef>
-        </p:style>
-      </p:cxnSp>
-      <p:sp>
-        <p:nvSpPr>
-          <p:cNvPr id="42" name="Norma Acreditación (RD 678/2023)"/>
-          <p:cNvSpPr/>
-          <p:nvPr/>
-        </p:nvSpPr>
-        <p:spPr>
-          <a:xfrm>
-            <a:off x="548640" y="4974336"/>
-            <a:ext cx="3246120" cy="960120"/>
-          </a:xfrm>
-          <a:prstGeom prst="roundRect">
-            <a:avLst>
-              <a:gd name="adj" fmla="val 8000"/>
-            </a:avLst>
-          </a:prstGeom>
-          <a:solidFill>
-            <a:srgbClr val="E3EEFA"/>
-          </a:solidFill>
-          <a:ln w="15875">
-            <a:solidFill>
-              <a:srgbClr val="297FD5"/>
-            </a:solidFill>
-          </a:ln>
-          <a:effectLst/>
-        </p:spPr>
-        <p:style>
-          <a:lnRef idx="1">
-            <a:schemeClr val="accent1"/>
-          </a:lnRef>
-          <a:fillRef idx="3">
-            <a:schemeClr val="accent1"/>
-          </a:fillRef>
-          <a:effectRef idx="2">
-            <a:schemeClr val="accent1"/>
-          </a:effectRef>
-          <a:fontRef idx="minor">
-            <a:schemeClr val="lt1"/>
-          </a:fontRef>
-        </p:style>
-        <p:txBody>
-          <a:bodyPr rtlCol="0" anchor="t" wrap="square" lIns="109728" rIns="109728" tIns="54864" bIns="54864"/>
-          <a:lstStyle/>
-          <a:p>
-            <a:pPr algn="l">
-              <a:spcAft>
-                <a:spcPts val="200"/>
-              </a:spcAft>
-            </a:pPr>
-            <a:r>
-              <a:rPr sz="1400" b="1" i="0">
-                <a:solidFill>
-                  <a:srgbClr val="242852"/>
-                </a:solidFill>
-              </a:rPr>
-              <a:t>Acreditación (RD 678/2023)</a:t>
-            </a:r>
-          </a:p>
-          <a:p>
-            <a:pPr algn="l">
-              <a:spcAft>
-                <a:spcPts val="200"/>
-              </a:spcAft>
-            </a:pPr>
-            <a:r>
-              <a:rPr sz="1200" b="0" i="1">
-                <a:solidFill>
-                  <a:srgbClr val="1F4E79"/>
-                </a:solidFill>
-              </a:rPr>
-              <a:t>No distingue ordinarias de extraordinarias</a:t>
-            </a:r>
-          </a:p>
-        </p:txBody>
-      </p:sp>
-      <p:sp>
-        <p:nvSpPr>
-          <p:cNvPr id="43" name="Decide ANECA"/>
-          <p:cNvSpPr/>
-          <p:nvPr/>
-        </p:nvSpPr>
-        <p:spPr>
-          <a:xfrm>
-            <a:off x="3977639" y="5157216"/>
-            <a:ext cx="1737360" cy="594360"/>
-          </a:xfrm>
-          <a:prstGeom prst="roundRect">
-            <a:avLst>
-              <a:gd name="adj" fmla="val 8000"/>
-            </a:avLst>
-          </a:prstGeom>
-          <a:solidFill>
-            <a:srgbClr val="242852"/>
-          </a:solidFill>
-          <a:ln>
-            <a:noFill/>
-          </a:ln>
-          <a:effectLst/>
-        </p:spPr>
-        <p:style>
-          <a:lnRef idx="1">
-            <a:schemeClr val="accent1"/>
-          </a:lnRef>
-          <a:fillRef idx="3">
-            <a:schemeClr val="accent1"/>
-          </a:fillRef>
-          <a:effectRef idx="2">
-            <a:schemeClr val="accent1"/>
-          </a:effectRef>
-          <a:fontRef idx="minor">
-            <a:schemeClr val="lt1"/>
-          </a:fontRef>
-        </p:style>
-        <p:txBody>
-          <a:bodyPr rtlCol="0" anchor="ctr" wrap="square" lIns="109728" rIns="109728" tIns="54864" bIns="54864"/>
-          <a:lstStyle/>
-          <a:p>
-            <a:pPr algn="ctr">
-              <a:spcAft>
-                <a:spcPts val="0"/>
-              </a:spcAft>
-            </a:pPr>
-            <a:r>
-              <a:rPr sz="1500" b="1" i="0">
-                <a:solidFill>
-                  <a:srgbClr val="FFFFFF"/>
-                </a:solidFill>
-              </a:rPr>
-              <a:t>ANECA</a:t>
-            </a:r>
-          </a:p>
-        </p:txBody>
-      </p:sp>
-      <p:sp>
-        <p:nvSpPr>
-          <p:cNvPr id="44" name="Pedimos ANECA"/>
-          <p:cNvSpPr/>
-          <p:nvPr/>
-        </p:nvSpPr>
-        <p:spPr>
-          <a:xfrm>
-            <a:off x="5897880" y="4974336"/>
-            <a:ext cx="3977639" cy="960120"/>
-          </a:xfrm>
-          <a:prstGeom prst="roundRect">
-            <a:avLst>
-              <a:gd name="adj" fmla="val 8000"/>
-            </a:avLst>
-          </a:prstGeom>
-          <a:solidFill>
-            <a:srgbClr val="E6F2DF"/>
-          </a:solidFill>
-          <a:ln w="15875">
-            <a:solidFill>
-              <a:srgbClr val="3B7D3A"/>
-            </a:solidFill>
-          </a:ln>
-          <a:effectLst/>
-        </p:spPr>
-        <p:style>
-          <a:lnRef idx="1">
-            <a:schemeClr val="accent1"/>
-          </a:lnRef>
-          <a:fillRef idx="3">
-            <a:schemeClr val="accent1"/>
-          </a:fillRef>
-          <a:effectRef idx="2">
-            <a:schemeClr val="accent1"/>
-          </a:effectRef>
-          <a:fontRef idx="minor">
-            <a:schemeClr val="lt1"/>
-          </a:fontRef>
-        </p:style>
-        <p:txBody>
-          <a:bodyPr rtlCol="0" anchor="t" wrap="square" lIns="109728" rIns="109728" tIns="54864" bIns="54864"/>
-          <a:lstStyle/>
-          <a:p>
-            <a:pPr algn="l">
-              <a:spcAft>
-                <a:spcPts val="200"/>
-              </a:spcAft>
-            </a:pPr>
-            <a:r>
-              <a:rPr sz="1200" b="0" i="0">
-                <a:solidFill>
-                  <a:srgbClr val="262626"/>
-                </a:solidFill>
-              </a:rPr>
-              <a:t>C3 · R4 + R6: aclaración general, gobernanza como mérito, coherencia</a:t>
-            </a:r>
-          </a:p>
-          <a:p>
-            <a:pPr algn="l">
-              <a:spcAft>
-                <a:spcPts val="200"/>
-              </a:spcAft>
-            </a:pPr>
-            <a:r>
-              <a:rPr sz="1100" b="1" i="1">
-                <a:solidFill>
-                  <a:srgbClr val="3B7D3A"/>
-                </a:solidFill>
-              </a:rPr>
-              <a:t>Sin cambiar ninguna norma</a:t>
-            </a:r>
-          </a:p>
-        </p:txBody>
-      </p:sp>
-      <p:sp>
-        <p:nvSpPr>
-          <p:cNvPr id="45" name="TextBox 44"/>
-          <p:cNvSpPr txBox="1"/>
-          <p:nvPr/>
-        </p:nvSpPr>
-        <p:spPr>
-          <a:xfrm>
-            <a:off x="10058400" y="4974336"/>
-            <a:ext cx="1600200" cy="960120"/>
-          </a:xfrm>
-          <a:prstGeom prst="rect">
-            <a:avLst/>
-          </a:prstGeom>
-          <a:noFill/>
-        </p:spPr>
-        <p:txBody>
-          <a:bodyPr wrap="square" lIns="0" rIns="0" anchor="ctr">
-            <a:spAutoFit/>
-          </a:bodyPr>
-          <a:lstStyle/>
-          <a:p>
-            <a:pPr algn="l">
-              <a:spcAft>
-                <a:spcPts val="200"/>
-              </a:spcAft>
-            </a:pPr>
-            <a:r>
-              <a:rPr sz="1200" b="1" i="0">
-                <a:solidFill>
-                  <a:srgbClr val="242852"/>
-                </a:solidFill>
-              </a:rPr>
-              <a:t>Fase 1</a:t>
-            </a:r>
-          </a:p>
-          <a:p>
-            <a:pPr algn="l">
-              <a:spcAft>
-                <a:spcPts val="200"/>
-              </a:spcAft>
-            </a:pPr>
-            <a:r>
-              <a:rPr sz="1100" b="0" i="0">
-                <a:solidFill>
-                  <a:srgbClr val="595959"/>
-                </a:solidFill>
-              </a:rPr>
-              <a:t>corto plazo</a:t>
-            </a:r>
-          </a:p>
-        </p:txBody>
-      </p:sp>
-      <p:cxnSp>
-        <p:nvCxnSpPr>
-          <p:cNvPr id="46" name="Connector 45"/>
-          <p:cNvCxnSpPr/>
-          <p:nvPr/>
-        </p:nvCxnSpPr>
-        <p:spPr>
-          <a:xfrm>
-            <a:off x="3794760" y="5454396"/>
-            <a:ext cx="182879" cy="0"/>
-          </a:xfrm>
-          <a:prstGeom prst="line">
-            <a:avLst/>
-          </a:prstGeom>
-          <a:ln w="22225">
-            <a:solidFill>
-              <a:srgbClr val="595959"/>
-            </a:solidFill>
-            <a:tailEnd type="triangle" w="med" len="med"/>
-          </a:ln>
-        </p:spPr>
-        <p:style>
-          <a:lnRef idx="2">
-            <a:schemeClr val="accent1"/>
-          </a:lnRef>
-          <a:fillRef idx="0">
-            <a:schemeClr val="accent1"/>
-          </a:fillRef>
-          <a:effectRef idx="1">
-            <a:schemeClr val="accent1"/>
-          </a:effectRef>
-          <a:fontRef idx="minor">
-            <a:schemeClr val="tx1"/>
-          </a:fontRef>
-        </p:style>
-      </p:cxnSp>
-      <p:cxnSp>
-        <p:nvCxnSpPr>
-          <p:cNvPr id="47" name="Connector 46"/>
-          <p:cNvCxnSpPr/>
-          <p:nvPr/>
-        </p:nvCxnSpPr>
-        <p:spPr>
-          <a:xfrm>
-            <a:off x="5715000" y="5454396"/>
-            <a:ext cx="182880" cy="0"/>
-          </a:xfrm>
-          <a:prstGeom prst="line">
-            <a:avLst/>
-          </a:prstGeom>
-          <a:ln w="22225">
-            <a:solidFill>
-              <a:srgbClr val="595959"/>
-            </a:solidFill>
-            <a:tailEnd type="triangle" w="med" len="med"/>
-          </a:ln>
-        </p:spPr>
-        <p:style>
-          <a:lnRef idx="2">
-            <a:schemeClr val="accent1"/>
-          </a:lnRef>
-          <a:fillRef idx="0">
-            <a:schemeClr val="accent1"/>
-          </a:fillRef>
-          <a:effectRef idx="1">
-            <a:schemeClr val="accent1"/>
-          </a:effectRef>
-          <a:fontRef idx="minor">
-            <a:schemeClr val="tx1"/>
-          </a:fontRef>
-        </p:style>
-      </p:cxnSp>
-    </p:spTree>
-    <p:extLst>
-      <p:ext uri="{BB962C8B-B14F-4D97-AF65-F5344CB8AC3E}">
-        <p14:creationId xmlns:p14="http://schemas.microsoft.com/office/powerpoint/2010/main" val="423446900"/>
-      </p:ext>
-    </p:extLst>
-  </p:cSld>
-  <p:clrMapOvr>
-    <a:masterClrMapping/>
-  </p:clrMapOvr>
-</p:sld>
-</file>
-
 <file path=ppt/slides/slide3.xml><?xml version="1.0" encoding="utf-8"?>
 <p:sld xmlns:a="http://schemas.openxmlformats.org/drawingml/2006/main" xmlns:r="http://schemas.openxmlformats.org/officeDocument/2006/relationships" xmlns:p="http://schemas.openxmlformats.org/presentationml/2006/main">
   <p:cSld>
@@ -30680,7 +32415,7 @@
             </a:pPr>
             <a:r>
               <a:rPr lang="es-ES" sz="5500" b="1" dirty="0"/>
-              <a:t>Criterios de evaluación Convocatoria de sexenios de investigación 2023-2025</a:t>
+              <a:t>Criterios de evaluación Convocatoria de sexenios de investigación 2025</a:t>
             </a:r>
           </a:p>
           <a:p>
@@ -33044,7 +34779,7 @@
             </a:pPr>
             <a:r>
               <a:rPr lang="es-ES" sz="5500" b="1" dirty="0"/>
-              <a:t>Criterios de evaluación Convocatoria de sexenios de investigación 2023-2025</a:t>
+              <a:t>Criterios de evaluación Convocatoria de sexenios de investigación 2025</a:t>
             </a:r>
           </a:p>
           <a:p>
@@ -34127,6 +35862,7 @@
                 <a:effectLst/>
                 <a:latin typeface="Arial" panose="020B0604020202020204" pitchFamily="34" charset="0"/>
                 <a:ea typeface="Arial" panose="020B0604020202020204" pitchFamily="34" charset="0"/>
+                <a:hlinkClick r:id="rId3"/>
               </a:rPr>
               <a:t>Presencia Española en Congresos Internacionales de Informática</a:t>
             </a:r>
@@ -34170,7 +35906,7 @@
                 <a:latin typeface="Arial" panose="020B0604020202020204" pitchFamily="34" charset="0"/>
                 <a:ea typeface="Arial" panose="020B0604020202020204" pitchFamily="34" charset="0"/>
               </a:rPr>
-              <a:t>Período 2001–2025, Antonio Vallecillo, SCIE, junio 2026</a:t>
+              <a:t>Período 2001–2025. A. Vallecillo y V. Viñals, SCIE, versión 1.0, octubre de 2026</a:t>
             </a:r>
             <a:endParaRPr lang="es-ES" sz="1200" dirty="0"/>
           </a:p>
@@ -34191,7 +35927,7 @@
           <p:nvPr/>
         </p:nvPicPr>
         <p:blipFill>
-          <a:blip r:embed="rId3" cstate="print">
+          <a:blip r:embed="rId4" cstate="print">
             <a:clrChange>
               <a:clrFrom>
                 <a:srgbClr val="FEFEFE"/>
@@ -34248,7 +35984,7 @@
           <p:nvPr/>
         </p:nvPicPr>
         <p:blipFill>
-          <a:blip r:embed="rId4" cstate="print">
+          <a:blip r:embed="rId5" cstate="print">
             <a:clrChange>
               <a:clrFrom>
                 <a:srgbClr val="FEFEFE"/>
@@ -34305,7 +36041,7 @@
           <p:nvPr/>
         </p:nvPicPr>
         <p:blipFill>
-          <a:blip r:embed="rId4" cstate="print">
+          <a:blip r:embed="rId5" cstate="print">
             <a:clrChange>
               <a:clrFrom>
                 <a:srgbClr val="FEFEFE"/>
@@ -38224,8 +39960,42 @@
           <a:lstStyle/>
           <a:p>
             <a:r>
-              <a:rPr lang="en-GB"/>
-              <a:t>Computing energy and power: efficiency and control</a:t>
+              <a:rPr lang="es-ES"/>
+              <a:t>Ecosistema Científico y Tecnológico Español</a:t>
+            </a:r>
+            <a:r>
+              <a:rPr lang="es-ES">
+                <a:latin typeface="Arial Black" panose="020B0A04020102020204" pitchFamily="34" charset="0"/>
+              </a:rPr>
+              <a:t> </a:t>
+            </a:r>
+            <a:r>
+              <a:rPr lang="es-ES">
+                <a:latin typeface="Arial Black" panose="020B0A04020102020204" pitchFamily="34" charset="0"/>
+                <a:sym typeface="Symbol" panose="05050102010706020507" pitchFamily="18" charset="2"/>
+              </a:rPr>
+              <a:t> </a:t>
+            </a:r>
+            <a:r>
+              <a:rPr lang="es-ES"/>
+              <a:t>COSCE 2026</a:t>
+            </a:r>
+            <a:r>
+              <a:rPr lang="es-ES">
+                <a:latin typeface="Arial Black" panose="020B0A04020102020204" pitchFamily="34" charset="0"/>
+              </a:rPr>
+              <a:t> </a:t>
+            </a:r>
+            <a:r>
+              <a:rPr lang="es-ES">
+                <a:latin typeface="Arial Black" panose="020B0A04020102020204" pitchFamily="34" charset="0"/>
+                <a:sym typeface="Symbol" panose="05050102010706020507" pitchFamily="18" charset="2"/>
+              </a:rPr>
+              <a:t> </a:t>
+            </a:r>
+            <a:r>
+              <a:rPr lang="es-ES"/>
+              <a:t>Transferencia y congresos en Informática</a:t>
             </a:r>
             <a:endParaRPr lang="es-ES" dirty="0"/>
           </a:p>
@@ -38285,13 +40055,13 @@
         </p:spPr>
         <p:txBody>
           <a:bodyPr>
-            <a:normAutofit lnSpcReduction="10000"/>
+            <a:normAutofit fontScale="92500" lnSpcReduction="10000"/>
           </a:bodyPr>
           <a:lstStyle/>
           <a:p>
             <a:r>
               <a:rPr lang="es-ES" dirty="0"/>
-              <a:t>International Core, un consorcio de sociedades que se inicia en 2021:</a:t>
+              <a:t>International Core, un consorcio de sociedades nacido del acuerdo de diciembre de 2023:</a:t>
             </a:r>
           </a:p>
           <a:p>
